--- a/ppt/01Introd.pptx
+++ b/ppt/01Introd.pptx
@@ -172,6 +172,82 @@
 </p:presentation>
 </file>
 
+<file path=ppt/changesInfos/changesInfo1.xml><?xml version="1.0" encoding="utf-8"?>
+<pc:chgInfo xmlns:a="http://schemas.openxmlformats.org/drawingml/2006/main" xmlns:r="http://schemas.openxmlformats.org/officeDocument/2006/relationships" xmlns:ac="http://schemas.microsoft.com/office/drawing/2013/main/command" xmlns:pc="http://schemas.microsoft.com/office/powerpoint/2013/main/command">
+  <pc:docChgLst>
+    <pc:chgData name="Camilo Daleles Rennó" userId="eac9aab033b2f962" providerId="LiveId" clId="{64033B45-E883-4C0D-9950-A0CEA7D2DB48}"/>
+    <pc:docChg chg="custSel modSld">
+      <pc:chgData name="Camilo Daleles Rennó" userId="eac9aab033b2f962" providerId="LiveId" clId="{64033B45-E883-4C0D-9950-A0CEA7D2DB48}" dt="2025-05-08T13:24:23.060" v="267" actId="20577"/>
+      <pc:docMkLst>
+        <pc:docMk/>
+      </pc:docMkLst>
+      <pc:sldChg chg="addSp delSp modSp mod">
+        <pc:chgData name="Camilo Daleles Rennó" userId="eac9aab033b2f962" providerId="LiveId" clId="{64033B45-E883-4C0D-9950-A0CEA7D2DB48}" dt="2025-05-08T13:24:23.060" v="267" actId="20577"/>
+        <pc:sldMkLst>
+          <pc:docMk/>
+          <pc:sldMk cId="0" sldId="345"/>
+        </pc:sldMkLst>
+        <pc:spChg chg="add mod">
+          <ac:chgData name="Camilo Daleles Rennó" userId="eac9aab033b2f962" providerId="LiveId" clId="{64033B45-E883-4C0D-9950-A0CEA7D2DB48}" dt="2025-05-08T13:24:23.060" v="267" actId="20577"/>
+          <ac:spMkLst>
+            <pc:docMk/>
+            <pc:sldMk cId="0" sldId="345"/>
+            <ac:spMk id="5" creationId="{EA66F297-70DE-516E-F0CB-9F2F383A57D3}"/>
+          </ac:spMkLst>
+        </pc:spChg>
+        <pc:spChg chg="mod">
+          <ac:chgData name="Camilo Daleles Rennó" userId="eac9aab033b2f962" providerId="LiveId" clId="{64033B45-E883-4C0D-9950-A0CEA7D2DB48}" dt="2025-05-07T16:15:04.471" v="1" actId="20577"/>
+          <ac:spMkLst>
+            <pc:docMk/>
+            <pc:sldMk cId="0" sldId="345"/>
+            <ac:spMk id="3074" creationId="{00000000-0000-0000-0000-000000000000}"/>
+          </ac:spMkLst>
+        </pc:spChg>
+      </pc:sldChg>
+      <pc:sldChg chg="modSp modAnim">
+        <pc:chgData name="Camilo Daleles Rennó" userId="eac9aab033b2f962" providerId="LiveId" clId="{64033B45-E883-4C0D-9950-A0CEA7D2DB48}" dt="2025-05-08T13:14:34.934" v="139" actId="20577"/>
+        <pc:sldMkLst>
+          <pc:docMk/>
+          <pc:sldMk cId="4128775123" sldId="376"/>
+        </pc:sldMkLst>
+        <pc:spChg chg="mod">
+          <ac:chgData name="Camilo Daleles Rennó" userId="eac9aab033b2f962" providerId="LiveId" clId="{64033B45-E883-4C0D-9950-A0CEA7D2DB48}" dt="2025-05-08T13:14:34.934" v="139" actId="20577"/>
+          <ac:spMkLst>
+            <pc:docMk/>
+            <pc:sldMk cId="4128775123" sldId="376"/>
+            <ac:spMk id="4099" creationId="{00000000-0000-0000-0000-000000000000}"/>
+          </ac:spMkLst>
+        </pc:spChg>
+      </pc:sldChg>
+    </pc:docChg>
+  </pc:docChgLst>
+  <pc:docChgLst>
+    <pc:chgData name="Camilo Daleles Rennó" userId="eac9aab033b2f962" providerId="LiveId" clId="{15899064-E2EB-4EF7-9DCA-269F6DC9ED26}"/>
+    <pc:docChg chg="modSld">
+      <pc:chgData name="Camilo Daleles Rennó" userId="eac9aab033b2f962" providerId="LiveId" clId="{15899064-E2EB-4EF7-9DCA-269F6DC9ED26}" dt="2025-06-09T13:05:20.441" v="11" actId="20577"/>
+      <pc:docMkLst>
+        <pc:docMk/>
+      </pc:docMkLst>
+      <pc:sldChg chg="modSp mod">
+        <pc:chgData name="Camilo Daleles Rennó" userId="eac9aab033b2f962" providerId="LiveId" clId="{15899064-E2EB-4EF7-9DCA-269F6DC9ED26}" dt="2025-06-09T13:05:20.441" v="11" actId="20577"/>
+        <pc:sldMkLst>
+          <pc:docMk/>
+          <pc:sldMk cId="0" sldId="345"/>
+        </pc:sldMkLst>
+        <pc:spChg chg="mod">
+          <ac:chgData name="Camilo Daleles Rennó" userId="eac9aab033b2f962" providerId="LiveId" clId="{15899064-E2EB-4EF7-9DCA-269F6DC9ED26}" dt="2025-06-09T13:05:20.441" v="11" actId="20577"/>
+          <ac:spMkLst>
+            <pc:docMk/>
+            <pc:sldMk cId="0" sldId="345"/>
+            <ac:spMk id="3074" creationId="{00000000-0000-0000-0000-000000000000}"/>
+          </ac:spMkLst>
+        </pc:spChg>
+      </pc:sldChg>
+    </pc:docChg>
+  </pc:docChgLst>
+</pc:chgInfo>
+</file>
+
 <file path=ppt/notesMasters/notesMaster1.xml><?xml version="1.0" encoding="utf-8"?>
 <p:notesMaster xmlns:a="http://schemas.openxmlformats.org/drawingml/2006/main" xmlns:r="http://schemas.openxmlformats.org/officeDocument/2006/relationships" xmlns:p="http://schemas.openxmlformats.org/presentationml/2006/main">
   <p:cSld>
@@ -220,14 +296,16 @@
           <a:bodyPr vert="horz" lIns="91440" tIns="45720" rIns="91440" bIns="45720" rtlCol="0"/>
           <a:lstStyle>
             <a:lvl1pPr algn="l">
-              <a:defRPr sz="1200"/>
+              <a:defRPr sz="1200">
+                <a:latin typeface="Tahoma" panose="020B0604030504040204" pitchFamily="34" charset="0"/>
+              </a:defRPr>
             </a:lvl1pPr>
           </a:lstStyle>
           <a:p>
             <a:pPr>
               <a:defRPr/>
             </a:pPr>
-            <a:endParaRPr lang="pt-BR"/>
+            <a:endParaRPr lang="pt-BR" dirty="0"/>
           </a:p>
         </p:txBody>
       </p:sp>
@@ -254,7 +332,9 @@
           <a:bodyPr vert="horz" lIns="91440" tIns="45720" rIns="91440" bIns="45720" rtlCol="0"/>
           <a:lstStyle>
             <a:lvl1pPr algn="r">
-              <a:defRPr sz="1200"/>
+              <a:defRPr sz="1200">
+                <a:latin typeface="Tahoma" panose="020B0604030504040204" pitchFamily="34" charset="0"/>
+              </a:defRPr>
             </a:lvl1pPr>
           </a:lstStyle>
           <a:p>
@@ -262,13 +342,13 @@
               <a:defRPr/>
             </a:pPr>
             <a:fld id="{13D13E68-3F65-4956-B623-CDA8FD0840EC}" type="datetimeFigureOut">
-              <a:rPr lang="pt-BR"/>
+              <a:rPr lang="pt-BR" smtClean="0"/>
               <a:pPr>
                 <a:defRPr/>
               </a:pPr>
-              <a:t>24/05/2024</a:t>
+              <a:t>09/06/2025</a:t>
             </a:fld>
-            <a:endParaRPr lang="pt-BR"/>
+            <a:endParaRPr lang="pt-BR" dirty="0"/>
           </a:p>
         </p:txBody>
       </p:sp>
@@ -302,7 +382,7 @@
           <a:lstStyle/>
           <a:p>
             <a:pPr lvl="0"/>
-            <a:endParaRPr lang="pt-BR" noProof="0" smtClean="0"/>
+            <a:endParaRPr lang="pt-BR" noProof="0"/>
           </a:p>
         </p:txBody>
       </p:sp>
@@ -331,35 +411,35 @@
           <a:p>
             <a:pPr lvl="0"/>
             <a:r>
-              <a:rPr lang="pt-BR" noProof="0" smtClean="0"/>
+              <a:rPr lang="pt-BR" noProof="0"/>
               <a:t>Clique para editar o texto mestre</a:t>
             </a:r>
           </a:p>
           <a:p>
             <a:pPr lvl="1"/>
             <a:r>
-              <a:rPr lang="pt-BR" noProof="0" smtClean="0"/>
+              <a:rPr lang="pt-BR" noProof="0"/>
               <a:t>Segundo nível</a:t>
             </a:r>
           </a:p>
           <a:p>
             <a:pPr lvl="2"/>
             <a:r>
-              <a:rPr lang="pt-BR" noProof="0" smtClean="0"/>
+              <a:rPr lang="pt-BR" noProof="0"/>
               <a:t>Terceiro nível</a:t>
             </a:r>
           </a:p>
           <a:p>
             <a:pPr lvl="3"/>
             <a:r>
-              <a:rPr lang="pt-BR" noProof="0" smtClean="0"/>
+              <a:rPr lang="pt-BR" noProof="0"/>
               <a:t>Quarto nível</a:t>
             </a:r>
           </a:p>
           <a:p>
             <a:pPr lvl="4"/>
             <a:r>
-              <a:rPr lang="pt-BR" noProof="0" smtClean="0"/>
+              <a:rPr lang="pt-BR" noProof="0"/>
               <a:t>Quinto nível</a:t>
             </a:r>
           </a:p>
@@ -388,14 +468,16 @@
           <a:bodyPr vert="horz" lIns="91440" tIns="45720" rIns="91440" bIns="45720" rtlCol="0" anchor="b"/>
           <a:lstStyle>
             <a:lvl1pPr algn="l">
-              <a:defRPr sz="1200"/>
+              <a:defRPr sz="1200">
+                <a:latin typeface="Tahoma" panose="020B0604030504040204" pitchFamily="34" charset="0"/>
+              </a:defRPr>
             </a:lvl1pPr>
           </a:lstStyle>
           <a:p>
             <a:pPr>
               <a:defRPr/>
             </a:pPr>
-            <a:endParaRPr lang="pt-BR"/>
+            <a:endParaRPr lang="pt-BR" dirty="0"/>
           </a:p>
         </p:txBody>
       </p:sp>
@@ -422,7 +504,9 @@
           <a:bodyPr vert="horz" lIns="91440" tIns="45720" rIns="91440" bIns="45720" rtlCol="0" anchor="b"/>
           <a:lstStyle>
             <a:lvl1pPr algn="r">
-              <a:defRPr sz="1200"/>
+              <a:defRPr sz="1200">
+                <a:latin typeface="Tahoma" panose="020B0604030504040204" pitchFamily="34" charset="0"/>
+              </a:defRPr>
             </a:lvl1pPr>
           </a:lstStyle>
           <a:p>
@@ -430,13 +514,13 @@
               <a:defRPr/>
             </a:pPr>
             <a:fld id="{B282321D-B8BF-4AD2-B522-67950E411EA1}" type="slidenum">
-              <a:rPr lang="pt-BR"/>
+              <a:rPr lang="pt-BR" smtClean="0"/>
               <a:pPr>
                 <a:defRPr/>
               </a:pPr>
               <a:t>‹nº›</a:t>
             </a:fld>
-            <a:endParaRPr lang="pt-BR"/>
+            <a:endParaRPr lang="pt-BR" dirty="0"/>
           </a:p>
         </p:txBody>
       </p:sp>
@@ -611,10 +695,9 @@
           <a:lstStyle/>
           <a:p>
             <a:r>
-              <a:rPr lang="pt-BR" smtClean="0"/>
+              <a:rPr lang="pt-BR"/>
               <a:t>Clique para editar o estilo do título mestre</a:t>
             </a:r>
-            <a:endParaRPr lang="pt-BR"/>
           </a:p>
         </p:txBody>
       </p:sp>
@@ -676,10 +759,9 @@
           </a:lstStyle>
           <a:p>
             <a:r>
-              <a:rPr lang="pt-BR" smtClean="0"/>
+              <a:rPr lang="pt-BR"/>
               <a:t>Clique para editar o estilo do subtítulo mestre</a:t>
             </a:r>
-            <a:endParaRPr lang="pt-BR"/>
           </a:p>
         </p:txBody>
       </p:sp>
@@ -820,10 +902,9 @@
           <a:lstStyle/>
           <a:p>
             <a:r>
-              <a:rPr lang="pt-BR" smtClean="0"/>
+              <a:rPr lang="pt-BR"/>
               <a:t>Clique para editar o estilo do título mestre</a:t>
             </a:r>
-            <a:endParaRPr lang="pt-BR"/>
           </a:p>
         </p:txBody>
       </p:sp>
@@ -844,38 +925,37 @@
           <a:p>
             <a:pPr lvl="0"/>
             <a:r>
-              <a:rPr lang="pt-BR" smtClean="0"/>
+              <a:rPr lang="pt-BR"/>
               <a:t>Clique para editar os estilos do texto mestre</a:t>
             </a:r>
           </a:p>
           <a:p>
             <a:pPr lvl="1"/>
             <a:r>
-              <a:rPr lang="pt-BR" smtClean="0"/>
+              <a:rPr lang="pt-BR"/>
               <a:t>Segundo nível</a:t>
             </a:r>
           </a:p>
           <a:p>
             <a:pPr lvl="2"/>
             <a:r>
-              <a:rPr lang="pt-BR" smtClean="0"/>
+              <a:rPr lang="pt-BR"/>
               <a:t>Terceiro nível</a:t>
             </a:r>
           </a:p>
           <a:p>
             <a:pPr lvl="3"/>
             <a:r>
-              <a:rPr lang="pt-BR" smtClean="0"/>
+              <a:rPr lang="pt-BR"/>
               <a:t>Quarto nível</a:t>
             </a:r>
           </a:p>
           <a:p>
             <a:pPr lvl="4"/>
             <a:r>
-              <a:rPr lang="pt-BR" smtClean="0"/>
+              <a:rPr lang="pt-BR"/>
               <a:t>Quinto nível</a:t>
             </a:r>
-            <a:endParaRPr lang="pt-BR"/>
           </a:p>
         </p:txBody>
       </p:sp>
@@ -1021,10 +1101,9 @@
           <a:lstStyle/>
           <a:p>
             <a:r>
-              <a:rPr lang="pt-BR" smtClean="0"/>
+              <a:rPr lang="pt-BR"/>
               <a:t>Clique para editar o estilo do título mestre</a:t>
             </a:r>
-            <a:endParaRPr lang="pt-BR"/>
           </a:p>
         </p:txBody>
       </p:sp>
@@ -1050,38 +1129,37 @@
           <a:p>
             <a:pPr lvl="0"/>
             <a:r>
-              <a:rPr lang="pt-BR" smtClean="0"/>
+              <a:rPr lang="pt-BR"/>
               <a:t>Clique para editar os estilos do texto mestre</a:t>
             </a:r>
           </a:p>
           <a:p>
             <a:pPr lvl="1"/>
             <a:r>
-              <a:rPr lang="pt-BR" smtClean="0"/>
+              <a:rPr lang="pt-BR"/>
               <a:t>Segundo nível</a:t>
             </a:r>
           </a:p>
           <a:p>
             <a:pPr lvl="2"/>
             <a:r>
-              <a:rPr lang="pt-BR" smtClean="0"/>
+              <a:rPr lang="pt-BR"/>
               <a:t>Terceiro nível</a:t>
             </a:r>
           </a:p>
           <a:p>
             <a:pPr lvl="3"/>
             <a:r>
-              <a:rPr lang="pt-BR" smtClean="0"/>
+              <a:rPr lang="pt-BR"/>
               <a:t>Quarto nível</a:t>
             </a:r>
           </a:p>
           <a:p>
             <a:pPr lvl="4"/>
             <a:r>
-              <a:rPr lang="pt-BR" smtClean="0"/>
+              <a:rPr lang="pt-BR"/>
               <a:t>Quinto nível</a:t>
             </a:r>
-            <a:endParaRPr lang="pt-BR"/>
           </a:p>
         </p:txBody>
       </p:sp>
@@ -1222,10 +1300,9 @@
           <a:lstStyle/>
           <a:p>
             <a:r>
-              <a:rPr lang="pt-BR" smtClean="0"/>
+              <a:rPr lang="pt-BR"/>
               <a:t>Clique para editar o estilo do título mestre</a:t>
             </a:r>
-            <a:endParaRPr lang="pt-BR"/>
           </a:p>
         </p:txBody>
       </p:sp>
@@ -1246,38 +1323,37 @@
           <a:p>
             <a:pPr lvl="0"/>
             <a:r>
-              <a:rPr lang="pt-BR" smtClean="0"/>
+              <a:rPr lang="pt-BR"/>
               <a:t>Clique para editar os estilos do texto mestre</a:t>
             </a:r>
           </a:p>
           <a:p>
             <a:pPr lvl="1"/>
             <a:r>
-              <a:rPr lang="pt-BR" smtClean="0"/>
+              <a:rPr lang="pt-BR"/>
               <a:t>Segundo nível</a:t>
             </a:r>
           </a:p>
           <a:p>
             <a:pPr lvl="2"/>
             <a:r>
-              <a:rPr lang="pt-BR" smtClean="0"/>
+              <a:rPr lang="pt-BR"/>
               <a:t>Terceiro nível</a:t>
             </a:r>
           </a:p>
           <a:p>
             <a:pPr lvl="3"/>
             <a:r>
-              <a:rPr lang="pt-BR" smtClean="0"/>
+              <a:rPr lang="pt-BR"/>
               <a:t>Quarto nível</a:t>
             </a:r>
           </a:p>
           <a:p>
             <a:pPr lvl="4"/>
             <a:r>
-              <a:rPr lang="pt-BR" smtClean="0"/>
+              <a:rPr lang="pt-BR"/>
               <a:t>Quinto nível</a:t>
             </a:r>
-            <a:endParaRPr lang="pt-BR"/>
           </a:p>
         </p:txBody>
       </p:sp>
@@ -1354,7 +1430,7 @@
           <a:lstStyle>
             <a:lvl1pPr>
               <a:defRPr>
-                <a:latin typeface="+mn-lt"/>
+                <a:latin typeface="Tahoma" panose="020B0604030504040204" pitchFamily="34" charset="0"/>
               </a:defRPr>
             </a:lvl1pPr>
           </a:lstStyle>
@@ -1363,13 +1439,13 @@
               <a:defRPr/>
             </a:pPr>
             <a:fld id="{B75E3667-2AED-4289-B46A-D8A255B210A4}" type="slidenum">
-              <a:rPr lang="pt-BR"/>
+              <a:rPr lang="pt-BR" smtClean="0"/>
               <a:pPr>
                 <a:defRPr/>
               </a:pPr>
               <a:t>‹nº›</a:t>
             </a:fld>
-            <a:endParaRPr lang="pt-BR"/>
+            <a:endParaRPr lang="pt-BR" dirty="0"/>
           </a:p>
         </p:txBody>
       </p:sp>
@@ -1428,10 +1504,9 @@
           </a:lstStyle>
           <a:p>
             <a:r>
-              <a:rPr lang="pt-BR" smtClean="0"/>
+              <a:rPr lang="pt-BR"/>
               <a:t>Clique para editar o estilo do título mestre</a:t>
             </a:r>
-            <a:endParaRPr lang="pt-BR"/>
           </a:p>
         </p:txBody>
       </p:sp>
@@ -1494,7 +1569,7 @@
           <a:p>
             <a:pPr lvl="0"/>
             <a:r>
-              <a:rPr lang="pt-BR" smtClean="0"/>
+              <a:rPr lang="pt-BR"/>
               <a:t>Clique para editar os estilos do texto mestre</a:t>
             </a:r>
           </a:p>
@@ -1637,10 +1712,9 @@
           <a:lstStyle/>
           <a:p>
             <a:r>
-              <a:rPr lang="pt-BR" smtClean="0"/>
+              <a:rPr lang="pt-BR"/>
               <a:t>Clique para editar o estilo do título mestre</a:t>
             </a:r>
-            <a:endParaRPr lang="pt-BR"/>
           </a:p>
         </p:txBody>
       </p:sp>
@@ -1694,38 +1768,37 @@
           <a:p>
             <a:pPr lvl="0"/>
             <a:r>
-              <a:rPr lang="pt-BR" smtClean="0"/>
+              <a:rPr lang="pt-BR"/>
               <a:t>Clique para editar os estilos do texto mestre</a:t>
             </a:r>
           </a:p>
           <a:p>
             <a:pPr lvl="1"/>
             <a:r>
-              <a:rPr lang="pt-BR" smtClean="0"/>
+              <a:rPr lang="pt-BR"/>
               <a:t>Segundo nível</a:t>
             </a:r>
           </a:p>
           <a:p>
             <a:pPr lvl="2"/>
             <a:r>
-              <a:rPr lang="pt-BR" smtClean="0"/>
+              <a:rPr lang="pt-BR"/>
               <a:t>Terceiro nível</a:t>
             </a:r>
           </a:p>
           <a:p>
             <a:pPr lvl="3"/>
             <a:r>
-              <a:rPr lang="pt-BR" smtClean="0"/>
+              <a:rPr lang="pt-BR"/>
               <a:t>Quarto nível</a:t>
             </a:r>
           </a:p>
           <a:p>
             <a:pPr lvl="4"/>
             <a:r>
-              <a:rPr lang="pt-BR" smtClean="0"/>
+              <a:rPr lang="pt-BR"/>
               <a:t>Quinto nível</a:t>
             </a:r>
-            <a:endParaRPr lang="pt-BR"/>
           </a:p>
         </p:txBody>
       </p:sp>
@@ -1779,38 +1852,37 @@
           <a:p>
             <a:pPr lvl="0"/>
             <a:r>
-              <a:rPr lang="pt-BR" smtClean="0"/>
+              <a:rPr lang="pt-BR"/>
               <a:t>Clique para editar os estilos do texto mestre</a:t>
             </a:r>
           </a:p>
           <a:p>
             <a:pPr lvl="1"/>
             <a:r>
-              <a:rPr lang="pt-BR" smtClean="0"/>
+              <a:rPr lang="pt-BR"/>
               <a:t>Segundo nível</a:t>
             </a:r>
           </a:p>
           <a:p>
             <a:pPr lvl="2"/>
             <a:r>
-              <a:rPr lang="pt-BR" smtClean="0"/>
+              <a:rPr lang="pt-BR"/>
               <a:t>Terceiro nível</a:t>
             </a:r>
           </a:p>
           <a:p>
             <a:pPr lvl="3"/>
             <a:r>
-              <a:rPr lang="pt-BR" smtClean="0"/>
+              <a:rPr lang="pt-BR"/>
               <a:t>Quarto nível</a:t>
             </a:r>
           </a:p>
           <a:p>
             <a:pPr lvl="4"/>
             <a:r>
-              <a:rPr lang="pt-BR" smtClean="0"/>
+              <a:rPr lang="pt-BR"/>
               <a:t>Quinto nível</a:t>
             </a:r>
-            <a:endParaRPr lang="pt-BR"/>
           </a:p>
         </p:txBody>
       </p:sp>
@@ -1960,10 +2032,9 @@
           </a:lstStyle>
           <a:p>
             <a:r>
-              <a:rPr lang="pt-BR" smtClean="0"/>
+              <a:rPr lang="pt-BR"/>
               <a:t>Clique para editar o estilo do título mestre</a:t>
             </a:r>
-            <a:endParaRPr lang="pt-BR"/>
           </a:p>
         </p:txBody>
       </p:sp>
@@ -2026,7 +2097,7 @@
           <a:p>
             <a:pPr lvl="0"/>
             <a:r>
-              <a:rPr lang="pt-BR" smtClean="0"/>
+              <a:rPr lang="pt-BR"/>
               <a:t>Clique para editar os estilos do texto mestre</a:t>
             </a:r>
           </a:p>
@@ -2082,38 +2153,37 @@
           <a:p>
             <a:pPr lvl="0"/>
             <a:r>
-              <a:rPr lang="pt-BR" smtClean="0"/>
+              <a:rPr lang="pt-BR"/>
               <a:t>Clique para editar os estilos do texto mestre</a:t>
             </a:r>
           </a:p>
           <a:p>
             <a:pPr lvl="1"/>
             <a:r>
-              <a:rPr lang="pt-BR" smtClean="0"/>
+              <a:rPr lang="pt-BR"/>
               <a:t>Segundo nível</a:t>
             </a:r>
           </a:p>
           <a:p>
             <a:pPr lvl="2"/>
             <a:r>
-              <a:rPr lang="pt-BR" smtClean="0"/>
+              <a:rPr lang="pt-BR"/>
               <a:t>Terceiro nível</a:t>
             </a:r>
           </a:p>
           <a:p>
             <a:pPr lvl="3"/>
             <a:r>
-              <a:rPr lang="pt-BR" smtClean="0"/>
+              <a:rPr lang="pt-BR"/>
               <a:t>Quarto nível</a:t>
             </a:r>
           </a:p>
           <a:p>
             <a:pPr lvl="4"/>
             <a:r>
-              <a:rPr lang="pt-BR" smtClean="0"/>
+              <a:rPr lang="pt-BR"/>
               <a:t>Quinto nível</a:t>
             </a:r>
-            <a:endParaRPr lang="pt-BR"/>
           </a:p>
         </p:txBody>
       </p:sp>
@@ -2176,7 +2246,7 @@
           <a:p>
             <a:pPr lvl="0"/>
             <a:r>
-              <a:rPr lang="pt-BR" smtClean="0"/>
+              <a:rPr lang="pt-BR"/>
               <a:t>Clique para editar os estilos do texto mestre</a:t>
             </a:r>
           </a:p>
@@ -2232,38 +2302,37 @@
           <a:p>
             <a:pPr lvl="0"/>
             <a:r>
-              <a:rPr lang="pt-BR" smtClean="0"/>
+              <a:rPr lang="pt-BR"/>
               <a:t>Clique para editar os estilos do texto mestre</a:t>
             </a:r>
           </a:p>
           <a:p>
             <a:pPr lvl="1"/>
             <a:r>
-              <a:rPr lang="pt-BR" smtClean="0"/>
+              <a:rPr lang="pt-BR"/>
               <a:t>Segundo nível</a:t>
             </a:r>
           </a:p>
           <a:p>
             <a:pPr lvl="2"/>
             <a:r>
-              <a:rPr lang="pt-BR" smtClean="0"/>
+              <a:rPr lang="pt-BR"/>
               <a:t>Terceiro nível</a:t>
             </a:r>
           </a:p>
           <a:p>
             <a:pPr lvl="3"/>
             <a:r>
-              <a:rPr lang="pt-BR" smtClean="0"/>
+              <a:rPr lang="pt-BR"/>
               <a:t>Quarto nível</a:t>
             </a:r>
           </a:p>
           <a:p>
             <a:pPr lvl="4"/>
             <a:r>
-              <a:rPr lang="pt-BR" smtClean="0"/>
+              <a:rPr lang="pt-BR"/>
               <a:t>Quinto nível</a:t>
             </a:r>
-            <a:endParaRPr lang="pt-BR"/>
           </a:p>
         </p:txBody>
       </p:sp>
@@ -2404,10 +2473,9 @@
           <a:lstStyle/>
           <a:p>
             <a:r>
-              <a:rPr lang="pt-BR" smtClean="0"/>
+              <a:rPr lang="pt-BR"/>
               <a:t>Clique para editar o estilo do título mestre</a:t>
             </a:r>
-            <a:endParaRPr lang="pt-BR"/>
           </a:p>
         </p:txBody>
       </p:sp>
@@ -2678,10 +2746,9 @@
           </a:lstStyle>
           <a:p>
             <a:r>
-              <a:rPr lang="pt-BR" smtClean="0"/>
+              <a:rPr lang="pt-BR"/>
               <a:t>Clique para editar o estilo do título mestre</a:t>
             </a:r>
-            <a:endParaRPr lang="pt-BR"/>
           </a:p>
         </p:txBody>
       </p:sp>
@@ -2735,38 +2802,37 @@
           <a:p>
             <a:pPr lvl="0"/>
             <a:r>
-              <a:rPr lang="pt-BR" smtClean="0"/>
+              <a:rPr lang="pt-BR"/>
               <a:t>Clique para editar os estilos do texto mestre</a:t>
             </a:r>
           </a:p>
           <a:p>
             <a:pPr lvl="1"/>
             <a:r>
-              <a:rPr lang="pt-BR" smtClean="0"/>
+              <a:rPr lang="pt-BR"/>
               <a:t>Segundo nível</a:t>
             </a:r>
           </a:p>
           <a:p>
             <a:pPr lvl="2"/>
             <a:r>
-              <a:rPr lang="pt-BR" smtClean="0"/>
+              <a:rPr lang="pt-BR"/>
               <a:t>Terceiro nível</a:t>
             </a:r>
           </a:p>
           <a:p>
             <a:pPr lvl="3"/>
             <a:r>
-              <a:rPr lang="pt-BR" smtClean="0"/>
+              <a:rPr lang="pt-BR"/>
               <a:t>Quarto nível</a:t>
             </a:r>
           </a:p>
           <a:p>
             <a:pPr lvl="4"/>
             <a:r>
-              <a:rPr lang="pt-BR" smtClean="0"/>
+              <a:rPr lang="pt-BR"/>
               <a:t>Quinto nível</a:t>
             </a:r>
-            <a:endParaRPr lang="pt-BR"/>
           </a:p>
         </p:txBody>
       </p:sp>
@@ -2829,7 +2895,7 @@
           <a:p>
             <a:pPr lvl="0"/>
             <a:r>
-              <a:rPr lang="pt-BR" smtClean="0"/>
+              <a:rPr lang="pt-BR"/>
               <a:t>Clique para editar os estilos do texto mestre</a:t>
             </a:r>
           </a:p>
@@ -2981,10 +3047,9 @@
           </a:lstStyle>
           <a:p>
             <a:r>
-              <a:rPr lang="pt-BR" smtClean="0"/>
+              <a:rPr lang="pt-BR"/>
               <a:t>Clique para editar o estilo do título mestre</a:t>
             </a:r>
-            <a:endParaRPr lang="pt-BR"/>
           </a:p>
         </p:txBody>
       </p:sp>
@@ -3109,7 +3174,7 @@
           <a:p>
             <a:pPr lvl="0"/>
             <a:r>
-              <a:rPr lang="pt-BR" smtClean="0"/>
+              <a:rPr lang="pt-BR"/>
               <a:t>Clique para editar os estilos do texto mestre</a:t>
             </a:r>
           </a:p>
@@ -3281,7 +3346,7 @@
           <a:p>
             <a:pPr lvl="0"/>
             <a:r>
-              <a:rPr lang="pt-BR" smtClean="0"/>
+              <a:rPr lang="pt-BR" dirty="0"/>
               <a:t>Clique para editar o estilo do título mestre</a:t>
             </a:r>
           </a:p>
@@ -3339,35 +3404,35 @@
           <a:p>
             <a:pPr lvl="0"/>
             <a:r>
-              <a:rPr lang="pt-BR" altLang="pt-BR" smtClean="0"/>
+              <a:rPr lang="pt-BR" altLang="pt-BR" dirty="0"/>
               <a:t>Clique para editar os estilos do texto mestre</a:t>
             </a:r>
           </a:p>
           <a:p>
             <a:pPr lvl="1"/>
             <a:r>
-              <a:rPr lang="pt-BR" altLang="pt-BR" smtClean="0"/>
+              <a:rPr lang="pt-BR" altLang="pt-BR" dirty="0"/>
               <a:t>Segundo nível</a:t>
             </a:r>
           </a:p>
           <a:p>
             <a:pPr lvl="2"/>
             <a:r>
-              <a:rPr lang="pt-BR" altLang="pt-BR" smtClean="0"/>
+              <a:rPr lang="pt-BR" altLang="pt-BR" dirty="0"/>
               <a:t>Terceiro nível</a:t>
             </a:r>
           </a:p>
           <a:p>
             <a:pPr lvl="3"/>
             <a:r>
-              <a:rPr lang="pt-BR" altLang="pt-BR" smtClean="0"/>
+              <a:rPr lang="pt-BR" altLang="pt-BR" dirty="0"/>
               <a:t>Quarto nível</a:t>
             </a:r>
           </a:p>
           <a:p>
             <a:pPr lvl="4"/>
             <a:r>
-              <a:rPr lang="pt-BR" altLang="pt-BR" smtClean="0"/>
+              <a:rPr lang="pt-BR" altLang="pt-BR" dirty="0"/>
               <a:t>Quinto nível</a:t>
             </a:r>
           </a:p>
@@ -3580,7 +3645,8 @@
             <a:pPr>
               <a:defRPr/>
             </a:pPr>
-            <a:endParaRPr lang="pt-BR">
+            <a:endParaRPr lang="pt-BR" dirty="0">
+              <a:latin typeface="Tahoma" panose="020B0604030504040204" pitchFamily="34" charset="0"/>
               <a:cs typeface="+mn-cs"/>
             </a:endParaRPr>
           </a:p>
@@ -3621,7 +3687,7 @@
               <a:srgbClr val="C0C0C0"/>
             </a:outerShdw>
           </a:effectLst>
-          <a:latin typeface="+mj-lt"/>
+          <a:latin typeface="Tahoma" panose="020B0604030504040204" pitchFamily="34" charset="0"/>
           <a:ea typeface="+mj-ea"/>
           <a:cs typeface="+mj-cs"/>
         </a:defRPr>
@@ -3792,7 +3858,7 @@
           <a:solidFill>
             <a:schemeClr val="tx1"/>
           </a:solidFill>
-          <a:latin typeface="+mn-lt"/>
+          <a:latin typeface="Tahoma" panose="020B0604030504040204" pitchFamily="34" charset="0"/>
           <a:ea typeface="+mn-ea"/>
           <a:cs typeface="+mn-cs"/>
         </a:defRPr>
@@ -3809,7 +3875,7 @@
           <a:solidFill>
             <a:schemeClr val="tx1"/>
           </a:solidFill>
-          <a:latin typeface="+mn-lt"/>
+          <a:latin typeface="Tahoma" panose="020B0604030504040204" pitchFamily="34" charset="0"/>
         </a:defRPr>
       </a:lvl2pPr>
       <a:lvl3pPr marL="1143000" indent="-228600" algn="l" rtl="0" eaLnBrk="0" fontAlgn="base" hangingPunct="0">
@@ -3824,7 +3890,7 @@
           <a:solidFill>
             <a:schemeClr val="tx1"/>
           </a:solidFill>
-          <a:latin typeface="+mn-lt"/>
+          <a:latin typeface="Tahoma" panose="020B0604030504040204" pitchFamily="34" charset="0"/>
         </a:defRPr>
       </a:lvl3pPr>
       <a:lvl4pPr marL="1600200" indent="-228600" algn="l" rtl="0" eaLnBrk="0" fontAlgn="base" hangingPunct="0">
@@ -3839,7 +3905,7 @@
           <a:solidFill>
             <a:schemeClr val="tx1"/>
           </a:solidFill>
-          <a:latin typeface="+mn-lt"/>
+          <a:latin typeface="Tahoma" panose="020B0604030504040204" pitchFamily="34" charset="0"/>
         </a:defRPr>
       </a:lvl4pPr>
       <a:lvl5pPr marL="2057400" indent="-228600" algn="l" rtl="0" eaLnBrk="0" fontAlgn="base" hangingPunct="0">
@@ -3854,7 +3920,7 @@
           <a:solidFill>
             <a:schemeClr val="tx1"/>
           </a:solidFill>
-          <a:latin typeface="+mn-lt"/>
+          <a:latin typeface="Tahoma" panose="020B0604030504040204" pitchFamily="34" charset="0"/>
         </a:defRPr>
       </a:lvl5pPr>
       <a:lvl6pPr marL="2514600" indent="-228600" algn="l" rtl="0" fontAlgn="base">
@@ -4058,51 +4124,27 @@
               <a:defRPr/>
             </a:pPr>
             <a:r>
-              <a:rPr lang="pt-BR" sz="2400" dirty="0" smtClean="0"/>
+              <a:rPr lang="pt-BR" sz="2400" dirty="0"/>
               <a:t>Estatística: Aplicação ao Sensoriamento Remoto</a:t>
             </a:r>
             <a:br>
-              <a:rPr lang="pt-BR" sz="2400" dirty="0" smtClean="0"/>
+              <a:rPr lang="pt-BR" sz="2400" dirty="0"/>
+            </a:br>
+            <a:br>
+              <a:rPr lang="pt-BR" sz="2400" dirty="0"/>
             </a:br>
             <a:r>
-              <a:rPr lang="pt-BR" sz="2400" dirty="0" smtClean="0"/>
-              <a:t/>
+              <a:rPr lang="pt-BR" sz="2400"/>
+              <a:t>SER 204</a:t>
             </a:r>
             <a:br>
-              <a:rPr lang="pt-BR" sz="2400" dirty="0" smtClean="0"/>
+              <a:rPr lang="pt-BR" sz="2400" dirty="0"/>
+            </a:br>
+            <a:br>
+              <a:rPr lang="pt-BR" sz="2400" dirty="0"/>
             </a:br>
             <a:r>
-              <a:rPr lang="pt-BR" sz="2400" dirty="0" smtClean="0"/>
-              <a:t>SER 204 </a:t>
-            </a:r>
-            <a:r>
               <a:rPr lang="pt-BR" sz="2400" dirty="0"/>
-              <a:t>- </a:t>
-            </a:r>
-            <a:r>
-              <a:rPr lang="pt-BR" sz="2400"/>
-              <a:t>ANO  </a:t>
-            </a:r>
-            <a:r>
-              <a:rPr lang="pt-BR" sz="2400" smtClean="0"/>
-              <a:t>2024</a:t>
-            </a:r>
-            <a:r>
-              <a:rPr lang="pt-BR" sz="2400" dirty="0" smtClean="0"/>
-              <a:t/>
-            </a:r>
-            <a:br>
-              <a:rPr lang="pt-BR" sz="2400" dirty="0" smtClean="0"/>
-            </a:br>
-            <a:r>
-              <a:rPr lang="pt-BR" sz="2400" dirty="0" smtClean="0"/>
-              <a:t/>
-            </a:r>
-            <a:br>
-              <a:rPr lang="pt-BR" sz="2400" dirty="0" smtClean="0"/>
-            </a:br>
-            <a:r>
-              <a:rPr lang="pt-BR" sz="2400" dirty="0" smtClean="0"/>
               <a:t>Introdução</a:t>
             </a:r>
           </a:p>
@@ -4110,7 +4152,13 @@
       </p:sp>
       <p:sp>
         <p:nvSpPr>
-          <p:cNvPr id="3" name="Rectangle 3"/>
+          <p:cNvPr id="5" name="Rectangle 3">
+            <a:extLst>
+              <a:ext uri="{FF2B5EF4-FFF2-40B4-BE49-F238E27FC236}">
+                <a16:creationId xmlns:a16="http://schemas.microsoft.com/office/drawing/2014/main" id="{EA66F297-70DE-516E-F0CB-9F2F383A57D3}"/>
+              </a:ext>
+            </a:extLst>
+          </p:cNvPr>
           <p:cNvSpPr txBox="1">
             <a:spLocks noChangeArrowheads="1"/>
           </p:cNvSpPr>
@@ -4118,8 +4166,8 @@
         </p:nvSpPr>
         <p:spPr bwMode="auto">
           <a:xfrm>
-            <a:off x="5500688" y="5903913"/>
-            <a:ext cx="3414712" cy="838200"/>
+            <a:off x="4427984" y="5903913"/>
+            <a:ext cx="4487416" cy="838200"/>
           </a:xfrm>
           <a:prstGeom prst="rect">
             <a:avLst/>
@@ -4147,55 +4195,34 @@
             </a:pPr>
             <a:r>
               <a:rPr lang="pt-BR" sz="1800" kern="0" dirty="0">
-                <a:latin typeface="+mn-lt"/>
+                <a:latin typeface="Tahoma" panose="020B0604030504040204" pitchFamily="34" charset="0"/>
                 <a:cs typeface="+mn-cs"/>
               </a:rPr>
               <a:t>Camilo </a:t>
             </a:r>
             <a:r>
               <a:rPr lang="pt-BR" sz="1800" kern="0" dirty="0" err="1">
-                <a:latin typeface="+mn-lt"/>
+                <a:latin typeface="Tahoma" panose="020B0604030504040204" pitchFamily="34" charset="0"/>
                 <a:cs typeface="+mn-cs"/>
               </a:rPr>
               <a:t>Daleles</a:t>
             </a:r>
             <a:r>
               <a:rPr lang="pt-BR" sz="1800" kern="0" dirty="0">
-                <a:latin typeface="+mn-lt"/>
+                <a:latin typeface="Tahoma" panose="020B0604030504040204" pitchFamily="34" charset="0"/>
                 <a:cs typeface="+mn-cs"/>
               </a:rPr>
               <a:t> </a:t>
             </a:r>
             <a:r>
               <a:rPr lang="pt-BR" sz="1800" kern="0" dirty="0" err="1">
-                <a:latin typeface="+mn-lt"/>
+                <a:latin typeface="Tahoma" panose="020B0604030504040204" pitchFamily="34" charset="0"/>
                 <a:cs typeface="+mn-cs"/>
               </a:rPr>
               <a:t>Rennó</a:t>
             </a:r>
             <a:endParaRPr lang="pt-BR" sz="1800" kern="0" dirty="0">
-              <a:latin typeface="+mn-lt"/>
-              <a:cs typeface="+mn-cs"/>
-            </a:endParaRPr>
-          </a:p>
-          <a:p>
-            <a:pPr marL="342900" indent="-342900">
-              <a:lnSpc>
-                <a:spcPct val="80000"/>
-              </a:lnSpc>
-              <a:spcBef>
-                <a:spcPct val="20000"/>
-              </a:spcBef>
-              <a:defRPr/>
-            </a:pPr>
-            <a:r>
-              <a:rPr lang="pt-BR" sz="1200" kern="0" smtClean="0">
-                <a:latin typeface="Arial Unicode MS" pitchFamily="34" charset="-128"/>
-              </a:rPr>
-              <a:t>camilo.renno@inpe.br</a:t>
-            </a:r>
-            <a:endParaRPr lang="pt-BR" sz="1200" kern="0" dirty="0">
-              <a:latin typeface="Arial Unicode MS" pitchFamily="34" charset="-128"/>
+              <a:latin typeface="Tahoma" panose="020B0604030504040204" pitchFamily="34" charset="0"/>
               <a:cs typeface="+mn-cs"/>
             </a:endParaRPr>
           </a:p>
@@ -4212,10 +4239,86 @@
             <a:r>
               <a:rPr lang="pt-BR" sz="1200" kern="0" dirty="0">
                 <a:latin typeface="Arial Unicode MS" pitchFamily="34" charset="-128"/>
-                <a:cs typeface="+mn-cs"/>
               </a:rPr>
-              <a:t>http://www.dpi.inpe.br/~camilo/estatistica/</a:t>
+              <a:t>camilo.renno@inpe.br</a:t>
             </a:r>
+          </a:p>
+          <a:p>
+            <a:pPr marL="342900" indent="-342900">
+              <a:lnSpc>
+                <a:spcPct val="80000"/>
+              </a:lnSpc>
+              <a:spcBef>
+                <a:spcPct val="20000"/>
+              </a:spcBef>
+              <a:defRPr/>
+            </a:pPr>
+            <a:r>
+              <a:rPr lang="pt-BR" sz="1200" kern="0" dirty="0">
+                <a:latin typeface="Arial Unicode MS" pitchFamily="34" charset="-128"/>
+              </a:rPr>
+              <a:t>acesso do conteúdo do curso em </a:t>
+            </a:r>
+            <a:r>
+              <a:rPr lang="pt-BR" sz="1200" kern="0" dirty="0" err="1">
+                <a:solidFill>
+                  <a:schemeClr val="accent2"/>
+                </a:solidFill>
+                <a:latin typeface="Arial Unicode MS" pitchFamily="34" charset="-128"/>
+                <a:hlinkClick r:id="rId2">
+                  <a:extLst>
+                    <a:ext uri="{A12FA001-AC4F-418D-AE19-62706E023703}">
+                      <ahyp:hlinkClr xmlns:ahyp="http://schemas.microsoft.com/office/drawing/2018/hyperlinkcolor" val="tx"/>
+                    </a:ext>
+                  </a:extLst>
+                </a:hlinkClick>
+              </a:rPr>
+              <a:t>Bibdigital</a:t>
+            </a:r>
+            <a:r>
+              <a:rPr lang="pt-BR" sz="1200" kern="0" dirty="0">
+                <a:solidFill>
+                  <a:schemeClr val="accent2"/>
+                </a:solidFill>
+                <a:latin typeface="Arial Unicode MS" pitchFamily="34" charset="-128"/>
+                <a:hlinkClick r:id="rId2">
+                  <a:extLst>
+                    <a:ext uri="{A12FA001-AC4F-418D-AE19-62706E023703}">
+                      <ahyp:hlinkClr xmlns:ahyp="http://schemas.microsoft.com/office/drawing/2018/hyperlinkcolor" val="tx"/>
+                    </a:ext>
+                  </a:extLst>
+                </a:hlinkClick>
+              </a:rPr>
+              <a:t> do INPE</a:t>
+            </a:r>
+            <a:r>
+              <a:rPr lang="pt-BR" sz="1200" kern="0" dirty="0">
+                <a:latin typeface="Arial Unicode MS" pitchFamily="34" charset="-128"/>
+              </a:rPr>
+              <a:t> ou </a:t>
+            </a:r>
+            <a:r>
+              <a:rPr lang="pt-BR" sz="1200" kern="0" dirty="0">
+                <a:solidFill>
+                  <a:schemeClr val="accent2"/>
+                </a:solidFill>
+                <a:latin typeface="Arial Unicode MS" pitchFamily="34" charset="-128"/>
+                <a:hlinkClick r:id="rId3">
+                  <a:extLst>
+                    <a:ext uri="{A12FA001-AC4F-418D-AE19-62706E023703}">
+                      <ahyp:hlinkClr xmlns:ahyp="http://schemas.microsoft.com/office/drawing/2018/hyperlinkcolor" val="tx"/>
+                    </a:ext>
+                  </a:extLst>
+                </a:hlinkClick>
+              </a:rPr>
+              <a:t>GitHub</a:t>
+            </a:r>
+            <a:endParaRPr lang="pt-BR" sz="1200" kern="0" dirty="0">
+              <a:solidFill>
+                <a:schemeClr val="accent2"/>
+              </a:solidFill>
+              <a:latin typeface="Arial Unicode MS" pitchFamily="34" charset="-128"/>
+            </a:endParaRPr>
           </a:p>
         </p:txBody>
       </p:sp>
@@ -4224,13 +4327,6 @@
   <p:clrMapOvr>
     <a:masterClrMapping/>
   </p:clrMapOvr>
-  <p:timing>
-    <p:tnLst>
-      <p:par>
-        <p:cTn id="1" dur="indefinite" restart="never" nodeType="tmRoot"/>
-      </p:par>
-    </p:tnLst>
-  </p:timing>
 </p:sld>
 </file>
 
@@ -4270,7 +4366,7 @@
               <a:defRPr/>
             </a:pPr>
             <a:r>
-              <a:rPr lang="pt-BR" dirty="0" smtClean="0"/>
+              <a:rPr lang="pt-BR" dirty="0"/>
               <a:t>Para que Estatística em SR?</a:t>
             </a:r>
           </a:p>
@@ -4449,7 +4545,9 @@
               </a:spcBef>
             </a:pPr>
             <a:r>
-              <a:rPr lang="pt-BR" altLang="pt-BR" sz="2000" dirty="0"/>
+              <a:rPr lang="pt-BR" altLang="pt-BR" sz="2000" dirty="0">
+                <a:latin typeface="Tahoma" panose="020B0604030504040204" pitchFamily="34" charset="0"/>
+              </a:rPr>
               <a:t>comparar fenômenos</a:t>
             </a:r>
           </a:p>
@@ -4462,30 +4560,29 @@
               <a:buNone/>
             </a:pPr>
             <a:r>
-              <a:rPr lang="pt-BR" altLang="pt-BR" sz="1600" dirty="0" err="1"/>
+              <a:rPr lang="pt-BR" altLang="pt-BR" sz="1600" dirty="0" err="1">
+                <a:latin typeface="Tahoma" panose="020B0604030504040204" pitchFamily="34" charset="0"/>
+              </a:rPr>
               <a:t>ex</a:t>
             </a:r>
             <a:r>
-              <a:rPr lang="pt-BR" altLang="pt-BR" sz="1600" dirty="0"/>
-              <a:t>: é possível distinguir diferentes níveis de degradação em florestas tropicais </a:t>
+              <a:rPr lang="pt-BR" altLang="pt-BR" sz="1600" dirty="0">
+                <a:latin typeface="Tahoma" panose="020B0604030504040204" pitchFamily="34" charset="0"/>
+              </a:rPr>
+              <a:t>: é possível distinguir diferentes níveis de degradação em florestas tropicais a partir de imagens </a:t>
             </a:r>
             <a:r>
-              <a:rPr lang="pt-BR" altLang="pt-BR" sz="1600" dirty="0" smtClean="0"/>
-              <a:t>a partir de </a:t>
-            </a:r>
-            <a:r>
-              <a:rPr lang="pt-BR" altLang="pt-BR" sz="1600" dirty="0"/>
-              <a:t>imagens </a:t>
-            </a:r>
-            <a:r>
-              <a:rPr lang="pt-BR" altLang="pt-BR" sz="1600" dirty="0" err="1" smtClean="0"/>
+              <a:rPr lang="pt-BR" altLang="pt-BR" sz="1600" dirty="0" err="1">
+                <a:latin typeface="Tahoma" panose="020B0604030504040204" pitchFamily="34" charset="0"/>
+              </a:rPr>
               <a:t>Landsat</a:t>
             </a:r>
             <a:r>
-              <a:rPr lang="pt-BR" altLang="pt-BR" sz="1600" dirty="0" smtClean="0"/>
+              <a:rPr lang="pt-BR" altLang="pt-BR" sz="1600" dirty="0">
+                <a:latin typeface="Tahoma" panose="020B0604030504040204" pitchFamily="34" charset="0"/>
+              </a:rPr>
               <a:t>/TM?</a:t>
             </a:r>
-            <a:endParaRPr lang="pt-BR" altLang="pt-BR" sz="1600" dirty="0"/>
           </a:p>
         </p:txBody>
       </p:sp>
@@ -4500,9 +4597,9 @@
         <p:grpSpPr bwMode="auto">
           <a:xfrm>
             <a:off x="1043608" y="2695575"/>
-            <a:ext cx="4660900" cy="3613150"/>
+            <a:ext cx="4660900" cy="3613137"/>
             <a:chOff x="1818924" y="2420888"/>
-            <a:chExt cx="4660780" cy="3612918"/>
+            <a:chExt cx="4660780" cy="3612905"/>
           </a:xfrm>
         </p:grpSpPr>
         <p:pic>
@@ -4570,7 +4667,7 @@
           <p:spPr bwMode="auto">
             <a:xfrm>
               <a:off x="1818924" y="5833751"/>
-              <a:ext cx="1824538" cy="200055"/>
+              <a:ext cx="1728314" cy="200042"/>
             </a:xfrm>
             <a:prstGeom prst="rect">
               <a:avLst/>
@@ -4734,7 +4831,9 @@
                 <a:buNone/>
               </a:pPr>
               <a:r>
-                <a:rPr lang="pt-BR" altLang="pt-BR" sz="700"/>
+                <a:rPr lang="pt-BR" altLang="pt-BR" sz="700" dirty="0">
+                  <a:latin typeface="Tahoma" panose="020B0604030504040204" pitchFamily="34" charset="0"/>
+                </a:rPr>
                 <a:t>Fonte: http://www.obt.inpe.br/degrad/</a:t>
               </a:r>
             </a:p>
@@ -4945,7 +5044,9 @@
               <a:buNone/>
             </a:pPr>
             <a:r>
-              <a:rPr lang="pt-BR" altLang="pt-BR" sz="1600" dirty="0" smtClean="0"/>
+              <a:rPr lang="pt-BR" altLang="pt-BR" sz="1600" dirty="0">
+                <a:latin typeface="Tahoma" panose="020B0604030504040204" pitchFamily="34" charset="0"/>
+              </a:rPr>
               <a:t>. quais as melhores métricas e bandas espectrais a serem usadas?</a:t>
             </a:r>
           </a:p>
@@ -4957,7 +5058,9 @@
               <a:buFontTx/>
               <a:buNone/>
             </a:pPr>
-            <a:endParaRPr lang="pt-BR" altLang="pt-BR" sz="1600" dirty="0" smtClean="0"/>
+            <a:endParaRPr lang="pt-BR" altLang="pt-BR" sz="1600" dirty="0">
+              <a:latin typeface="Tahoma" panose="020B0604030504040204" pitchFamily="34" charset="0"/>
+            </a:endParaRPr>
           </a:p>
           <a:p>
             <a:pPr marL="107950" lvl="1" indent="-107950" eaLnBrk="1" hangingPunct="1">
@@ -4968,7 +5071,9 @@
               <a:buNone/>
             </a:pPr>
             <a:r>
-              <a:rPr lang="pt-BR" altLang="pt-BR" sz="1600" dirty="0" smtClean="0"/>
+              <a:rPr lang="pt-BR" altLang="pt-BR" sz="1600" dirty="0">
+                <a:latin typeface="Tahoma" panose="020B0604030504040204" pitchFamily="34" charset="0"/>
+              </a:rPr>
               <a:t>. quantos níveis de degradação podem ser detectados?</a:t>
             </a:r>
           </a:p>
@@ -4980,7 +5085,9 @@
               <a:buFontTx/>
               <a:buNone/>
             </a:pPr>
-            <a:endParaRPr lang="pt-BR" altLang="pt-BR" sz="1600" dirty="0"/>
+            <a:endParaRPr lang="pt-BR" altLang="pt-BR" sz="1600" dirty="0">
+              <a:latin typeface="Tahoma" panose="020B0604030504040204" pitchFamily="34" charset="0"/>
+            </a:endParaRPr>
           </a:p>
           <a:p>
             <a:pPr marL="107950" lvl="1" indent="-107950" eaLnBrk="1" hangingPunct="1">
@@ -4991,10 +5098,11 @@
               <a:buNone/>
             </a:pPr>
             <a:r>
-              <a:rPr lang="pt-BR" altLang="pt-BR" sz="1600" dirty="0" smtClean="0"/>
+              <a:rPr lang="pt-BR" altLang="pt-BR" sz="1600" dirty="0">
+                <a:latin typeface="Tahoma" panose="020B0604030504040204" pitchFamily="34" charset="0"/>
+              </a:rPr>
               <a:t>. qual a melhor técnica ou procedimento para se fazer essa detecção?</a:t>
             </a:r>
-            <a:endParaRPr lang="pt-BR" altLang="pt-BR" sz="1600" dirty="0"/>
           </a:p>
         </p:txBody>
       </p:sp>
@@ -5308,7 +5416,7 @@
               <a:defRPr/>
             </a:pPr>
             <a:r>
-              <a:rPr lang="pt-BR" dirty="0" smtClean="0"/>
+              <a:rPr lang="pt-BR" dirty="0"/>
               <a:t>Para que Estatística em SR?</a:t>
             </a:r>
           </a:p>
@@ -5487,7 +5595,9 @@
               </a:spcBef>
             </a:pPr>
             <a:r>
-              <a:rPr lang="pt-BR" altLang="pt-BR" sz="2000" dirty="0"/>
+              <a:rPr lang="pt-BR" altLang="pt-BR" sz="2000" dirty="0">
+                <a:latin typeface="Tahoma" panose="020B0604030504040204" pitchFamily="34" charset="0"/>
+              </a:rPr>
               <a:t>encontrar padrões</a:t>
             </a:r>
           </a:p>
@@ -5500,20 +5610,16 @@
               <a:buNone/>
             </a:pPr>
             <a:r>
-              <a:rPr lang="pt-BR" altLang="pt-BR" sz="1600" dirty="0" err="1"/>
+              <a:rPr lang="pt-BR" altLang="pt-BR" sz="1600" dirty="0" err="1">
+                <a:latin typeface="Tahoma" panose="020B0604030504040204" pitchFamily="34" charset="0"/>
+              </a:rPr>
               <a:t>ex</a:t>
             </a:r>
             <a:r>
-              <a:rPr lang="pt-BR" altLang="pt-BR" sz="1600" dirty="0"/>
-              <a:t>: qual o comportamento espectral </a:t>
-            </a:r>
-            <a:r>
-              <a:rPr lang="pt-BR" altLang="pt-BR" sz="1600" dirty="0" smtClean="0"/>
-              <a:t>típico </a:t>
-            </a:r>
-            <a:r>
-              <a:rPr lang="pt-BR" altLang="pt-BR" sz="1600" dirty="0"/>
-              <a:t>da cana-de-açúcar?</a:t>
+              <a:rPr lang="pt-BR" altLang="pt-BR" sz="1600" dirty="0">
+                <a:latin typeface="Tahoma" panose="020B0604030504040204" pitchFamily="34" charset="0"/>
+              </a:rPr>
+              <a:t>: qual o comportamento espectral típico da cana-de-açúcar?</a:t>
             </a:r>
           </a:p>
         </p:txBody>
@@ -5763,7 +5869,9 @@
                 <a:buNone/>
               </a:pPr>
               <a:r>
-                <a:rPr lang="pt-BR" altLang="pt-BR" sz="700"/>
+                <a:rPr lang="pt-BR" altLang="pt-BR" sz="700" dirty="0">
+                  <a:latin typeface="Tahoma" panose="020B0604030504040204" pitchFamily="34" charset="0"/>
+                </a:rPr>
                 <a:t>Fonte: http://www.a-a-r-s.org/aars/proceeding/ACRS2004/Papers/HSS04-1.htm</a:t>
               </a:r>
             </a:p>
@@ -5961,7 +6069,7 @@
               <a:defRPr/>
             </a:pPr>
             <a:r>
-              <a:rPr lang="pt-BR" dirty="0" smtClean="0"/>
+              <a:rPr lang="pt-BR" dirty="0"/>
               <a:t>Para que Estatística em SR?</a:t>
             </a:r>
           </a:p>
@@ -6140,7 +6248,9 @@
               </a:spcBef>
             </a:pPr>
             <a:r>
-              <a:rPr lang="pt-BR" altLang="pt-BR" sz="2000" dirty="0"/>
+              <a:rPr lang="pt-BR" altLang="pt-BR" sz="2000" dirty="0">
+                <a:latin typeface="Tahoma" panose="020B0604030504040204" pitchFamily="34" charset="0"/>
+              </a:rPr>
               <a:t>selecionar fatores mais importantes para explicar um fenômeno</a:t>
             </a:r>
           </a:p>
@@ -6153,34 +6263,29 @@
               <a:buNone/>
             </a:pPr>
             <a:r>
-              <a:rPr lang="pt-BR" altLang="pt-BR" sz="1600" dirty="0" err="1"/>
+              <a:rPr lang="pt-BR" altLang="pt-BR" sz="1600" dirty="0" err="1">
+                <a:latin typeface="Tahoma" panose="020B0604030504040204" pitchFamily="34" charset="0"/>
+              </a:rPr>
               <a:t>ex</a:t>
             </a:r>
             <a:r>
-              <a:rPr lang="pt-BR" altLang="pt-BR" sz="1600" dirty="0"/>
-              <a:t>: quais </a:t>
+              <a:rPr lang="pt-BR" altLang="pt-BR" sz="1600" dirty="0">
+                <a:latin typeface="Tahoma" panose="020B0604030504040204" pitchFamily="34" charset="0"/>
+              </a:rPr>
+              <a:t>: quais bandas espectrais e índices de vegetação que melhor explicam a variação de Biomassa e Carbono orgânico em </a:t>
             </a:r>
             <a:r>
-              <a:rPr lang="pt-BR" altLang="pt-BR" sz="1600" dirty="0" smtClean="0"/>
-              <a:t>bandas espectrais e índices de vegetação que melhor explicam </a:t>
-            </a:r>
-            <a:r>
-              <a:rPr lang="pt-BR" altLang="pt-BR" sz="1600" dirty="0"/>
-              <a:t>a variação </a:t>
-            </a:r>
-            <a:r>
-              <a:rPr lang="pt-BR" altLang="pt-BR" sz="1600" dirty="0" smtClean="0"/>
-              <a:t>de Biomassa e Carbono orgânico em </a:t>
-            </a:r>
-            <a:r>
-              <a:rPr lang="pt-BR" altLang="pt-BR" sz="1600" dirty="0" err="1" smtClean="0"/>
+              <a:rPr lang="pt-BR" altLang="pt-BR" sz="1600" dirty="0" err="1">
+                <a:latin typeface="Tahoma" panose="020B0604030504040204" pitchFamily="34" charset="0"/>
+              </a:rPr>
               <a:t>macrófitas</a:t>
             </a:r>
             <a:r>
-              <a:rPr lang="pt-BR" altLang="pt-BR" sz="1600" dirty="0" smtClean="0"/>
+              <a:rPr lang="pt-BR" altLang="pt-BR" sz="1600" dirty="0">
+                <a:latin typeface="Tahoma" panose="020B0604030504040204" pitchFamily="34" charset="0"/>
+              </a:rPr>
               <a:t>? </a:t>
             </a:r>
-            <a:endParaRPr lang="pt-BR" altLang="pt-BR" sz="1600" dirty="0"/>
           </a:p>
         </p:txBody>
       </p:sp>
@@ -6440,7 +6545,9 @@
               <a:buNone/>
             </a:pPr>
             <a:r>
-              <a:rPr lang="pt-BR" altLang="pt-BR" sz="700" dirty="0"/>
+              <a:rPr lang="pt-BR" altLang="pt-BR" sz="700" dirty="0">
+                <a:latin typeface="Tahoma" panose="020B0604030504040204" pitchFamily="34" charset="0"/>
+              </a:rPr>
               <a:t>Fonte: https://www.lume.ufrgs.br/bitstream/handle/10183/202034/001106858.pdf?sequence=1</a:t>
             </a:r>
           </a:p>
@@ -6488,7 +6595,9 @@
           <a:lstStyle/>
           <a:p>
             <a:pPr algn="ctr"/>
-            <a:endParaRPr lang="pt-BR"/>
+            <a:endParaRPr lang="pt-BR" dirty="0">
+              <a:latin typeface="Tahoma" panose="020B0604030504040204" pitchFamily="34" charset="0"/>
+            </a:endParaRPr>
           </a:p>
         </p:txBody>
       </p:sp>
@@ -6586,7 +6695,9 @@
           <a:lstStyle/>
           <a:p>
             <a:pPr algn="ctr"/>
-            <a:endParaRPr lang="pt-BR"/>
+            <a:endParaRPr lang="pt-BR" dirty="0">
+              <a:latin typeface="Tahoma" panose="020B0604030504040204" pitchFamily="34" charset="0"/>
+            </a:endParaRPr>
           </a:p>
         </p:txBody>
       </p:sp>
@@ -6862,7 +6973,7 @@
               <a:defRPr/>
             </a:pPr>
             <a:r>
-              <a:rPr lang="pt-BR" dirty="0" smtClean="0"/>
+              <a:rPr lang="pt-BR" dirty="0"/>
               <a:t>Para que Estatística em SR?</a:t>
             </a:r>
           </a:p>
@@ -7041,7 +7152,9 @@
               </a:spcBef>
             </a:pPr>
             <a:r>
-              <a:rPr lang="pt-BR" altLang="pt-BR" sz="2000" dirty="0"/>
+              <a:rPr lang="pt-BR" altLang="pt-BR" sz="2000" dirty="0">
+                <a:latin typeface="Tahoma" panose="020B0604030504040204" pitchFamily="34" charset="0"/>
+              </a:rPr>
               <a:t>encontrar relações matemáticas entre fenômenos</a:t>
             </a:r>
           </a:p>
@@ -7054,27 +7167,39 @@
               <a:buNone/>
             </a:pPr>
             <a:r>
-              <a:rPr lang="pt-BR" altLang="pt-BR" sz="1600" dirty="0" err="1"/>
+              <a:rPr lang="pt-BR" altLang="pt-BR" sz="1600" dirty="0" err="1">
+                <a:latin typeface="Tahoma" panose="020B0604030504040204" pitchFamily="34" charset="0"/>
+              </a:rPr>
               <a:t>ex</a:t>
             </a:r>
             <a:r>
-              <a:rPr lang="pt-BR" altLang="pt-BR" sz="1600" dirty="0"/>
+              <a:rPr lang="pt-BR" altLang="pt-BR" sz="1600" dirty="0">
+                <a:latin typeface="Tahoma" panose="020B0604030504040204" pitchFamily="34" charset="0"/>
+              </a:rPr>
               <a:t>: qual modelo matemático que melhor estima a concentração de sólidos em suspensão de corpos d´água na Amazônia a partir da </a:t>
             </a:r>
             <a:r>
-              <a:rPr lang="pt-BR" altLang="pt-BR" sz="1600" dirty="0" err="1"/>
+              <a:rPr lang="pt-BR" altLang="pt-BR" sz="1600" dirty="0" err="1">
+                <a:latin typeface="Tahoma" panose="020B0604030504040204" pitchFamily="34" charset="0"/>
+              </a:rPr>
               <a:t>reflectância</a:t>
             </a:r>
             <a:r>
-              <a:rPr lang="pt-BR" altLang="pt-BR" sz="1600" dirty="0"/>
+              <a:rPr lang="pt-BR" altLang="pt-BR" sz="1600" dirty="0">
+                <a:latin typeface="Tahoma" panose="020B0604030504040204" pitchFamily="34" charset="0"/>
+              </a:rPr>
               <a:t> de superfície em dados do </a:t>
             </a:r>
             <a:r>
-              <a:rPr lang="pt-BR" altLang="pt-BR" sz="1600" dirty="0" err="1"/>
+              <a:rPr lang="pt-BR" altLang="pt-BR" sz="1600" dirty="0" err="1">
+                <a:latin typeface="Tahoma" panose="020B0604030504040204" pitchFamily="34" charset="0"/>
+              </a:rPr>
               <a:t>Landsat</a:t>
             </a:r>
             <a:r>
-              <a:rPr lang="pt-BR" altLang="pt-BR" sz="1600" dirty="0"/>
+              <a:rPr lang="pt-BR" altLang="pt-BR" sz="1600" dirty="0">
+                <a:latin typeface="Tahoma" panose="020B0604030504040204" pitchFamily="34" charset="0"/>
+              </a:rPr>
               <a:t>/TM?</a:t>
             </a:r>
           </a:p>
@@ -7271,7 +7396,9 @@
                 <a:buNone/>
               </a:pPr>
               <a:r>
-                <a:rPr lang="pt-BR" altLang="pt-BR" sz="700"/>
+                <a:rPr lang="pt-BR" altLang="pt-BR" sz="700" dirty="0">
+                  <a:latin typeface="Tahoma" panose="020B0604030504040204" pitchFamily="34" charset="0"/>
+                </a:rPr>
                 <a:t>Fonte: http://mtc-m19.sid.inpe.br/col/sid.inpe.br/mtc-m19/2013/02.26.19.52/doc/publicacao.pdf</a:t>
               </a:r>
             </a:p>
@@ -7597,7 +7724,7 @@
               <a:defRPr/>
             </a:pPr>
             <a:r>
-              <a:rPr lang="pt-BR" dirty="0" smtClean="0"/>
+              <a:rPr lang="pt-BR" dirty="0"/>
               <a:t>Para que Estatística em SR?</a:t>
             </a:r>
           </a:p>
@@ -7776,12 +7903,10 @@
               </a:spcBef>
             </a:pPr>
             <a:r>
-              <a:rPr lang="pt-BR" altLang="pt-BR" sz="2000" dirty="0" smtClean="0"/>
-              <a:t>comparar ou avaliar </a:t>
-            </a:r>
-            <a:r>
-              <a:rPr lang="pt-BR" altLang="pt-BR" sz="2000" dirty="0"/>
-              <a:t>classificações/mapeamentos/modelos</a:t>
+              <a:rPr lang="pt-BR" altLang="pt-BR" sz="2000" dirty="0">
+                <a:latin typeface="Tahoma" panose="020B0604030504040204" pitchFamily="34" charset="0"/>
+              </a:rPr>
+              <a:t>comparar ou avaliar classificações/mapeamentos/modelos</a:t>
             </a:r>
           </a:p>
           <a:p>
@@ -7793,11 +7918,15 @@
               <a:buNone/>
             </a:pPr>
             <a:r>
-              <a:rPr lang="pt-BR" altLang="pt-BR" sz="1600" dirty="0" err="1"/>
+              <a:rPr lang="pt-BR" altLang="pt-BR" sz="1600" dirty="0" err="1">
+                <a:latin typeface="Tahoma" panose="020B0604030504040204" pitchFamily="34" charset="0"/>
+              </a:rPr>
               <a:t>ex</a:t>
             </a:r>
             <a:r>
-              <a:rPr lang="pt-BR" altLang="pt-BR" sz="1600" dirty="0"/>
+              <a:rPr lang="pt-BR" altLang="pt-BR" sz="1600" dirty="0">
+                <a:latin typeface="Tahoma" panose="020B0604030504040204" pitchFamily="34" charset="0"/>
+              </a:rPr>
               <a:t>: qual método de classificação resulta no melhor mapeamento de uma área urbana?</a:t>
             </a:r>
           </a:p>
@@ -8156,7 +8285,9 @@
                 <a:buNone/>
               </a:pPr>
               <a:r>
-                <a:rPr lang="pt-BR" altLang="pt-BR" sz="600" dirty="0"/>
+                <a:rPr lang="pt-BR" altLang="pt-BR" sz="600" dirty="0">
+                  <a:latin typeface="Tahoma" panose="020B0604030504040204" pitchFamily="34" charset="0"/>
+                </a:rPr>
                 <a:t>Fonte: http://marte.sid.inpe.br/col/ltid.inpe.br/sbsr/2004/11.19.17.58/doc/4217.pdf</a:t>
               </a:r>
             </a:p>
@@ -8173,7 +8304,7 @@
           <p:spPr bwMode="auto">
             <a:xfrm>
               <a:off x="971550" y="5087938"/>
-              <a:ext cx="1671638" cy="261937"/>
+              <a:ext cx="1537600" cy="261660"/>
             </a:xfrm>
             <a:prstGeom prst="rect">
               <a:avLst/>
@@ -8337,7 +8468,9 @@
                 <a:buNone/>
               </a:pPr>
               <a:r>
-                <a:rPr lang="pt-BR" altLang="pt-BR" sz="1100"/>
+                <a:rPr lang="pt-BR" altLang="pt-BR" sz="1100" dirty="0">
+                  <a:latin typeface="Tahoma" panose="020B0604030504040204" pitchFamily="34" charset="0"/>
+                </a:rPr>
                 <a:t>Classificação MAXVER</a:t>
               </a:r>
             </a:p>
@@ -8354,7 +8487,7 @@
           <p:spPr bwMode="auto">
             <a:xfrm>
               <a:off x="5338763" y="5087938"/>
-              <a:ext cx="2354262" cy="261937"/>
+              <a:ext cx="2214068" cy="261660"/>
             </a:xfrm>
             <a:prstGeom prst="rect">
               <a:avLst/>
@@ -8518,7 +8651,9 @@
                 <a:buNone/>
               </a:pPr>
               <a:r>
-                <a:rPr lang="pt-BR" altLang="pt-BR" sz="1100"/>
+                <a:rPr lang="pt-BR" altLang="pt-BR" sz="1100" dirty="0">
+                  <a:latin typeface="Tahoma" panose="020B0604030504040204" pitchFamily="34" charset="0"/>
+                </a:rPr>
                 <a:t>Classificação orientada a objetos</a:t>
               </a:r>
             </a:p>
@@ -8535,7 +8670,7 @@
           <p:spPr bwMode="auto">
             <a:xfrm>
               <a:off x="3203575" y="5087938"/>
-              <a:ext cx="2016125" cy="261937"/>
+              <a:ext cx="1898277" cy="261660"/>
             </a:xfrm>
             <a:prstGeom prst="rect">
               <a:avLst/>
@@ -8699,7 +8834,9 @@
                 <a:buNone/>
               </a:pPr>
               <a:r>
-                <a:rPr lang="pt-BR" altLang="pt-BR" sz="1100"/>
+                <a:rPr lang="pt-BR" altLang="pt-BR" sz="1100" dirty="0">
+                  <a:latin typeface="Tahoma" panose="020B0604030504040204" pitchFamily="34" charset="0"/>
+                </a:rPr>
                 <a:t>Imagem IKONOS fusionada</a:t>
               </a:r>
             </a:p>
@@ -8951,10 +9088,10 @@
               <a:defRPr/>
             </a:pPr>
             <a:r>
-              <a:rPr lang="pt-BR" dirty="0" smtClean="0"/>
+              <a:rPr lang="pt-BR" dirty="0"/>
               <a:t>Estatística em SR</a:t>
             </a:r>
-            <a:endParaRPr lang="pt-BR" sz="2400" dirty="0" smtClean="0"/>
+            <a:endParaRPr lang="pt-BR" sz="2400" dirty="0"/>
           </a:p>
         </p:txBody>
       </p:sp>
@@ -9178,7 +9315,8 @@
               <a:buNone/>
             </a:pPr>
             <a:r>
-              <a:rPr lang="pt-BR" altLang="pt-BR" sz="2000" kern="0" dirty="0" smtClean="0">
+              <a:rPr lang="pt-BR" altLang="pt-BR" sz="2000" kern="0" dirty="0">
+                <a:latin typeface="Tahoma" panose="020B0604030504040204" pitchFamily="34" charset="0"/>
                 <a:cs typeface="Times New Roman" charset="0"/>
                 <a:sym typeface="Symbol" pitchFamily="18" charset="2"/>
               </a:rPr>
@@ -9424,10 +9562,11 @@
                 <a:buFontTx/>
                 <a:buNone/>
               </a:pPr>
-              <a:endParaRPr lang="pt-BR" altLang="pt-BR" sz="900">
+              <a:endParaRPr lang="pt-BR" altLang="pt-BR" sz="900" dirty="0">
                 <a:solidFill>
                   <a:srgbClr val="FF0000"/>
                 </a:solidFill>
+                <a:latin typeface="Tahoma" panose="020B0604030504040204" pitchFamily="34" charset="0"/>
               </a:endParaRPr>
             </a:p>
           </p:txBody>
@@ -9599,10 +9738,11 @@
                 <a:buFontTx/>
                 <a:buNone/>
               </a:pPr>
-              <a:endParaRPr lang="pt-BR" altLang="pt-BR" sz="900">
+              <a:endParaRPr lang="pt-BR" altLang="pt-BR" sz="900" dirty="0">
                 <a:solidFill>
                   <a:srgbClr val="FF0000"/>
                 </a:solidFill>
+                <a:latin typeface="Tahoma" panose="020B0604030504040204" pitchFamily="34" charset="0"/>
               </a:endParaRPr>
             </a:p>
           </p:txBody>
@@ -9774,10 +9914,11 @@
                 <a:buFontTx/>
                 <a:buNone/>
               </a:pPr>
-              <a:endParaRPr lang="pt-BR" altLang="pt-BR" sz="900">
+              <a:endParaRPr lang="pt-BR" altLang="pt-BR" sz="900" dirty="0">
                 <a:solidFill>
                   <a:srgbClr val="FF0000"/>
                 </a:solidFill>
+                <a:latin typeface="Tahoma" panose="020B0604030504040204" pitchFamily="34" charset="0"/>
               </a:endParaRPr>
             </a:p>
           </p:txBody>
@@ -9949,10 +10090,11 @@
                 <a:buFontTx/>
                 <a:buNone/>
               </a:pPr>
-              <a:endParaRPr lang="pt-BR" altLang="pt-BR" sz="900">
+              <a:endParaRPr lang="pt-BR" altLang="pt-BR" sz="900" dirty="0">
                 <a:solidFill>
                   <a:srgbClr val="FF0000"/>
                 </a:solidFill>
+                <a:latin typeface="Tahoma" panose="020B0604030504040204" pitchFamily="34" charset="0"/>
               </a:endParaRPr>
             </a:p>
           </p:txBody>
@@ -10124,10 +10266,11 @@
                 <a:buFontTx/>
                 <a:buNone/>
               </a:pPr>
-              <a:endParaRPr lang="pt-BR" altLang="pt-BR" sz="900">
+              <a:endParaRPr lang="pt-BR" altLang="pt-BR" sz="900" dirty="0">
                 <a:solidFill>
                   <a:srgbClr val="FF0000"/>
                 </a:solidFill>
+                <a:latin typeface="Tahoma" panose="020B0604030504040204" pitchFamily="34" charset="0"/>
               </a:endParaRPr>
             </a:p>
           </p:txBody>
@@ -10299,10 +10442,11 @@
                 <a:buFontTx/>
                 <a:buNone/>
               </a:pPr>
-              <a:endParaRPr lang="pt-BR" altLang="pt-BR" sz="900">
+              <a:endParaRPr lang="pt-BR" altLang="pt-BR" sz="900" dirty="0">
                 <a:solidFill>
                   <a:srgbClr val="FF0000"/>
                 </a:solidFill>
+                <a:latin typeface="Tahoma" panose="020B0604030504040204" pitchFamily="34" charset="0"/>
               </a:endParaRPr>
             </a:p>
           </p:txBody>
@@ -10474,10 +10618,11 @@
                 <a:buFontTx/>
                 <a:buNone/>
               </a:pPr>
-              <a:endParaRPr lang="pt-BR" altLang="pt-BR" sz="900">
+              <a:endParaRPr lang="pt-BR" altLang="pt-BR" sz="900" dirty="0">
                 <a:solidFill>
                   <a:srgbClr val="FF0000"/>
                 </a:solidFill>
+                <a:latin typeface="Tahoma" panose="020B0604030504040204" pitchFamily="34" charset="0"/>
               </a:endParaRPr>
             </a:p>
           </p:txBody>
@@ -10649,10 +10794,11 @@
                 <a:buFontTx/>
                 <a:buNone/>
               </a:pPr>
-              <a:endParaRPr lang="pt-BR" altLang="pt-BR" sz="900">
+              <a:endParaRPr lang="pt-BR" altLang="pt-BR" sz="900" dirty="0">
                 <a:solidFill>
                   <a:srgbClr val="FF0000"/>
                 </a:solidFill>
+                <a:latin typeface="Tahoma" panose="020B0604030504040204" pitchFamily="34" charset="0"/>
               </a:endParaRPr>
             </a:p>
           </p:txBody>
@@ -10824,10 +10970,11 @@
                 <a:buFontTx/>
                 <a:buNone/>
               </a:pPr>
-              <a:endParaRPr lang="pt-BR" altLang="pt-BR" sz="900">
+              <a:endParaRPr lang="pt-BR" altLang="pt-BR" sz="900" dirty="0">
                 <a:solidFill>
                   <a:srgbClr val="FF0000"/>
                 </a:solidFill>
+                <a:latin typeface="Tahoma" panose="020B0604030504040204" pitchFamily="34" charset="0"/>
               </a:endParaRPr>
             </a:p>
           </p:txBody>
@@ -10999,10 +11146,11 @@
                 <a:buFontTx/>
                 <a:buNone/>
               </a:pPr>
-              <a:endParaRPr lang="pt-BR" altLang="pt-BR" sz="900">
+              <a:endParaRPr lang="pt-BR" altLang="pt-BR" sz="900" dirty="0">
                 <a:solidFill>
                   <a:srgbClr val="FF0000"/>
                 </a:solidFill>
+                <a:latin typeface="Tahoma" panose="020B0604030504040204" pitchFamily="34" charset="0"/>
               </a:endParaRPr>
             </a:p>
           </p:txBody>
@@ -11174,10 +11322,11 @@
                 <a:buFontTx/>
                 <a:buNone/>
               </a:pPr>
-              <a:endParaRPr lang="pt-BR" altLang="pt-BR" sz="900">
+              <a:endParaRPr lang="pt-BR" altLang="pt-BR" sz="900" dirty="0">
                 <a:solidFill>
                   <a:srgbClr val="FF0000"/>
                 </a:solidFill>
+                <a:latin typeface="Tahoma" panose="020B0604030504040204" pitchFamily="34" charset="0"/>
               </a:endParaRPr>
             </a:p>
           </p:txBody>
@@ -11349,10 +11498,11 @@
                 <a:buFontTx/>
                 <a:buNone/>
               </a:pPr>
-              <a:endParaRPr lang="pt-BR" altLang="pt-BR" sz="900">
+              <a:endParaRPr lang="pt-BR" altLang="pt-BR" sz="900" dirty="0">
                 <a:solidFill>
                   <a:srgbClr val="FF0000"/>
                 </a:solidFill>
+                <a:latin typeface="Tahoma" panose="020B0604030504040204" pitchFamily="34" charset="0"/>
               </a:endParaRPr>
             </a:p>
           </p:txBody>
@@ -11524,10 +11674,11 @@
                 <a:buFontTx/>
                 <a:buNone/>
               </a:pPr>
-              <a:endParaRPr lang="pt-BR" altLang="pt-BR" sz="900">
+              <a:endParaRPr lang="pt-BR" altLang="pt-BR" sz="900" dirty="0">
                 <a:solidFill>
                   <a:srgbClr val="FF0000"/>
                 </a:solidFill>
+                <a:latin typeface="Tahoma" panose="020B0604030504040204" pitchFamily="34" charset="0"/>
               </a:endParaRPr>
             </a:p>
           </p:txBody>
@@ -11699,10 +11850,11 @@
                 <a:buFontTx/>
                 <a:buNone/>
               </a:pPr>
-              <a:endParaRPr lang="pt-BR" altLang="pt-BR" sz="900">
+              <a:endParaRPr lang="pt-BR" altLang="pt-BR" sz="900" dirty="0">
                 <a:solidFill>
                   <a:srgbClr val="FF0000"/>
                 </a:solidFill>
+                <a:latin typeface="Tahoma" panose="020B0604030504040204" pitchFamily="34" charset="0"/>
               </a:endParaRPr>
             </a:p>
           </p:txBody>
@@ -11874,10 +12026,11 @@
                 <a:buFontTx/>
                 <a:buNone/>
               </a:pPr>
-              <a:endParaRPr lang="pt-BR" altLang="pt-BR" sz="900">
+              <a:endParaRPr lang="pt-BR" altLang="pt-BR" sz="900" dirty="0">
                 <a:solidFill>
                   <a:srgbClr val="FF0000"/>
                 </a:solidFill>
+                <a:latin typeface="Tahoma" panose="020B0604030504040204" pitchFamily="34" charset="0"/>
               </a:endParaRPr>
             </a:p>
           </p:txBody>
@@ -12049,10 +12202,11 @@
                 <a:buFontTx/>
                 <a:buNone/>
               </a:pPr>
-              <a:endParaRPr lang="pt-BR" altLang="pt-BR" sz="900">
+              <a:endParaRPr lang="pt-BR" altLang="pt-BR" sz="900" dirty="0">
                 <a:solidFill>
                   <a:srgbClr val="FF0000"/>
                 </a:solidFill>
+                <a:latin typeface="Tahoma" panose="020B0604030504040204" pitchFamily="34" charset="0"/>
               </a:endParaRPr>
             </a:p>
           </p:txBody>
@@ -12224,10 +12378,11 @@
                 <a:buFontTx/>
                 <a:buNone/>
               </a:pPr>
-              <a:endParaRPr lang="pt-BR" altLang="pt-BR" sz="900">
+              <a:endParaRPr lang="pt-BR" altLang="pt-BR" sz="900" dirty="0">
                 <a:solidFill>
                   <a:srgbClr val="FF0000"/>
                 </a:solidFill>
+                <a:latin typeface="Tahoma" panose="020B0604030504040204" pitchFamily="34" charset="0"/>
               </a:endParaRPr>
             </a:p>
           </p:txBody>
@@ -12399,10 +12554,11 @@
                 <a:buFontTx/>
                 <a:buNone/>
               </a:pPr>
-              <a:endParaRPr lang="pt-BR" altLang="pt-BR" sz="900">
+              <a:endParaRPr lang="pt-BR" altLang="pt-BR" sz="900" dirty="0">
                 <a:solidFill>
                   <a:srgbClr val="FF0000"/>
                 </a:solidFill>
+                <a:latin typeface="Tahoma" panose="020B0604030504040204" pitchFamily="34" charset="0"/>
               </a:endParaRPr>
             </a:p>
           </p:txBody>
@@ -12574,10 +12730,11 @@
                 <a:buFontTx/>
                 <a:buNone/>
               </a:pPr>
-              <a:endParaRPr lang="pt-BR" altLang="pt-BR" sz="900">
+              <a:endParaRPr lang="pt-BR" altLang="pt-BR" sz="900" dirty="0">
                 <a:solidFill>
                   <a:srgbClr val="FF0000"/>
                 </a:solidFill>
+                <a:latin typeface="Tahoma" panose="020B0604030504040204" pitchFamily="34" charset="0"/>
               </a:endParaRPr>
             </a:p>
           </p:txBody>
@@ -12749,10 +12906,11 @@
                 <a:buFontTx/>
                 <a:buNone/>
               </a:pPr>
-              <a:endParaRPr lang="pt-BR" altLang="pt-BR" sz="900">
+              <a:endParaRPr lang="pt-BR" altLang="pt-BR" sz="900" dirty="0">
                 <a:solidFill>
                   <a:srgbClr val="FF0000"/>
                 </a:solidFill>
+                <a:latin typeface="Tahoma" panose="020B0604030504040204" pitchFamily="34" charset="0"/>
               </a:endParaRPr>
             </a:p>
           </p:txBody>
@@ -12924,10 +13082,11 @@
                 <a:buFontTx/>
                 <a:buNone/>
               </a:pPr>
-              <a:endParaRPr lang="pt-BR" altLang="pt-BR" sz="900">
+              <a:endParaRPr lang="pt-BR" altLang="pt-BR" sz="900" dirty="0">
                 <a:solidFill>
                   <a:srgbClr val="FF0000"/>
                 </a:solidFill>
+                <a:latin typeface="Tahoma" panose="020B0604030504040204" pitchFamily="34" charset="0"/>
               </a:endParaRPr>
             </a:p>
           </p:txBody>
@@ -13099,10 +13258,11 @@
                 <a:buFontTx/>
                 <a:buNone/>
               </a:pPr>
-              <a:endParaRPr lang="pt-BR" altLang="pt-BR" sz="900">
+              <a:endParaRPr lang="pt-BR" altLang="pt-BR" sz="900" dirty="0">
                 <a:solidFill>
                   <a:srgbClr val="FF0000"/>
                 </a:solidFill>
+                <a:latin typeface="Tahoma" panose="020B0604030504040204" pitchFamily="34" charset="0"/>
               </a:endParaRPr>
             </a:p>
           </p:txBody>
@@ -13274,10 +13434,11 @@
                 <a:buFontTx/>
                 <a:buNone/>
               </a:pPr>
-              <a:endParaRPr lang="pt-BR" altLang="pt-BR" sz="900">
+              <a:endParaRPr lang="pt-BR" altLang="pt-BR" sz="900" dirty="0">
                 <a:solidFill>
                   <a:srgbClr val="FF0000"/>
                 </a:solidFill>
+                <a:latin typeface="Tahoma" panose="020B0604030504040204" pitchFamily="34" charset="0"/>
               </a:endParaRPr>
             </a:p>
           </p:txBody>
@@ -13449,10 +13610,11 @@
                 <a:buFontTx/>
                 <a:buNone/>
               </a:pPr>
-              <a:endParaRPr lang="pt-BR" altLang="pt-BR" sz="900">
+              <a:endParaRPr lang="pt-BR" altLang="pt-BR" sz="900" dirty="0">
                 <a:solidFill>
                   <a:srgbClr val="FF0000"/>
                 </a:solidFill>
+                <a:latin typeface="Tahoma" panose="020B0604030504040204" pitchFamily="34" charset="0"/>
               </a:endParaRPr>
             </a:p>
           </p:txBody>
@@ -13624,10 +13786,11 @@
                 <a:buFontTx/>
                 <a:buNone/>
               </a:pPr>
-              <a:endParaRPr lang="pt-BR" altLang="pt-BR" sz="900">
+              <a:endParaRPr lang="pt-BR" altLang="pt-BR" sz="900" dirty="0">
                 <a:solidFill>
                   <a:srgbClr val="FF0000"/>
                 </a:solidFill>
+                <a:latin typeface="Tahoma" panose="020B0604030504040204" pitchFamily="34" charset="0"/>
               </a:endParaRPr>
             </a:p>
           </p:txBody>
@@ -13734,7 +13897,9 @@
           <a:lstStyle/>
           <a:p>
             <a:pPr algn="ctr"/>
-            <a:endParaRPr lang="pt-BR"/>
+            <a:endParaRPr lang="pt-BR" dirty="0">
+              <a:latin typeface="Tahoma" panose="020B0604030504040204" pitchFamily="34" charset="0"/>
+            </a:endParaRPr>
           </a:p>
         </p:txBody>
       </p:sp>
@@ -13764,35 +13929,35 @@
                 <a:gridCol w="409453">
                   <a:extLst>
                     <a:ext uri="{9D8B030D-6E8A-4147-A177-3AD203B41FA5}">
-                      <a16:colId xmlns:a16="http://schemas.microsoft.com/office/drawing/2014/main" xmlns="" val="20000"/>
+                      <a16:colId xmlns:a16="http://schemas.microsoft.com/office/drawing/2014/main" val="20000"/>
                     </a:ext>
                   </a:extLst>
                 </a:gridCol>
                 <a:gridCol w="409453">
                   <a:extLst>
                     <a:ext uri="{9D8B030D-6E8A-4147-A177-3AD203B41FA5}">
-                      <a16:colId xmlns:a16="http://schemas.microsoft.com/office/drawing/2014/main" xmlns="" val="20001"/>
+                      <a16:colId xmlns:a16="http://schemas.microsoft.com/office/drawing/2014/main" val="20001"/>
                     </a:ext>
                   </a:extLst>
                 </a:gridCol>
                 <a:gridCol w="409453">
                   <a:extLst>
                     <a:ext uri="{9D8B030D-6E8A-4147-A177-3AD203B41FA5}">
-                      <a16:colId xmlns:a16="http://schemas.microsoft.com/office/drawing/2014/main" xmlns="" val="20002"/>
+                      <a16:colId xmlns:a16="http://schemas.microsoft.com/office/drawing/2014/main" val="20002"/>
                     </a:ext>
                   </a:extLst>
                 </a:gridCol>
                 <a:gridCol w="409453">
                   <a:extLst>
                     <a:ext uri="{9D8B030D-6E8A-4147-A177-3AD203B41FA5}">
-                      <a16:colId xmlns:a16="http://schemas.microsoft.com/office/drawing/2014/main" xmlns="" val="20003"/>
+                      <a16:colId xmlns:a16="http://schemas.microsoft.com/office/drawing/2014/main" val="20003"/>
                     </a:ext>
                   </a:extLst>
                 </a:gridCol>
                 <a:gridCol w="409453">
                   <a:extLst>
                     <a:ext uri="{9D8B030D-6E8A-4147-A177-3AD203B41FA5}">
-                      <a16:colId xmlns:a16="http://schemas.microsoft.com/office/drawing/2014/main" xmlns="" val="20004"/>
+                      <a16:colId xmlns:a16="http://schemas.microsoft.com/office/drawing/2014/main" val="20004"/>
                     </a:ext>
                   </a:extLst>
                 </a:gridCol>
@@ -14085,7 +14250,7 @@
                 </a:tc>
                 <a:extLst>
                   <a:ext uri="{0D108BD9-81ED-4DB2-BD59-A6C34878D82A}">
-                    <a16:rowId xmlns:a16="http://schemas.microsoft.com/office/drawing/2014/main" xmlns="" val="10000"/>
+                    <a16:rowId xmlns:a16="http://schemas.microsoft.com/office/drawing/2014/main" val="10000"/>
                   </a:ext>
                 </a:extLst>
               </a:tr>
@@ -14377,7 +14542,7 @@
                 </a:tc>
                 <a:extLst>
                   <a:ext uri="{0D108BD9-81ED-4DB2-BD59-A6C34878D82A}">
-                    <a16:rowId xmlns:a16="http://schemas.microsoft.com/office/drawing/2014/main" xmlns="" val="10001"/>
+                    <a16:rowId xmlns:a16="http://schemas.microsoft.com/office/drawing/2014/main" val="10001"/>
                   </a:ext>
                 </a:extLst>
               </a:tr>
@@ -14669,7 +14834,7 @@
                 </a:tc>
                 <a:extLst>
                   <a:ext uri="{0D108BD9-81ED-4DB2-BD59-A6C34878D82A}">
-                    <a16:rowId xmlns:a16="http://schemas.microsoft.com/office/drawing/2014/main" xmlns="" val="10002"/>
+                    <a16:rowId xmlns:a16="http://schemas.microsoft.com/office/drawing/2014/main" val="10002"/>
                   </a:ext>
                 </a:extLst>
               </a:tr>
@@ -14961,7 +15126,7 @@
                 </a:tc>
                 <a:extLst>
                   <a:ext uri="{0D108BD9-81ED-4DB2-BD59-A6C34878D82A}">
-                    <a16:rowId xmlns:a16="http://schemas.microsoft.com/office/drawing/2014/main" xmlns="" val="10003"/>
+                    <a16:rowId xmlns:a16="http://schemas.microsoft.com/office/drawing/2014/main" val="10003"/>
                   </a:ext>
                 </a:extLst>
               </a:tr>
@@ -15253,7 +15418,7 @@
                 </a:tc>
                 <a:extLst>
                   <a:ext uri="{0D108BD9-81ED-4DB2-BD59-A6C34878D82A}">
-                    <a16:rowId xmlns:a16="http://schemas.microsoft.com/office/drawing/2014/main" xmlns="" val="10004"/>
+                    <a16:rowId xmlns:a16="http://schemas.microsoft.com/office/drawing/2014/main" val="10004"/>
                   </a:ext>
                 </a:extLst>
               </a:tr>
@@ -15272,7 +15437,7 @@
         <p:spPr bwMode="auto">
           <a:xfrm>
             <a:off x="4357688" y="4565446"/>
-            <a:ext cx="4535487" cy="1815882"/>
+            <a:ext cx="4535487" cy="1569660"/>
           </a:xfrm>
           <a:prstGeom prst="rect">
             <a:avLst/>
@@ -15436,47 +15601,69 @@
               <a:buNone/>
             </a:pPr>
             <a:r>
-              <a:rPr lang="pt-BR" altLang="pt-BR" sz="1600" dirty="0"/>
+              <a:rPr lang="pt-BR" altLang="pt-BR" sz="1600" dirty="0">
+                <a:latin typeface="Tahoma" panose="020B0604030504040204" pitchFamily="34" charset="0"/>
+              </a:rPr>
               <a:t>Uma imagem é uma grade ou matriz, onde cada número representa o valor de uma grandeza (</a:t>
             </a:r>
             <a:r>
-              <a:rPr lang="pt-BR" altLang="pt-BR" sz="1600" dirty="0" err="1"/>
+              <a:rPr lang="pt-BR" altLang="pt-BR" sz="1600" dirty="0" err="1">
+                <a:latin typeface="Tahoma" panose="020B0604030504040204" pitchFamily="34" charset="0"/>
+              </a:rPr>
               <a:t>radiância</a:t>
             </a:r>
             <a:r>
-              <a:rPr lang="pt-BR" altLang="pt-BR" sz="1600" dirty="0"/>
+              <a:rPr lang="pt-BR" altLang="pt-BR" sz="1600" dirty="0">
+                <a:latin typeface="Tahoma" panose="020B0604030504040204" pitchFamily="34" charset="0"/>
+              </a:rPr>
               <a:t>, </a:t>
             </a:r>
             <a:r>
-              <a:rPr lang="pt-BR" altLang="pt-BR" sz="1600" dirty="0" err="1"/>
+              <a:rPr lang="pt-BR" altLang="pt-BR" sz="1600" dirty="0" err="1">
+                <a:latin typeface="Tahoma" panose="020B0604030504040204" pitchFamily="34" charset="0"/>
+              </a:rPr>
               <a:t>reflectância</a:t>
             </a:r>
             <a:r>
-              <a:rPr lang="pt-BR" altLang="pt-BR" sz="1600" dirty="0"/>
+              <a:rPr lang="pt-BR" altLang="pt-BR" sz="1600" dirty="0">
+                <a:latin typeface="Tahoma" panose="020B0604030504040204" pitchFamily="34" charset="0"/>
+              </a:rPr>
               <a:t>, </a:t>
             </a:r>
             <a:r>
-              <a:rPr lang="pt-BR" altLang="pt-BR" sz="1600" dirty="0" err="1"/>
+              <a:rPr lang="pt-BR" altLang="pt-BR" sz="1600" dirty="0" err="1">
+                <a:latin typeface="Tahoma" panose="020B0604030504040204" pitchFamily="34" charset="0"/>
+              </a:rPr>
               <a:t>retroespalhamento</a:t>
             </a:r>
             <a:r>
-              <a:rPr lang="pt-BR" altLang="pt-BR" sz="1600" dirty="0"/>
+              <a:rPr lang="pt-BR" altLang="pt-BR" sz="1600" dirty="0">
+                <a:latin typeface="Tahoma" panose="020B0604030504040204" pitchFamily="34" charset="0"/>
+              </a:rPr>
               <a:t>, </a:t>
             </a:r>
             <a:r>
-              <a:rPr lang="pt-BR" altLang="pt-BR" sz="1600" dirty="0" err="1"/>
+              <a:rPr lang="pt-BR" altLang="pt-BR" sz="1600" dirty="0" err="1">
+                <a:latin typeface="Tahoma" panose="020B0604030504040204" pitchFamily="34" charset="0"/>
+              </a:rPr>
               <a:t>etc</a:t>
             </a:r>
             <a:r>
-              <a:rPr lang="pt-BR" altLang="pt-BR" sz="1600" dirty="0"/>
+              <a:rPr lang="pt-BR" altLang="pt-BR" sz="1600" dirty="0">
+                <a:latin typeface="Tahoma" panose="020B0604030504040204" pitchFamily="34" charset="0"/>
+              </a:rPr>
               <a:t>) de um elemento de resolução (</a:t>
             </a:r>
             <a:r>
-              <a:rPr lang="pt-BR" altLang="pt-BR" sz="1600" i="1" dirty="0"/>
+              <a:rPr lang="pt-BR" altLang="pt-BR" sz="1600" i="1" dirty="0">
+                <a:latin typeface="Tahoma" panose="020B0604030504040204" pitchFamily="34" charset="0"/>
+              </a:rPr>
               <a:t>pixel </a:t>
             </a:r>
             <a:r>
-              <a:rPr lang="pt-BR" altLang="pt-BR" sz="1600" dirty="0"/>
+              <a:rPr lang="pt-BR" altLang="pt-BR" sz="1600" dirty="0">
+                <a:latin typeface="Tahoma" panose="020B0604030504040204" pitchFamily="34" charset="0"/>
+              </a:rPr>
               <a:t>ou célula). A visualização é feita associando-se a cada número um nível de cinza (ou uma cor). </a:t>
             </a:r>
           </a:p>
@@ -15524,7 +15711,9 @@
           <a:lstStyle/>
           <a:p>
             <a:pPr algn="ctr"/>
-            <a:endParaRPr lang="pt-BR"/>
+            <a:endParaRPr lang="pt-BR" dirty="0">
+              <a:latin typeface="Tahoma" panose="020B0604030504040204" pitchFamily="34" charset="0"/>
+            </a:endParaRPr>
           </a:p>
         </p:txBody>
       </p:sp>
@@ -15886,10 +16075,10 @@
               <a:defRPr/>
             </a:pPr>
             <a:r>
-              <a:rPr lang="pt-BR" dirty="0" smtClean="0"/>
+              <a:rPr lang="pt-BR" dirty="0"/>
               <a:t>Estatística em SR</a:t>
             </a:r>
-            <a:endParaRPr lang="pt-BR" sz="2400" dirty="0" smtClean="0"/>
+            <a:endParaRPr lang="pt-BR" sz="2400" dirty="0"/>
           </a:p>
         </p:txBody>
       </p:sp>
@@ -16113,7 +16302,8 @@
               <a:buNone/>
             </a:pPr>
             <a:r>
-              <a:rPr lang="pt-BR" altLang="pt-BR" sz="2000" kern="0" dirty="0" smtClean="0">
+              <a:rPr lang="pt-BR" altLang="pt-BR" sz="2000" kern="0" dirty="0">
+                <a:latin typeface="Tahoma" panose="020B0604030504040204" pitchFamily="34" charset="0"/>
                 <a:cs typeface="Times New Roman" charset="0"/>
                 <a:sym typeface="Symbol" pitchFamily="18" charset="2"/>
               </a:rPr>
@@ -16359,10 +16549,11 @@
                 <a:buFontTx/>
                 <a:buNone/>
               </a:pPr>
-              <a:endParaRPr lang="pt-BR" altLang="pt-BR" sz="900">
+              <a:endParaRPr lang="pt-BR" altLang="pt-BR" sz="900" dirty="0">
                 <a:solidFill>
                   <a:srgbClr val="FF0000"/>
                 </a:solidFill>
+                <a:latin typeface="Tahoma" panose="020B0604030504040204" pitchFamily="34" charset="0"/>
               </a:endParaRPr>
             </a:p>
           </p:txBody>
@@ -16534,10 +16725,11 @@
                 <a:buFontTx/>
                 <a:buNone/>
               </a:pPr>
-              <a:endParaRPr lang="pt-BR" altLang="pt-BR" sz="900">
+              <a:endParaRPr lang="pt-BR" altLang="pt-BR" sz="900" dirty="0">
                 <a:solidFill>
                   <a:srgbClr val="FF0000"/>
                 </a:solidFill>
+                <a:latin typeface="Tahoma" panose="020B0604030504040204" pitchFamily="34" charset="0"/>
               </a:endParaRPr>
             </a:p>
           </p:txBody>
@@ -16709,10 +16901,11 @@
                 <a:buFontTx/>
                 <a:buNone/>
               </a:pPr>
-              <a:endParaRPr lang="pt-BR" altLang="pt-BR" sz="900">
+              <a:endParaRPr lang="pt-BR" altLang="pt-BR" sz="900" dirty="0">
                 <a:solidFill>
                   <a:srgbClr val="FF0000"/>
                 </a:solidFill>
+                <a:latin typeface="Tahoma" panose="020B0604030504040204" pitchFamily="34" charset="0"/>
               </a:endParaRPr>
             </a:p>
           </p:txBody>
@@ -16884,10 +17077,11 @@
                 <a:buFontTx/>
                 <a:buNone/>
               </a:pPr>
-              <a:endParaRPr lang="pt-BR" altLang="pt-BR" sz="900">
+              <a:endParaRPr lang="pt-BR" altLang="pt-BR" sz="900" dirty="0">
                 <a:solidFill>
                   <a:srgbClr val="FF0000"/>
                 </a:solidFill>
+                <a:latin typeface="Tahoma" panose="020B0604030504040204" pitchFamily="34" charset="0"/>
               </a:endParaRPr>
             </a:p>
           </p:txBody>
@@ -17059,10 +17253,11 @@
                 <a:buFontTx/>
                 <a:buNone/>
               </a:pPr>
-              <a:endParaRPr lang="pt-BR" altLang="pt-BR" sz="900">
+              <a:endParaRPr lang="pt-BR" altLang="pt-BR" sz="900" dirty="0">
                 <a:solidFill>
                   <a:srgbClr val="FF0000"/>
                 </a:solidFill>
+                <a:latin typeface="Tahoma" panose="020B0604030504040204" pitchFamily="34" charset="0"/>
               </a:endParaRPr>
             </a:p>
           </p:txBody>
@@ -17234,10 +17429,11 @@
                 <a:buFontTx/>
                 <a:buNone/>
               </a:pPr>
-              <a:endParaRPr lang="pt-BR" altLang="pt-BR" sz="900">
+              <a:endParaRPr lang="pt-BR" altLang="pt-BR" sz="900" dirty="0">
                 <a:solidFill>
                   <a:srgbClr val="FF0000"/>
                 </a:solidFill>
+                <a:latin typeface="Tahoma" panose="020B0604030504040204" pitchFamily="34" charset="0"/>
               </a:endParaRPr>
             </a:p>
           </p:txBody>
@@ -17409,10 +17605,11 @@
                 <a:buFontTx/>
                 <a:buNone/>
               </a:pPr>
-              <a:endParaRPr lang="pt-BR" altLang="pt-BR" sz="900">
+              <a:endParaRPr lang="pt-BR" altLang="pt-BR" sz="900" dirty="0">
                 <a:solidFill>
                   <a:srgbClr val="FF0000"/>
                 </a:solidFill>
+                <a:latin typeface="Tahoma" panose="020B0604030504040204" pitchFamily="34" charset="0"/>
               </a:endParaRPr>
             </a:p>
           </p:txBody>
@@ -17584,10 +17781,11 @@
                 <a:buFontTx/>
                 <a:buNone/>
               </a:pPr>
-              <a:endParaRPr lang="pt-BR" altLang="pt-BR" sz="900">
+              <a:endParaRPr lang="pt-BR" altLang="pt-BR" sz="900" dirty="0">
                 <a:solidFill>
                   <a:srgbClr val="FF0000"/>
                 </a:solidFill>
+                <a:latin typeface="Tahoma" panose="020B0604030504040204" pitchFamily="34" charset="0"/>
               </a:endParaRPr>
             </a:p>
           </p:txBody>
@@ -17759,10 +17957,11 @@
                 <a:buFontTx/>
                 <a:buNone/>
               </a:pPr>
-              <a:endParaRPr lang="pt-BR" altLang="pt-BR" sz="900">
+              <a:endParaRPr lang="pt-BR" altLang="pt-BR" sz="900" dirty="0">
                 <a:solidFill>
                   <a:srgbClr val="FF0000"/>
                 </a:solidFill>
+                <a:latin typeface="Tahoma" panose="020B0604030504040204" pitchFamily="34" charset="0"/>
               </a:endParaRPr>
             </a:p>
           </p:txBody>
@@ -17934,10 +18133,11 @@
                 <a:buFontTx/>
                 <a:buNone/>
               </a:pPr>
-              <a:endParaRPr lang="pt-BR" altLang="pt-BR" sz="900">
+              <a:endParaRPr lang="pt-BR" altLang="pt-BR" sz="900" dirty="0">
                 <a:solidFill>
                   <a:srgbClr val="FF0000"/>
                 </a:solidFill>
+                <a:latin typeface="Tahoma" panose="020B0604030504040204" pitchFamily="34" charset="0"/>
               </a:endParaRPr>
             </a:p>
           </p:txBody>
@@ -18109,10 +18309,11 @@
                 <a:buFontTx/>
                 <a:buNone/>
               </a:pPr>
-              <a:endParaRPr lang="pt-BR" altLang="pt-BR" sz="900">
+              <a:endParaRPr lang="pt-BR" altLang="pt-BR" sz="900" dirty="0">
                 <a:solidFill>
                   <a:srgbClr val="FF0000"/>
                 </a:solidFill>
+                <a:latin typeface="Tahoma" panose="020B0604030504040204" pitchFamily="34" charset="0"/>
               </a:endParaRPr>
             </a:p>
           </p:txBody>
@@ -18284,10 +18485,11 @@
                 <a:buFontTx/>
                 <a:buNone/>
               </a:pPr>
-              <a:endParaRPr lang="pt-BR" altLang="pt-BR" sz="900">
+              <a:endParaRPr lang="pt-BR" altLang="pt-BR" sz="900" dirty="0">
                 <a:solidFill>
                   <a:srgbClr val="FF0000"/>
                 </a:solidFill>
+                <a:latin typeface="Tahoma" panose="020B0604030504040204" pitchFamily="34" charset="0"/>
               </a:endParaRPr>
             </a:p>
           </p:txBody>
@@ -18459,10 +18661,11 @@
                 <a:buFontTx/>
                 <a:buNone/>
               </a:pPr>
-              <a:endParaRPr lang="pt-BR" altLang="pt-BR" sz="900">
+              <a:endParaRPr lang="pt-BR" altLang="pt-BR" sz="900" dirty="0">
                 <a:solidFill>
                   <a:srgbClr val="FF0000"/>
                 </a:solidFill>
+                <a:latin typeface="Tahoma" panose="020B0604030504040204" pitchFamily="34" charset="0"/>
               </a:endParaRPr>
             </a:p>
           </p:txBody>
@@ -18634,10 +18837,11 @@
                 <a:buFontTx/>
                 <a:buNone/>
               </a:pPr>
-              <a:endParaRPr lang="pt-BR" altLang="pt-BR" sz="900">
+              <a:endParaRPr lang="pt-BR" altLang="pt-BR" sz="900" dirty="0">
                 <a:solidFill>
                   <a:srgbClr val="FF0000"/>
                 </a:solidFill>
+                <a:latin typeface="Tahoma" panose="020B0604030504040204" pitchFamily="34" charset="0"/>
               </a:endParaRPr>
             </a:p>
           </p:txBody>
@@ -18809,10 +19013,11 @@
                 <a:buFontTx/>
                 <a:buNone/>
               </a:pPr>
-              <a:endParaRPr lang="pt-BR" altLang="pt-BR" sz="900">
+              <a:endParaRPr lang="pt-BR" altLang="pt-BR" sz="900" dirty="0">
                 <a:solidFill>
                   <a:srgbClr val="FF0000"/>
                 </a:solidFill>
+                <a:latin typeface="Tahoma" panose="020B0604030504040204" pitchFamily="34" charset="0"/>
               </a:endParaRPr>
             </a:p>
           </p:txBody>
@@ -18984,10 +19189,11 @@
                 <a:buFontTx/>
                 <a:buNone/>
               </a:pPr>
-              <a:endParaRPr lang="pt-BR" altLang="pt-BR" sz="900">
+              <a:endParaRPr lang="pt-BR" altLang="pt-BR" sz="900" dirty="0">
                 <a:solidFill>
                   <a:srgbClr val="FF0000"/>
                 </a:solidFill>
+                <a:latin typeface="Tahoma" panose="020B0604030504040204" pitchFamily="34" charset="0"/>
               </a:endParaRPr>
             </a:p>
           </p:txBody>
@@ -19159,10 +19365,11 @@
                 <a:buFontTx/>
                 <a:buNone/>
               </a:pPr>
-              <a:endParaRPr lang="pt-BR" altLang="pt-BR" sz="900">
+              <a:endParaRPr lang="pt-BR" altLang="pt-BR" sz="900" dirty="0">
                 <a:solidFill>
                   <a:srgbClr val="FF0000"/>
                 </a:solidFill>
+                <a:latin typeface="Tahoma" panose="020B0604030504040204" pitchFamily="34" charset="0"/>
               </a:endParaRPr>
             </a:p>
           </p:txBody>
@@ -19334,10 +19541,11 @@
                 <a:buFontTx/>
                 <a:buNone/>
               </a:pPr>
-              <a:endParaRPr lang="pt-BR" altLang="pt-BR" sz="900">
+              <a:endParaRPr lang="pt-BR" altLang="pt-BR" sz="900" dirty="0">
                 <a:solidFill>
                   <a:srgbClr val="FF0000"/>
                 </a:solidFill>
+                <a:latin typeface="Tahoma" panose="020B0604030504040204" pitchFamily="34" charset="0"/>
               </a:endParaRPr>
             </a:p>
           </p:txBody>
@@ -19509,10 +19717,11 @@
                 <a:buFontTx/>
                 <a:buNone/>
               </a:pPr>
-              <a:endParaRPr lang="pt-BR" altLang="pt-BR" sz="900">
+              <a:endParaRPr lang="pt-BR" altLang="pt-BR" sz="900" dirty="0">
                 <a:solidFill>
                   <a:srgbClr val="FF0000"/>
                 </a:solidFill>
+                <a:latin typeface="Tahoma" panose="020B0604030504040204" pitchFamily="34" charset="0"/>
               </a:endParaRPr>
             </a:p>
           </p:txBody>
@@ -19684,10 +19893,11 @@
                 <a:buFontTx/>
                 <a:buNone/>
               </a:pPr>
-              <a:endParaRPr lang="pt-BR" altLang="pt-BR" sz="900">
+              <a:endParaRPr lang="pt-BR" altLang="pt-BR" sz="900" dirty="0">
                 <a:solidFill>
                   <a:srgbClr val="FF0000"/>
                 </a:solidFill>
+                <a:latin typeface="Tahoma" panose="020B0604030504040204" pitchFamily="34" charset="0"/>
               </a:endParaRPr>
             </a:p>
           </p:txBody>
@@ -19859,10 +20069,11 @@
                 <a:buFontTx/>
                 <a:buNone/>
               </a:pPr>
-              <a:endParaRPr lang="pt-BR" altLang="pt-BR" sz="900">
+              <a:endParaRPr lang="pt-BR" altLang="pt-BR" sz="900" dirty="0">
                 <a:solidFill>
                   <a:srgbClr val="FF0000"/>
                 </a:solidFill>
+                <a:latin typeface="Tahoma" panose="020B0604030504040204" pitchFamily="34" charset="0"/>
               </a:endParaRPr>
             </a:p>
           </p:txBody>
@@ -20034,10 +20245,11 @@
                 <a:buFontTx/>
                 <a:buNone/>
               </a:pPr>
-              <a:endParaRPr lang="pt-BR" altLang="pt-BR" sz="900">
+              <a:endParaRPr lang="pt-BR" altLang="pt-BR" sz="900" dirty="0">
                 <a:solidFill>
                   <a:srgbClr val="FF0000"/>
                 </a:solidFill>
+                <a:latin typeface="Tahoma" panose="020B0604030504040204" pitchFamily="34" charset="0"/>
               </a:endParaRPr>
             </a:p>
           </p:txBody>
@@ -20209,10 +20421,11 @@
                 <a:buFontTx/>
                 <a:buNone/>
               </a:pPr>
-              <a:endParaRPr lang="pt-BR" altLang="pt-BR" sz="900">
+              <a:endParaRPr lang="pt-BR" altLang="pt-BR" sz="900" dirty="0">
                 <a:solidFill>
                   <a:srgbClr val="FF0000"/>
                 </a:solidFill>
+                <a:latin typeface="Tahoma" panose="020B0604030504040204" pitchFamily="34" charset="0"/>
               </a:endParaRPr>
             </a:p>
           </p:txBody>
@@ -20384,10 +20597,11 @@
                 <a:buFontTx/>
                 <a:buNone/>
               </a:pPr>
-              <a:endParaRPr lang="pt-BR" altLang="pt-BR" sz="900">
+              <a:endParaRPr lang="pt-BR" altLang="pt-BR" sz="900" dirty="0">
                 <a:solidFill>
                   <a:srgbClr val="FF0000"/>
                 </a:solidFill>
+                <a:latin typeface="Tahoma" panose="020B0604030504040204" pitchFamily="34" charset="0"/>
               </a:endParaRPr>
             </a:p>
           </p:txBody>
@@ -20559,10 +20773,11 @@
                 <a:buFontTx/>
                 <a:buNone/>
               </a:pPr>
-              <a:endParaRPr lang="pt-BR" altLang="pt-BR" sz="900">
+              <a:endParaRPr lang="pt-BR" altLang="pt-BR" sz="900" dirty="0">
                 <a:solidFill>
                   <a:srgbClr val="FF0000"/>
                 </a:solidFill>
+                <a:latin typeface="Tahoma" panose="020B0604030504040204" pitchFamily="34" charset="0"/>
               </a:endParaRPr>
             </a:p>
           </p:txBody>
@@ -20669,7 +20884,9 @@
           <a:lstStyle/>
           <a:p>
             <a:pPr algn="ctr"/>
-            <a:endParaRPr lang="pt-BR"/>
+            <a:endParaRPr lang="pt-BR" dirty="0">
+              <a:latin typeface="Tahoma" panose="020B0604030504040204" pitchFamily="34" charset="0"/>
+            </a:endParaRPr>
           </a:p>
         </p:txBody>
       </p:sp>
@@ -20699,35 +20916,35 @@
                 <a:gridCol w="409453">
                   <a:extLst>
                     <a:ext uri="{9D8B030D-6E8A-4147-A177-3AD203B41FA5}">
-                      <a16:colId xmlns:a16="http://schemas.microsoft.com/office/drawing/2014/main" xmlns="" val="20000"/>
+                      <a16:colId xmlns:a16="http://schemas.microsoft.com/office/drawing/2014/main" val="20000"/>
                     </a:ext>
                   </a:extLst>
                 </a:gridCol>
                 <a:gridCol w="409453">
                   <a:extLst>
                     <a:ext uri="{9D8B030D-6E8A-4147-A177-3AD203B41FA5}">
-                      <a16:colId xmlns:a16="http://schemas.microsoft.com/office/drawing/2014/main" xmlns="" val="20001"/>
+                      <a16:colId xmlns:a16="http://schemas.microsoft.com/office/drawing/2014/main" val="20001"/>
                     </a:ext>
                   </a:extLst>
                 </a:gridCol>
                 <a:gridCol w="409453">
                   <a:extLst>
                     <a:ext uri="{9D8B030D-6E8A-4147-A177-3AD203B41FA5}">
-                      <a16:colId xmlns:a16="http://schemas.microsoft.com/office/drawing/2014/main" xmlns="" val="20002"/>
+                      <a16:colId xmlns:a16="http://schemas.microsoft.com/office/drawing/2014/main" val="20002"/>
                     </a:ext>
                   </a:extLst>
                 </a:gridCol>
                 <a:gridCol w="409453">
                   <a:extLst>
                     <a:ext uri="{9D8B030D-6E8A-4147-A177-3AD203B41FA5}">
-                      <a16:colId xmlns:a16="http://schemas.microsoft.com/office/drawing/2014/main" xmlns="" val="20003"/>
+                      <a16:colId xmlns:a16="http://schemas.microsoft.com/office/drawing/2014/main" val="20003"/>
                     </a:ext>
                   </a:extLst>
                 </a:gridCol>
                 <a:gridCol w="409453">
                   <a:extLst>
                     <a:ext uri="{9D8B030D-6E8A-4147-A177-3AD203B41FA5}">
-                      <a16:colId xmlns:a16="http://schemas.microsoft.com/office/drawing/2014/main" xmlns="" val="20004"/>
+                      <a16:colId xmlns:a16="http://schemas.microsoft.com/office/drawing/2014/main" val="20004"/>
                     </a:ext>
                   </a:extLst>
                 </a:gridCol>
@@ -21020,7 +21237,7 @@
                 </a:tc>
                 <a:extLst>
                   <a:ext uri="{0D108BD9-81ED-4DB2-BD59-A6C34878D82A}">
-                    <a16:rowId xmlns:a16="http://schemas.microsoft.com/office/drawing/2014/main" xmlns="" val="10000"/>
+                    <a16:rowId xmlns:a16="http://schemas.microsoft.com/office/drawing/2014/main" val="10000"/>
                   </a:ext>
                 </a:extLst>
               </a:tr>
@@ -21312,7 +21529,7 @@
                 </a:tc>
                 <a:extLst>
                   <a:ext uri="{0D108BD9-81ED-4DB2-BD59-A6C34878D82A}">
-                    <a16:rowId xmlns:a16="http://schemas.microsoft.com/office/drawing/2014/main" xmlns="" val="10001"/>
+                    <a16:rowId xmlns:a16="http://schemas.microsoft.com/office/drawing/2014/main" val="10001"/>
                   </a:ext>
                 </a:extLst>
               </a:tr>
@@ -21604,7 +21821,7 @@
                 </a:tc>
                 <a:extLst>
                   <a:ext uri="{0D108BD9-81ED-4DB2-BD59-A6C34878D82A}">
-                    <a16:rowId xmlns:a16="http://schemas.microsoft.com/office/drawing/2014/main" xmlns="" val="10002"/>
+                    <a16:rowId xmlns:a16="http://schemas.microsoft.com/office/drawing/2014/main" val="10002"/>
                   </a:ext>
                 </a:extLst>
               </a:tr>
@@ -21896,7 +22113,7 @@
                 </a:tc>
                 <a:extLst>
                   <a:ext uri="{0D108BD9-81ED-4DB2-BD59-A6C34878D82A}">
-                    <a16:rowId xmlns:a16="http://schemas.microsoft.com/office/drawing/2014/main" xmlns="" val="10003"/>
+                    <a16:rowId xmlns:a16="http://schemas.microsoft.com/office/drawing/2014/main" val="10003"/>
                   </a:ext>
                 </a:extLst>
               </a:tr>
@@ -22188,7 +22405,7 @@
                 </a:tc>
                 <a:extLst>
                   <a:ext uri="{0D108BD9-81ED-4DB2-BD59-A6C34878D82A}">
-                    <a16:rowId xmlns:a16="http://schemas.microsoft.com/office/drawing/2014/main" xmlns="" val="10004"/>
+                    <a16:rowId xmlns:a16="http://schemas.microsoft.com/office/drawing/2014/main" val="10004"/>
                   </a:ext>
                 </a:extLst>
               </a:tr>
@@ -22371,16 +22588,10 @@
               <a:buNone/>
             </a:pPr>
             <a:r>
-              <a:rPr lang="pt-BR" altLang="pt-BR" sz="1600" dirty="0"/>
-              <a:t>Numa imagem classificada, cada elemento de resolução está associado a uma </a:t>
-            </a:r>
-            <a:r>
-              <a:rPr lang="pt-BR" altLang="pt-BR" sz="1600" dirty="0" smtClean="0"/>
-              <a:t>classe (ou rótulo) </a:t>
-            </a:r>
-            <a:r>
-              <a:rPr lang="pt-BR" altLang="pt-BR" sz="1600" dirty="0"/>
-              <a:t>de acordo com um conjunto de regras.</a:t>
+              <a:rPr lang="pt-BR" altLang="pt-BR" sz="1600" dirty="0">
+                <a:latin typeface="Tahoma" panose="020B0604030504040204" pitchFamily="34" charset="0"/>
+              </a:rPr>
+              <a:t>Numa imagem classificada, cada elemento de resolução está associado a uma classe (ou rótulo) de acordo com um conjunto de regras.</a:t>
             </a:r>
           </a:p>
         </p:txBody>
@@ -22427,7 +22638,9 @@
           <a:lstStyle/>
           <a:p>
             <a:pPr algn="ctr"/>
-            <a:endParaRPr lang="pt-BR"/>
+            <a:endParaRPr lang="pt-BR" dirty="0">
+              <a:latin typeface="Tahoma" panose="020B0604030504040204" pitchFamily="34" charset="0"/>
+            </a:endParaRPr>
           </a:p>
         </p:txBody>
       </p:sp>
@@ -22549,10 +22762,10 @@
         </p:nvGrpSpPr>
         <p:grpSpPr bwMode="auto">
           <a:xfrm>
-            <a:off x="5556969" y="5503317"/>
-            <a:ext cx="2111375" cy="661987"/>
+            <a:off x="5556968" y="5503317"/>
+            <a:ext cx="2178419" cy="661987"/>
             <a:chOff x="6588224" y="5733256"/>
-            <a:chExt cx="2110485" cy="661091"/>
+            <a:chExt cx="2177501" cy="661091"/>
           </a:xfrm>
         </p:grpSpPr>
         <p:grpSp>
@@ -22566,9 +22779,9 @@
           <p:grpSpPr bwMode="auto">
             <a:xfrm>
               <a:off x="6588224" y="6047326"/>
-              <a:ext cx="2110485" cy="347021"/>
+              <a:ext cx="2177501" cy="347021"/>
               <a:chOff x="6572250" y="5714466"/>
-              <a:chExt cx="2110485" cy="347021"/>
+              <a:chExt cx="2177501" cy="347021"/>
             </a:xfrm>
           </p:grpSpPr>
           <p:pic>
@@ -22854,12 +23067,15 @@
                   <a:buNone/>
                 </a:pPr>
                 <a:r>
-                  <a:rPr lang="pt-BR" altLang="pt-BR" sz="1600">
+                  <a:rPr lang="pt-BR" altLang="pt-BR" sz="1600" dirty="0">
+                    <a:latin typeface="Tahoma" panose="020B0604030504040204" pitchFamily="34" charset="0"/>
                     <a:sym typeface="Symbol" pitchFamily="18" charset="2"/>
                   </a:rPr>
                   <a:t> 100</a:t>
                 </a:r>
-                <a:endParaRPr lang="pt-BR" altLang="pt-BR" sz="1600"/>
+                <a:endParaRPr lang="pt-BR" altLang="pt-BR" sz="1600" dirty="0">
+                  <a:latin typeface="Tahoma" panose="020B0604030504040204" pitchFamily="34" charset="0"/>
+                </a:endParaRPr>
               </a:p>
             </p:txBody>
           </p:sp>
@@ -22874,7 +23090,7 @@
             <p:spPr bwMode="auto">
               <a:xfrm>
                 <a:off x="8015565" y="5722933"/>
-                <a:ext cx="667170" cy="338554"/>
+                <a:ext cx="734186" cy="338096"/>
               </a:xfrm>
               <a:prstGeom prst="rect">
                 <a:avLst/>
@@ -23038,12 +23254,15 @@
                   <a:buNone/>
                 </a:pPr>
                 <a:r>
-                  <a:rPr lang="pt-BR" altLang="pt-BR" sz="1600">
+                  <a:rPr lang="pt-BR" altLang="pt-BR" sz="1600" dirty="0">
+                    <a:latin typeface="Tahoma" panose="020B0604030504040204" pitchFamily="34" charset="0"/>
                     <a:sym typeface="Symbol" pitchFamily="18" charset="2"/>
                   </a:rPr>
                   <a:t>&gt; 100</a:t>
                 </a:r>
-                <a:endParaRPr lang="pt-BR" altLang="pt-BR" sz="1600"/>
+                <a:endParaRPr lang="pt-BR" altLang="pt-BR" sz="1600" dirty="0">
+                  <a:latin typeface="Tahoma" panose="020B0604030504040204" pitchFamily="34" charset="0"/>
+                </a:endParaRPr>
               </a:p>
             </p:txBody>
           </p:sp>
@@ -23223,7 +23442,9 @@
                 <a:buNone/>
               </a:pPr>
               <a:r>
-                <a:rPr lang="pt-BR" altLang="pt-BR" sz="1600" dirty="0"/>
+                <a:rPr lang="pt-BR" altLang="pt-BR" sz="1600" dirty="0">
+                  <a:latin typeface="Tahoma" panose="020B0604030504040204" pitchFamily="34" charset="0"/>
+                </a:rPr>
                 <a:t>fatiamento</a:t>
               </a:r>
             </a:p>
@@ -23716,10 +23937,11 @@
                 <a:buFontTx/>
                 <a:buNone/>
               </a:pPr>
-              <a:endParaRPr lang="pt-BR" altLang="pt-BR" sz="900">
+              <a:endParaRPr lang="pt-BR" altLang="pt-BR" sz="900" dirty="0">
                 <a:solidFill>
                   <a:srgbClr val="FF0000"/>
                 </a:solidFill>
+                <a:latin typeface="Tahoma" panose="020B0604030504040204" pitchFamily="34" charset="0"/>
               </a:endParaRPr>
             </a:p>
           </p:txBody>
@@ -23891,10 +24113,11 @@
                 <a:buFontTx/>
                 <a:buNone/>
               </a:pPr>
-              <a:endParaRPr lang="pt-BR" altLang="pt-BR" sz="900">
+              <a:endParaRPr lang="pt-BR" altLang="pt-BR" sz="900" dirty="0">
                 <a:solidFill>
                   <a:srgbClr val="FF0000"/>
                 </a:solidFill>
+                <a:latin typeface="Tahoma" panose="020B0604030504040204" pitchFamily="34" charset="0"/>
               </a:endParaRPr>
             </a:p>
           </p:txBody>
@@ -24066,10 +24289,11 @@
                 <a:buFontTx/>
                 <a:buNone/>
               </a:pPr>
-              <a:endParaRPr lang="pt-BR" altLang="pt-BR" sz="900">
+              <a:endParaRPr lang="pt-BR" altLang="pt-BR" sz="900" dirty="0">
                 <a:solidFill>
                   <a:srgbClr val="FF0000"/>
                 </a:solidFill>
+                <a:latin typeface="Tahoma" panose="020B0604030504040204" pitchFamily="34" charset="0"/>
               </a:endParaRPr>
             </a:p>
           </p:txBody>
@@ -24241,10 +24465,11 @@
                 <a:buFontTx/>
                 <a:buNone/>
               </a:pPr>
-              <a:endParaRPr lang="pt-BR" altLang="pt-BR" sz="900">
+              <a:endParaRPr lang="pt-BR" altLang="pt-BR" sz="900" dirty="0">
                 <a:solidFill>
                   <a:srgbClr val="FF0000"/>
                 </a:solidFill>
+                <a:latin typeface="Tahoma" panose="020B0604030504040204" pitchFamily="34" charset="0"/>
               </a:endParaRPr>
             </a:p>
           </p:txBody>
@@ -24416,10 +24641,11 @@
                 <a:buFontTx/>
                 <a:buNone/>
               </a:pPr>
-              <a:endParaRPr lang="pt-BR" altLang="pt-BR" sz="900">
+              <a:endParaRPr lang="pt-BR" altLang="pt-BR" sz="900" dirty="0">
                 <a:solidFill>
                   <a:srgbClr val="FF0000"/>
                 </a:solidFill>
+                <a:latin typeface="Tahoma" panose="020B0604030504040204" pitchFamily="34" charset="0"/>
               </a:endParaRPr>
             </a:p>
           </p:txBody>
@@ -24591,10 +24817,11 @@
                 <a:buFontTx/>
                 <a:buNone/>
               </a:pPr>
-              <a:endParaRPr lang="pt-BR" altLang="pt-BR" sz="900">
+              <a:endParaRPr lang="pt-BR" altLang="pt-BR" sz="900" dirty="0">
                 <a:solidFill>
                   <a:srgbClr val="FF0000"/>
                 </a:solidFill>
+                <a:latin typeface="Tahoma" panose="020B0604030504040204" pitchFamily="34" charset="0"/>
               </a:endParaRPr>
             </a:p>
           </p:txBody>
@@ -24766,10 +24993,11 @@
                 <a:buFontTx/>
                 <a:buNone/>
               </a:pPr>
-              <a:endParaRPr lang="pt-BR" altLang="pt-BR" sz="900">
+              <a:endParaRPr lang="pt-BR" altLang="pt-BR" sz="900" dirty="0">
                 <a:solidFill>
                   <a:srgbClr val="FF0000"/>
                 </a:solidFill>
+                <a:latin typeface="Tahoma" panose="020B0604030504040204" pitchFamily="34" charset="0"/>
               </a:endParaRPr>
             </a:p>
           </p:txBody>
@@ -24941,10 +25169,11 @@
                 <a:buFontTx/>
                 <a:buNone/>
               </a:pPr>
-              <a:endParaRPr lang="pt-BR" altLang="pt-BR" sz="900">
+              <a:endParaRPr lang="pt-BR" altLang="pt-BR" sz="900" dirty="0">
                 <a:solidFill>
                   <a:srgbClr val="FF0000"/>
                 </a:solidFill>
+                <a:latin typeface="Tahoma" panose="020B0604030504040204" pitchFamily="34" charset="0"/>
               </a:endParaRPr>
             </a:p>
           </p:txBody>
@@ -25116,10 +25345,11 @@
                 <a:buFontTx/>
                 <a:buNone/>
               </a:pPr>
-              <a:endParaRPr lang="pt-BR" altLang="pt-BR" sz="900">
+              <a:endParaRPr lang="pt-BR" altLang="pt-BR" sz="900" dirty="0">
                 <a:solidFill>
                   <a:srgbClr val="FF0000"/>
                 </a:solidFill>
+                <a:latin typeface="Tahoma" panose="020B0604030504040204" pitchFamily="34" charset="0"/>
               </a:endParaRPr>
             </a:p>
           </p:txBody>
@@ -25291,10 +25521,11 @@
                 <a:buFontTx/>
                 <a:buNone/>
               </a:pPr>
-              <a:endParaRPr lang="pt-BR" altLang="pt-BR" sz="900">
+              <a:endParaRPr lang="pt-BR" altLang="pt-BR" sz="900" dirty="0">
                 <a:solidFill>
                   <a:srgbClr val="FF0000"/>
                 </a:solidFill>
+                <a:latin typeface="Tahoma" panose="020B0604030504040204" pitchFamily="34" charset="0"/>
               </a:endParaRPr>
             </a:p>
           </p:txBody>
@@ -25466,10 +25697,11 @@
                 <a:buFontTx/>
                 <a:buNone/>
               </a:pPr>
-              <a:endParaRPr lang="pt-BR" altLang="pt-BR" sz="900">
+              <a:endParaRPr lang="pt-BR" altLang="pt-BR" sz="900" dirty="0">
                 <a:solidFill>
                   <a:srgbClr val="FF0000"/>
                 </a:solidFill>
+                <a:latin typeface="Tahoma" panose="020B0604030504040204" pitchFamily="34" charset="0"/>
               </a:endParaRPr>
             </a:p>
           </p:txBody>
@@ -25641,10 +25873,11 @@
                 <a:buFontTx/>
                 <a:buNone/>
               </a:pPr>
-              <a:endParaRPr lang="pt-BR" altLang="pt-BR" sz="900">
+              <a:endParaRPr lang="pt-BR" altLang="pt-BR" sz="900" dirty="0">
                 <a:solidFill>
                   <a:srgbClr val="FF0000"/>
                 </a:solidFill>
+                <a:latin typeface="Tahoma" panose="020B0604030504040204" pitchFamily="34" charset="0"/>
               </a:endParaRPr>
             </a:p>
           </p:txBody>
@@ -25816,10 +26049,11 @@
                 <a:buFontTx/>
                 <a:buNone/>
               </a:pPr>
-              <a:endParaRPr lang="pt-BR" altLang="pt-BR" sz="900">
+              <a:endParaRPr lang="pt-BR" altLang="pt-BR" sz="900" dirty="0">
                 <a:solidFill>
                   <a:srgbClr val="FF0000"/>
                 </a:solidFill>
+                <a:latin typeface="Tahoma" panose="020B0604030504040204" pitchFamily="34" charset="0"/>
               </a:endParaRPr>
             </a:p>
           </p:txBody>
@@ -25991,10 +26225,11 @@
                 <a:buFontTx/>
                 <a:buNone/>
               </a:pPr>
-              <a:endParaRPr lang="pt-BR" altLang="pt-BR" sz="900">
+              <a:endParaRPr lang="pt-BR" altLang="pt-BR" sz="900" dirty="0">
                 <a:solidFill>
                   <a:srgbClr val="FF0000"/>
                 </a:solidFill>
+                <a:latin typeface="Tahoma" panose="020B0604030504040204" pitchFamily="34" charset="0"/>
               </a:endParaRPr>
             </a:p>
           </p:txBody>
@@ -26166,10 +26401,11 @@
                 <a:buFontTx/>
                 <a:buNone/>
               </a:pPr>
-              <a:endParaRPr lang="pt-BR" altLang="pt-BR" sz="900">
+              <a:endParaRPr lang="pt-BR" altLang="pt-BR" sz="900" dirty="0">
                 <a:solidFill>
                   <a:srgbClr val="FF0000"/>
                 </a:solidFill>
+                <a:latin typeface="Tahoma" panose="020B0604030504040204" pitchFamily="34" charset="0"/>
               </a:endParaRPr>
             </a:p>
           </p:txBody>
@@ -26341,10 +26577,11 @@
                 <a:buFontTx/>
                 <a:buNone/>
               </a:pPr>
-              <a:endParaRPr lang="pt-BR" altLang="pt-BR" sz="900">
+              <a:endParaRPr lang="pt-BR" altLang="pt-BR" sz="900" dirty="0">
                 <a:solidFill>
                   <a:srgbClr val="FF0000"/>
                 </a:solidFill>
+                <a:latin typeface="Tahoma" panose="020B0604030504040204" pitchFamily="34" charset="0"/>
               </a:endParaRPr>
             </a:p>
           </p:txBody>
@@ -26516,10 +26753,11 @@
                 <a:buFontTx/>
                 <a:buNone/>
               </a:pPr>
-              <a:endParaRPr lang="pt-BR" altLang="pt-BR" sz="900">
+              <a:endParaRPr lang="pt-BR" altLang="pt-BR" sz="900" dirty="0">
                 <a:solidFill>
                   <a:srgbClr val="FF0000"/>
                 </a:solidFill>
+                <a:latin typeface="Tahoma" panose="020B0604030504040204" pitchFamily="34" charset="0"/>
               </a:endParaRPr>
             </a:p>
           </p:txBody>
@@ -26691,10 +26929,11 @@
                 <a:buFontTx/>
                 <a:buNone/>
               </a:pPr>
-              <a:endParaRPr lang="pt-BR" altLang="pt-BR" sz="900">
+              <a:endParaRPr lang="pt-BR" altLang="pt-BR" sz="900" dirty="0">
                 <a:solidFill>
                   <a:srgbClr val="FF0000"/>
                 </a:solidFill>
+                <a:latin typeface="Tahoma" panose="020B0604030504040204" pitchFamily="34" charset="0"/>
               </a:endParaRPr>
             </a:p>
           </p:txBody>
@@ -26866,10 +27105,11 @@
                 <a:buFontTx/>
                 <a:buNone/>
               </a:pPr>
-              <a:endParaRPr lang="pt-BR" altLang="pt-BR" sz="900">
+              <a:endParaRPr lang="pt-BR" altLang="pt-BR" sz="900" dirty="0">
                 <a:solidFill>
                   <a:srgbClr val="FF0000"/>
                 </a:solidFill>
+                <a:latin typeface="Tahoma" panose="020B0604030504040204" pitchFamily="34" charset="0"/>
               </a:endParaRPr>
             </a:p>
           </p:txBody>
@@ -27041,10 +27281,11 @@
                 <a:buFontTx/>
                 <a:buNone/>
               </a:pPr>
-              <a:endParaRPr lang="pt-BR" altLang="pt-BR" sz="900">
+              <a:endParaRPr lang="pt-BR" altLang="pt-BR" sz="900" dirty="0">
                 <a:solidFill>
                   <a:srgbClr val="FF0000"/>
                 </a:solidFill>
+                <a:latin typeface="Tahoma" panose="020B0604030504040204" pitchFamily="34" charset="0"/>
               </a:endParaRPr>
             </a:p>
           </p:txBody>
@@ -27216,10 +27457,11 @@
                 <a:buFontTx/>
                 <a:buNone/>
               </a:pPr>
-              <a:endParaRPr lang="pt-BR" altLang="pt-BR" sz="900">
+              <a:endParaRPr lang="pt-BR" altLang="pt-BR" sz="900" dirty="0">
                 <a:solidFill>
                   <a:srgbClr val="FF0000"/>
                 </a:solidFill>
+                <a:latin typeface="Tahoma" panose="020B0604030504040204" pitchFamily="34" charset="0"/>
               </a:endParaRPr>
             </a:p>
           </p:txBody>
@@ -27391,10 +27633,11 @@
                 <a:buFontTx/>
                 <a:buNone/>
               </a:pPr>
-              <a:endParaRPr lang="pt-BR" altLang="pt-BR" sz="900">
+              <a:endParaRPr lang="pt-BR" altLang="pt-BR" sz="900" dirty="0">
                 <a:solidFill>
                   <a:srgbClr val="FF0000"/>
                 </a:solidFill>
+                <a:latin typeface="Tahoma" panose="020B0604030504040204" pitchFamily="34" charset="0"/>
               </a:endParaRPr>
             </a:p>
           </p:txBody>
@@ -27566,10 +27809,11 @@
                 <a:buFontTx/>
                 <a:buNone/>
               </a:pPr>
-              <a:endParaRPr lang="pt-BR" altLang="pt-BR" sz="900">
+              <a:endParaRPr lang="pt-BR" altLang="pt-BR" sz="900" dirty="0">
                 <a:solidFill>
                   <a:srgbClr val="FF0000"/>
                 </a:solidFill>
+                <a:latin typeface="Tahoma" panose="020B0604030504040204" pitchFamily="34" charset="0"/>
               </a:endParaRPr>
             </a:p>
           </p:txBody>
@@ -27741,10 +27985,11 @@
                 <a:buFontTx/>
                 <a:buNone/>
               </a:pPr>
-              <a:endParaRPr lang="pt-BR" altLang="pt-BR" sz="900">
+              <a:endParaRPr lang="pt-BR" altLang="pt-BR" sz="900" dirty="0">
                 <a:solidFill>
                   <a:srgbClr val="FF0000"/>
                 </a:solidFill>
+                <a:latin typeface="Tahoma" panose="020B0604030504040204" pitchFamily="34" charset="0"/>
               </a:endParaRPr>
             </a:p>
           </p:txBody>
@@ -27916,10 +28161,11 @@
                 <a:buFontTx/>
                 <a:buNone/>
               </a:pPr>
-              <a:endParaRPr lang="pt-BR" altLang="pt-BR" sz="900">
+              <a:endParaRPr lang="pt-BR" altLang="pt-BR" sz="900" dirty="0">
                 <a:solidFill>
                   <a:srgbClr val="FF0000"/>
                 </a:solidFill>
+                <a:latin typeface="Tahoma" panose="020B0604030504040204" pitchFamily="34" charset="0"/>
               </a:endParaRPr>
             </a:p>
           </p:txBody>
@@ -27944,10 +28190,10 @@
               <a:defRPr/>
             </a:pPr>
             <a:r>
-              <a:rPr lang="pt-BR" dirty="0" smtClean="0"/>
+              <a:rPr lang="pt-BR" dirty="0"/>
               <a:t>Estatística em SR (imagens)</a:t>
             </a:r>
-            <a:endParaRPr lang="pt-BR" sz="2400" dirty="0" smtClean="0"/>
+            <a:endParaRPr lang="pt-BR" sz="2400" dirty="0"/>
           </a:p>
         </p:txBody>
       </p:sp>
@@ -28014,11 +28260,13 @@
                 </a:pPr>
                 <a:r>
                   <a:rPr lang="en-US" sz="900" dirty="0">
+                    <a:latin typeface="Tahoma" panose="020B0604030504040204" pitchFamily="34" charset="0"/>
                     <a:cs typeface="+mn-cs"/>
                   </a:rPr>
                   <a:t>99</a:t>
                 </a:r>
                 <a:endParaRPr lang="pt-BR" sz="900" dirty="0">
+                  <a:latin typeface="Tahoma" panose="020B0604030504040204" pitchFamily="34" charset="0"/>
                   <a:cs typeface="+mn-cs"/>
                 </a:endParaRPr>
               </a:p>
@@ -28054,11 +28302,13 @@
                 </a:pPr>
                 <a:r>
                   <a:rPr lang="en-US" sz="900" dirty="0">
+                    <a:latin typeface="Tahoma" panose="020B0604030504040204" pitchFamily="34" charset="0"/>
                     <a:cs typeface="+mn-cs"/>
                   </a:rPr>
                   <a:t>174</a:t>
                 </a:r>
                 <a:endParaRPr lang="pt-BR" sz="900" dirty="0">
+                  <a:latin typeface="Tahoma" panose="020B0604030504040204" pitchFamily="34" charset="0"/>
                   <a:cs typeface="+mn-cs"/>
                 </a:endParaRPr>
               </a:p>
@@ -28094,11 +28344,13 @@
                 </a:pPr>
                 <a:r>
                   <a:rPr lang="en-US" sz="900" dirty="0">
+                    <a:latin typeface="Tahoma" panose="020B0604030504040204" pitchFamily="34" charset="0"/>
                     <a:cs typeface="+mn-cs"/>
                   </a:rPr>
                   <a:t>174</a:t>
                 </a:r>
                 <a:endParaRPr lang="pt-BR" sz="900" dirty="0">
+                  <a:latin typeface="Tahoma" panose="020B0604030504040204" pitchFamily="34" charset="0"/>
                   <a:cs typeface="+mn-cs"/>
                 </a:endParaRPr>
               </a:p>
@@ -28134,11 +28386,13 @@
                 </a:pPr>
                 <a:r>
                   <a:rPr lang="en-US" sz="900" dirty="0">
+                    <a:latin typeface="Tahoma" panose="020B0604030504040204" pitchFamily="34" charset="0"/>
                     <a:cs typeface="+mn-cs"/>
                   </a:rPr>
                   <a:t>187</a:t>
                 </a:r>
                 <a:endParaRPr lang="pt-BR" sz="900" dirty="0">
+                  <a:latin typeface="Tahoma" panose="020B0604030504040204" pitchFamily="34" charset="0"/>
                   <a:cs typeface="+mn-cs"/>
                 </a:endParaRPr>
               </a:p>
@@ -28174,11 +28428,13 @@
                 </a:pPr>
                 <a:r>
                   <a:rPr lang="en-US" sz="900" dirty="0">
+                    <a:latin typeface="Tahoma" panose="020B0604030504040204" pitchFamily="34" charset="0"/>
                     <a:cs typeface="+mn-cs"/>
                   </a:rPr>
                   <a:t>162</a:t>
                 </a:r>
                 <a:endParaRPr lang="pt-BR" sz="900" dirty="0">
+                  <a:latin typeface="Tahoma" panose="020B0604030504040204" pitchFamily="34" charset="0"/>
                   <a:cs typeface="+mn-cs"/>
                 </a:endParaRPr>
               </a:p>
@@ -28214,11 +28470,13 @@
                 </a:pPr>
                 <a:r>
                   <a:rPr lang="en-US" sz="900" dirty="0">
+                    <a:latin typeface="Tahoma" panose="020B0604030504040204" pitchFamily="34" charset="0"/>
                     <a:cs typeface="+mn-cs"/>
                   </a:rPr>
                   <a:t>163</a:t>
                 </a:r>
                 <a:endParaRPr lang="pt-BR" sz="900" dirty="0">
+                  <a:latin typeface="Tahoma" panose="020B0604030504040204" pitchFamily="34" charset="0"/>
                   <a:cs typeface="+mn-cs"/>
                 </a:endParaRPr>
               </a:p>
@@ -28254,11 +28512,13 @@
                 </a:pPr>
                 <a:r>
                   <a:rPr lang="en-US" sz="900" dirty="0">
+                    <a:latin typeface="Tahoma" panose="020B0604030504040204" pitchFamily="34" charset="0"/>
                     <a:cs typeface="+mn-cs"/>
                   </a:rPr>
                   <a:t>16</a:t>
                 </a:r>
                 <a:endParaRPr lang="pt-BR" sz="900" dirty="0">
+                  <a:latin typeface="Tahoma" panose="020B0604030504040204" pitchFamily="34" charset="0"/>
                   <a:cs typeface="+mn-cs"/>
                 </a:endParaRPr>
               </a:p>
@@ -28294,11 +28554,13 @@
                 </a:pPr>
                 <a:r>
                   <a:rPr lang="en-US" sz="900" dirty="0">
+                    <a:latin typeface="Tahoma" panose="020B0604030504040204" pitchFamily="34" charset="0"/>
                     <a:cs typeface="+mn-cs"/>
                   </a:rPr>
                   <a:t>7</a:t>
                 </a:r>
                 <a:endParaRPr lang="pt-BR" sz="900" dirty="0">
+                  <a:latin typeface="Tahoma" panose="020B0604030504040204" pitchFamily="34" charset="0"/>
                   <a:cs typeface="+mn-cs"/>
                 </a:endParaRPr>
               </a:p>
@@ -28334,11 +28596,13 @@
                 </a:pPr>
                 <a:r>
                   <a:rPr lang="en-US" sz="900" dirty="0">
+                    <a:latin typeface="Tahoma" panose="020B0604030504040204" pitchFamily="34" charset="0"/>
                     <a:cs typeface="+mn-cs"/>
                   </a:rPr>
                   <a:t>16</a:t>
                 </a:r>
                 <a:endParaRPr lang="pt-BR" sz="900" dirty="0">
+                  <a:latin typeface="Tahoma" panose="020B0604030504040204" pitchFamily="34" charset="0"/>
                   <a:cs typeface="+mn-cs"/>
                 </a:endParaRPr>
               </a:p>
@@ -28374,11 +28638,13 @@
                 </a:pPr>
                 <a:r>
                   <a:rPr lang="en-US" sz="900" dirty="0">
+                    <a:latin typeface="Tahoma" panose="020B0604030504040204" pitchFamily="34" charset="0"/>
                     <a:cs typeface="+mn-cs"/>
                   </a:rPr>
                   <a:t>156</a:t>
                 </a:r>
                 <a:endParaRPr lang="pt-BR" sz="900" dirty="0">
+                  <a:latin typeface="Tahoma" panose="020B0604030504040204" pitchFamily="34" charset="0"/>
                   <a:cs typeface="+mn-cs"/>
                 </a:endParaRPr>
               </a:p>
@@ -28414,11 +28680,13 @@
                 </a:pPr>
                 <a:r>
                   <a:rPr lang="en-US" sz="900" dirty="0">
+                    <a:latin typeface="Tahoma" panose="020B0604030504040204" pitchFamily="34" charset="0"/>
                     <a:cs typeface="+mn-cs"/>
                   </a:rPr>
                   <a:t>175</a:t>
                 </a:r>
                 <a:endParaRPr lang="pt-BR" sz="900" dirty="0">
+                  <a:latin typeface="Tahoma" panose="020B0604030504040204" pitchFamily="34" charset="0"/>
                   <a:cs typeface="+mn-cs"/>
                 </a:endParaRPr>
               </a:p>
@@ -28454,11 +28722,13 @@
                 </a:pPr>
                 <a:r>
                   <a:rPr lang="en-US" sz="900" dirty="0">
+                    <a:latin typeface="Tahoma" panose="020B0604030504040204" pitchFamily="34" charset="0"/>
                     <a:cs typeface="+mn-cs"/>
                   </a:rPr>
                   <a:t>148</a:t>
                 </a:r>
                 <a:endParaRPr lang="pt-BR" sz="900" dirty="0">
+                  <a:latin typeface="Tahoma" panose="020B0604030504040204" pitchFamily="34" charset="0"/>
                   <a:cs typeface="+mn-cs"/>
                 </a:endParaRPr>
               </a:p>
@@ -28494,11 +28764,13 @@
                 </a:pPr>
                 <a:r>
                   <a:rPr lang="en-US" sz="900" dirty="0">
+                    <a:latin typeface="Tahoma" panose="020B0604030504040204" pitchFamily="34" charset="0"/>
                     <a:cs typeface="+mn-cs"/>
                   </a:rPr>
                   <a:t>9</a:t>
                 </a:r>
                 <a:endParaRPr lang="pt-BR" sz="900" dirty="0">
+                  <a:latin typeface="Tahoma" panose="020B0604030504040204" pitchFamily="34" charset="0"/>
                   <a:cs typeface="+mn-cs"/>
                 </a:endParaRPr>
               </a:p>
@@ -28534,11 +28806,13 @@
                 </a:pPr>
                 <a:r>
                   <a:rPr lang="en-US" sz="900" dirty="0">
+                    <a:latin typeface="Tahoma" panose="020B0604030504040204" pitchFamily="34" charset="0"/>
                     <a:cs typeface="+mn-cs"/>
                   </a:rPr>
                   <a:t>152</a:t>
                 </a:r>
                 <a:endParaRPr lang="pt-BR" sz="900" dirty="0">
+                  <a:latin typeface="Tahoma" panose="020B0604030504040204" pitchFamily="34" charset="0"/>
                   <a:cs typeface="+mn-cs"/>
                 </a:endParaRPr>
               </a:p>
@@ -28574,11 +28848,13 @@
                 </a:pPr>
                 <a:r>
                   <a:rPr lang="en-US" sz="900" dirty="0">
+                    <a:latin typeface="Tahoma" panose="020B0604030504040204" pitchFamily="34" charset="0"/>
                     <a:cs typeface="+mn-cs"/>
                   </a:rPr>
                   <a:t>149</a:t>
                 </a:r>
                 <a:endParaRPr lang="pt-BR" sz="900" dirty="0">
+                  <a:latin typeface="Tahoma" panose="020B0604030504040204" pitchFamily="34" charset="0"/>
                   <a:cs typeface="+mn-cs"/>
                 </a:endParaRPr>
               </a:p>
@@ -28614,11 +28890,13 @@
                 </a:pPr>
                 <a:r>
                   <a:rPr lang="en-US" sz="900" dirty="0">
+                    <a:latin typeface="Tahoma" panose="020B0604030504040204" pitchFamily="34" charset="0"/>
                     <a:cs typeface="+mn-cs"/>
                   </a:rPr>
                   <a:t>137</a:t>
                 </a:r>
                 <a:endParaRPr lang="pt-BR" sz="900" dirty="0">
+                  <a:latin typeface="Tahoma" panose="020B0604030504040204" pitchFamily="34" charset="0"/>
                   <a:cs typeface="+mn-cs"/>
                 </a:endParaRPr>
               </a:p>
@@ -28654,11 +28932,13 @@
                 </a:pPr>
                 <a:r>
                   <a:rPr lang="en-US" sz="900" dirty="0">
+                    <a:latin typeface="Tahoma" panose="020B0604030504040204" pitchFamily="34" charset="0"/>
                     <a:cs typeface="+mn-cs"/>
                   </a:rPr>
                   <a:t>32</a:t>
                 </a:r>
                 <a:endParaRPr lang="pt-BR" sz="900" dirty="0">
+                  <a:latin typeface="Tahoma" panose="020B0604030504040204" pitchFamily="34" charset="0"/>
                   <a:cs typeface="+mn-cs"/>
                 </a:endParaRPr>
               </a:p>
@@ -28694,11 +28974,13 @@
                 </a:pPr>
                 <a:r>
                   <a:rPr lang="en-US" sz="900" dirty="0">
+                    <a:latin typeface="Tahoma" panose="020B0604030504040204" pitchFamily="34" charset="0"/>
                     <a:cs typeface="+mn-cs"/>
                   </a:rPr>
                   <a:t>23</a:t>
                 </a:r>
                 <a:endParaRPr lang="pt-BR" sz="900" dirty="0">
+                  <a:latin typeface="Tahoma" panose="020B0604030504040204" pitchFamily="34" charset="0"/>
                   <a:cs typeface="+mn-cs"/>
                 </a:endParaRPr>
               </a:p>
@@ -28734,11 +29016,13 @@
                 </a:pPr>
                 <a:r>
                   <a:rPr lang="en-US" sz="900" dirty="0">
+                    <a:latin typeface="Tahoma" panose="020B0604030504040204" pitchFamily="34" charset="0"/>
                     <a:cs typeface="+mn-cs"/>
                   </a:rPr>
                   <a:t>155</a:t>
                 </a:r>
                 <a:endParaRPr lang="pt-BR" sz="900" dirty="0">
+                  <a:latin typeface="Tahoma" panose="020B0604030504040204" pitchFamily="34" charset="0"/>
                   <a:cs typeface="+mn-cs"/>
                 </a:endParaRPr>
               </a:p>
@@ -28774,11 +29058,13 @@
                 </a:pPr>
                 <a:r>
                   <a:rPr lang="en-US" sz="900" dirty="0">
+                    <a:latin typeface="Tahoma" panose="020B0604030504040204" pitchFamily="34" charset="0"/>
                     <a:cs typeface="+mn-cs"/>
                   </a:rPr>
                   <a:t>139</a:t>
                 </a:r>
                 <a:endParaRPr lang="pt-BR" sz="900" dirty="0">
+                  <a:latin typeface="Tahoma" panose="020B0604030504040204" pitchFamily="34" charset="0"/>
                   <a:cs typeface="+mn-cs"/>
                 </a:endParaRPr>
               </a:p>
@@ -28814,11 +29100,13 @@
                 </a:pPr>
                 <a:r>
                   <a:rPr lang="en-US" sz="900" dirty="0">
+                    <a:latin typeface="Tahoma" panose="020B0604030504040204" pitchFamily="34" charset="0"/>
                     <a:cs typeface="+mn-cs"/>
                   </a:rPr>
                   <a:t>102</a:t>
                 </a:r>
                 <a:endParaRPr lang="pt-BR" sz="900" dirty="0">
+                  <a:latin typeface="Tahoma" panose="020B0604030504040204" pitchFamily="34" charset="0"/>
                   <a:cs typeface="+mn-cs"/>
                 </a:endParaRPr>
               </a:p>
@@ -28854,11 +29142,13 @@
                 </a:pPr>
                 <a:r>
                   <a:rPr lang="en-US" sz="900" dirty="0">
+                    <a:latin typeface="Tahoma" panose="020B0604030504040204" pitchFamily="34" charset="0"/>
                     <a:cs typeface="+mn-cs"/>
                   </a:rPr>
                   <a:t>28</a:t>
                 </a:r>
                 <a:endParaRPr lang="pt-BR" sz="900" dirty="0">
+                  <a:latin typeface="Tahoma" panose="020B0604030504040204" pitchFamily="34" charset="0"/>
                   <a:cs typeface="+mn-cs"/>
                 </a:endParaRPr>
               </a:p>
@@ -28894,11 +29184,13 @@
                 </a:pPr>
                 <a:r>
                   <a:rPr lang="en-US" sz="900" dirty="0">
+                    <a:latin typeface="Tahoma" panose="020B0604030504040204" pitchFamily="34" charset="0"/>
                     <a:cs typeface="+mn-cs"/>
                   </a:rPr>
                   <a:t>18</a:t>
                 </a:r>
                 <a:endParaRPr lang="pt-BR" sz="900" dirty="0">
+                  <a:latin typeface="Tahoma" panose="020B0604030504040204" pitchFamily="34" charset="0"/>
                   <a:cs typeface="+mn-cs"/>
                 </a:endParaRPr>
               </a:p>
@@ -28934,11 +29226,13 @@
                 </a:pPr>
                 <a:r>
                   <a:rPr lang="en-US" sz="900" dirty="0">
+                    <a:latin typeface="Tahoma" panose="020B0604030504040204" pitchFamily="34" charset="0"/>
                     <a:cs typeface="+mn-cs"/>
                   </a:rPr>
                   <a:t>99</a:t>
                 </a:r>
                 <a:endParaRPr lang="pt-BR" sz="900" dirty="0">
+                  <a:latin typeface="Tahoma" panose="020B0604030504040204" pitchFamily="34" charset="0"/>
                   <a:cs typeface="+mn-cs"/>
                 </a:endParaRPr>
               </a:p>
@@ -28974,11 +29268,13 @@
                 </a:pPr>
                 <a:r>
                   <a:rPr lang="en-US" sz="900" dirty="0">
+                    <a:latin typeface="Tahoma" panose="020B0604030504040204" pitchFamily="34" charset="0"/>
                     <a:cs typeface="+mn-cs"/>
                   </a:rPr>
                   <a:t>142</a:t>
                 </a:r>
                 <a:endParaRPr lang="pt-BR" sz="900" dirty="0">
+                  <a:latin typeface="Tahoma" panose="020B0604030504040204" pitchFamily="34" charset="0"/>
                   <a:cs typeface="+mn-cs"/>
                 </a:endParaRPr>
               </a:p>
@@ -29164,7 +29460,9 @@
               <a:pPr algn="ctr">
                 <a:defRPr/>
               </a:pPr>
-              <a:endParaRPr lang="pt-BR"/>
+              <a:endParaRPr lang="pt-BR" dirty="0">
+                <a:latin typeface="Tahoma" panose="020B0604030504040204" pitchFamily="34" charset="0"/>
+              </a:endParaRPr>
             </a:p>
           </p:txBody>
         </p:sp>
@@ -29328,7 +29626,7 @@
               <a:buNone/>
             </a:pPr>
             <a:r>
-              <a:rPr lang="en-US" altLang="pt-BR" sz="1600" dirty="0" smtClean="0">
+              <a:rPr lang="en-US" altLang="pt-BR" sz="1600" dirty="0">
                 <a:latin typeface="Calibri" panose="020F0502020204030204" pitchFamily="34" charset="0"/>
                 <a:cs typeface="Calibri" panose="020F0502020204030204" pitchFamily="34" charset="0"/>
               </a:rPr>
@@ -29692,10 +29990,14 @@
                 <a:buNone/>
               </a:pPr>
               <a:r>
-                <a:rPr lang="en-US" altLang="pt-BR" sz="900" dirty="0"/>
+                <a:rPr lang="en-US" altLang="pt-BR" sz="900" dirty="0">
+                  <a:latin typeface="Tahoma" panose="020B0604030504040204" pitchFamily="34" charset="0"/>
+                </a:rPr>
                 <a:t>142</a:t>
               </a:r>
-              <a:endParaRPr lang="pt-BR" altLang="pt-BR" sz="900" dirty="0"/>
+              <a:endParaRPr lang="pt-BR" altLang="pt-BR" sz="900" dirty="0">
+                <a:latin typeface="Tahoma" panose="020B0604030504040204" pitchFamily="34" charset="0"/>
+              </a:endParaRPr>
             </a:p>
           </p:txBody>
         </p:sp>
@@ -29750,10 +30052,11 @@
               <a:pPr algn="ctr">
                 <a:defRPr/>
               </a:pPr>
-              <a:endParaRPr lang="pt-BR">
+              <a:endParaRPr lang="pt-BR" dirty="0">
                 <a:solidFill>
                   <a:schemeClr val="tx1"/>
                 </a:solidFill>
+                <a:latin typeface="Tahoma" panose="020B0604030504040204" pitchFamily="34" charset="0"/>
               </a:endParaRPr>
             </a:p>
           </p:txBody>
@@ -29919,7 +30222,9 @@
                 <a:buFontTx/>
                 <a:buNone/>
               </a:pPr>
-              <a:endParaRPr lang="pt-BR" altLang="pt-BR" sz="900"/>
+              <a:endParaRPr lang="pt-BR" altLang="pt-BR" sz="900" dirty="0">
+                <a:latin typeface="Tahoma" panose="020B0604030504040204" pitchFamily="34" charset="0"/>
+              </a:endParaRPr>
             </a:p>
           </p:txBody>
         </p:sp>
@@ -30099,7 +30404,9 @@
               <a:buNone/>
             </a:pPr>
             <a:r>
-              <a:rPr lang="pt-BR" altLang="pt-BR" sz="1800" dirty="0"/>
+              <a:rPr lang="pt-BR" altLang="pt-BR" sz="1800" dirty="0">
+                <a:latin typeface="Tahoma" panose="020B0604030504040204" pitchFamily="34" charset="0"/>
+              </a:rPr>
               <a:t>Sorteio aleatório de 1 ponto...</a:t>
             </a:r>
           </a:p>
@@ -30309,16 +30616,10 @@
               <a:buNone/>
             </a:pPr>
             <a:r>
-              <a:rPr lang="pt-BR" altLang="pt-BR" sz="1800" dirty="0" smtClean="0"/>
-              <a:t>Desconsiderando-se as relações espaciais,</a:t>
-            </a:r>
-            <a:r>
-              <a:rPr lang="pt-BR" altLang="pt-BR" sz="1800" dirty="0"/>
-              <a:t> </a:t>
-            </a:r>
-            <a:r>
-              <a:rPr lang="pt-BR" altLang="pt-BR" sz="1800" dirty="0" smtClean="0"/>
-              <a:t>este sorteio seria equivalente a um sorteio numa urna! </a:t>
+              <a:rPr lang="pt-BR" altLang="pt-BR" sz="1800" dirty="0">
+                <a:latin typeface="Tahoma" panose="020B0604030504040204" pitchFamily="34" charset="0"/>
+              </a:rPr>
+              <a:t>Desconsiderando-se as relações espaciais, este sorteio seria equivalente a um sorteio numa urna! </a:t>
             </a:r>
           </a:p>
         </p:txBody>
@@ -30712,7 +31013,7 @@
               <a:defRPr/>
             </a:pPr>
             <a:r>
-              <a:rPr lang="pt-BR" dirty="0" smtClean="0"/>
+              <a:rPr lang="pt-BR" dirty="0"/>
               <a:t>Estudando um problema...</a:t>
             </a:r>
           </a:p>
@@ -30743,7 +31044,7 @@
               <a:buNone/>
             </a:pPr>
             <a:r>
-              <a:rPr lang="pt-BR" altLang="pt-BR" sz="2000" dirty="0" smtClean="0"/>
+              <a:rPr lang="pt-BR" altLang="pt-BR" sz="2000" dirty="0"/>
               <a:t>Em geral, numa pesquisa estamos interessados em estudar alguns aspectos relacionados a algum fenômeno real ou hipotético (modelo) tentando compreender os diversos resultados observados ou possíveis de serem obtidos</a:t>
             </a:r>
           </a:p>
@@ -32304,7 +32605,7 @@
               <a:defRPr/>
             </a:pPr>
             <a:r>
-              <a:rPr lang="pt-BR" dirty="0" smtClean="0"/>
+              <a:rPr lang="pt-BR" dirty="0"/>
               <a:t>População, Universo ou Espaço Amostral</a:t>
             </a:r>
           </a:p>
@@ -32335,11 +32636,11 @@
               <a:buNone/>
             </a:pPr>
             <a:r>
-              <a:rPr lang="pt-BR" altLang="pt-BR" sz="2000" dirty="0" smtClean="0"/>
+              <a:rPr lang="pt-BR" altLang="pt-BR" sz="2000" dirty="0"/>
               <a:t>Quase sempre é impossível analisar todos os dados relacionados a esses aspectos, o que em estatística chamamos de </a:t>
             </a:r>
             <a:r>
-              <a:rPr lang="pt-BR" altLang="pt-BR" sz="2000" dirty="0" smtClean="0">
+              <a:rPr lang="pt-BR" altLang="pt-BR" sz="2000" dirty="0">
                 <a:solidFill>
                   <a:srgbClr val="FF0000"/>
                 </a:solidFill>
@@ -32347,7 +32648,7 @@
               <a:t>população</a:t>
             </a:r>
             <a:r>
-              <a:rPr lang="pt-BR" altLang="pt-BR" sz="2000" dirty="0" smtClean="0"/>
+              <a:rPr lang="pt-BR" altLang="pt-BR" sz="2000" dirty="0"/>
               <a:t>, universo ou espaço amostral</a:t>
             </a:r>
           </a:p>
@@ -32357,7 +32658,7 @@
               <a:buNone/>
             </a:pPr>
             <a:r>
-              <a:rPr lang="pt-BR" altLang="pt-BR" sz="2000" dirty="0" smtClean="0"/>
+              <a:rPr lang="pt-BR" altLang="pt-BR" sz="2000" dirty="0"/>
               <a:t>De fato, a população representa o conjunto de todos os resultados possíveis de um experimento e é designado por </a:t>
             </a:r>
             <a:r>
@@ -32385,7 +32686,7 @@
               <a:t> ou </a:t>
             </a:r>
             <a:r>
-              <a:rPr lang="pt-BR" altLang="pt-BR" sz="2000" dirty="0" smtClean="0">
+              <a:rPr lang="pt-BR" altLang="pt-BR" sz="2000" dirty="0">
                 <a:cs typeface="Times New Roman" charset="0"/>
                 <a:sym typeface="Symbol" pitchFamily="18" charset="2"/>
               </a:rPr>
@@ -32408,7 +32709,7 @@
               <a:buNone/>
             </a:pPr>
             <a:r>
-              <a:rPr lang="pt-BR" altLang="pt-BR" sz="2000" dirty="0" smtClean="0">
+              <a:rPr lang="pt-BR" altLang="pt-BR" sz="2000" dirty="0">
                 <a:cs typeface="Times New Roman" charset="0"/>
                 <a:sym typeface="Symbol" pitchFamily="18" charset="2"/>
               </a:rPr>
@@ -32421,11 +32722,24 @@
               <a:buNone/>
             </a:pPr>
             <a:r>
-              <a:rPr lang="pt-BR" altLang="pt-BR" sz="2000" dirty="0" smtClean="0">
+              <a:rPr lang="pt-BR" altLang="pt-BR" sz="2000" dirty="0">
                 <a:cs typeface="Times New Roman" charset="0"/>
                 <a:sym typeface="Symbol" pitchFamily="18" charset="2"/>
               </a:rPr>
               <a:t>Inclui todos os desmatamentos já ocorridos? De qualquer tamanho? Em qualquer lugar? Considera-se fogo natural, “acidental” e criminoso?</a:t>
+            </a:r>
+          </a:p>
+          <a:p>
+            <a:pPr algn="just" eaLnBrk="1" hangingPunct="1">
+              <a:buFontTx/>
+              <a:buNone/>
+            </a:pPr>
+            <a:r>
+              <a:rPr lang="pt-BR" altLang="pt-BR" sz="2000" dirty="0">
+                <a:cs typeface="Times New Roman" charset="0"/>
+                <a:sym typeface="Symbol" pitchFamily="18" charset="2"/>
+              </a:rPr>
+              <a:t>Assim, a definição do escopo do estudo é fundamental para entendermos sua abrangência e suas limitações</a:t>
             </a:r>
           </a:p>
         </p:txBody>
@@ -32624,6 +32938,55 @@
                       </p:childTnLst>
                     </p:cTn>
                   </p:par>
+                  <p:par>
+                    <p:cTn id="15" fill="hold">
+                      <p:stCondLst>
+                        <p:cond delay="indefinite"/>
+                      </p:stCondLst>
+                      <p:childTnLst>
+                        <p:par>
+                          <p:cTn id="16" fill="hold">
+                            <p:stCondLst>
+                              <p:cond delay="0"/>
+                            </p:stCondLst>
+                            <p:childTnLst>
+                              <p:par>
+                                <p:cTn id="17" presetID="1" presetClass="entr" presetSubtype="0" fill="hold" grpId="0" nodeType="clickEffect">
+                                  <p:stCondLst>
+                                    <p:cond delay="0"/>
+                                  </p:stCondLst>
+                                  <p:childTnLst>
+                                    <p:set>
+                                      <p:cBhvr>
+                                        <p:cTn id="18" dur="1" fill="hold">
+                                          <p:stCondLst>
+                                            <p:cond delay="0"/>
+                                          </p:stCondLst>
+                                        </p:cTn>
+                                        <p:tgtEl>
+                                          <p:spTgt spid="4099">
+                                            <p:txEl>
+                                              <p:pRg st="5" end="5"/>
+                                            </p:txEl>
+                                          </p:spTgt>
+                                        </p:tgtEl>
+                                        <p:attrNameLst>
+                                          <p:attrName>style.visibility</p:attrName>
+                                        </p:attrNameLst>
+                                      </p:cBhvr>
+                                      <p:to>
+                                        <p:strVal val="visible"/>
+                                      </p:to>
+                                    </p:set>
+                                  </p:childTnLst>
+                                </p:cTn>
+                              </p:par>
+                            </p:childTnLst>
+                          </p:cTn>
+                        </p:par>
+                      </p:childTnLst>
+                    </p:cTn>
+                  </p:par>
                 </p:childTnLst>
               </p:cTn>
               <p:prevCondLst>
@@ -32688,7 +33051,7 @@
               <a:defRPr/>
             </a:pPr>
             <a:r>
-              <a:rPr lang="pt-BR" dirty="0" smtClean="0"/>
+              <a:rPr lang="pt-BR" dirty="0"/>
               <a:t>Probabilidade</a:t>
             </a:r>
           </a:p>
@@ -32719,7 +33082,7 @@
               <a:buNone/>
             </a:pPr>
             <a:r>
-              <a:rPr lang="pt-BR" altLang="pt-BR" sz="2000" dirty="0" smtClean="0">
+              <a:rPr lang="pt-BR" altLang="pt-BR" sz="2000" dirty="0">
                 <a:cs typeface="Times New Roman" charset="0"/>
                 <a:sym typeface="Symbol" pitchFamily="18" charset="2"/>
               </a:rPr>
@@ -32742,7 +33105,7 @@
               <a:buNone/>
             </a:pPr>
             <a:r>
-              <a:rPr lang="pt-BR" altLang="pt-BR" sz="2000" dirty="0" smtClean="0">
+              <a:rPr lang="pt-BR" altLang="pt-BR" sz="2000" dirty="0">
                 <a:cs typeface="Times New Roman" charset="0"/>
                 <a:sym typeface="Symbol" pitchFamily="18" charset="2"/>
               </a:rPr>
@@ -32886,7 +33249,9 @@
           <a:lstStyle/>
           <a:p>
             <a:pPr algn="ctr"/>
-            <a:endParaRPr lang="pt-BR"/>
+            <a:endParaRPr lang="pt-BR" dirty="0">
+              <a:latin typeface="Tahoma" panose="020B0604030504040204" pitchFamily="34" charset="0"/>
+            </a:endParaRPr>
           </a:p>
         </p:txBody>
       </p:sp>
@@ -33081,7 +33446,8 @@
               <a:buNone/>
             </a:pPr>
             <a:r>
-              <a:rPr lang="pt-BR" altLang="pt-BR" sz="2000" kern="0" dirty="0" smtClean="0">
+              <a:rPr lang="pt-BR" altLang="pt-BR" sz="2000" kern="0" dirty="0">
+                <a:latin typeface="Tahoma" panose="020B0604030504040204" pitchFamily="34" charset="0"/>
                 <a:cs typeface="Times New Roman" charset="0"/>
                 <a:sym typeface="Symbol" pitchFamily="18" charset="2"/>
               </a:rPr>
@@ -33094,24 +33460,27 @@
               <a:buNone/>
             </a:pPr>
             <a:r>
-              <a:rPr lang="pt-BR" altLang="pt-BR" sz="2000" kern="0" dirty="0" smtClean="0">
+              <a:rPr lang="pt-BR" altLang="pt-BR" sz="2000" kern="0" dirty="0">
+                <a:latin typeface="Tahoma" panose="020B0604030504040204" pitchFamily="34" charset="0"/>
                 <a:cs typeface="Times New Roman" charset="0"/>
                 <a:sym typeface="Symbol" pitchFamily="18" charset="2"/>
               </a:rPr>
               <a:t>Por exemplo, se 70% de um mapa é representado pela classe Floresta e sortearmos um ponto qualquer neste mapa, podemos afirmar que este ponto será de Floresta ou apenas temos a indicação de que é mais fácil (mais provável ou com maior </a:t>
             </a:r>
             <a:r>
-              <a:rPr lang="pt-BR" altLang="pt-BR" sz="2000" kern="0" dirty="0" smtClean="0">
+              <a:rPr lang="pt-BR" altLang="pt-BR" sz="2000" kern="0" dirty="0">
                 <a:solidFill>
                   <a:srgbClr val="FF0000"/>
                 </a:solidFill>
+                <a:latin typeface="Tahoma" panose="020B0604030504040204" pitchFamily="34" charset="0"/>
                 <a:cs typeface="Times New Roman" charset="0"/>
                 <a:sym typeface="Symbol" pitchFamily="18" charset="2"/>
               </a:rPr>
               <a:t>probabilidade</a:t>
             </a:r>
             <a:r>
-              <a:rPr lang="pt-BR" altLang="pt-BR" sz="2000" kern="0" dirty="0" smtClean="0">
+              <a:rPr lang="pt-BR" altLang="pt-BR" sz="2000" kern="0" dirty="0">
+                <a:latin typeface="Tahoma" panose="020B0604030504040204" pitchFamily="34" charset="0"/>
                 <a:cs typeface="Times New Roman" charset="0"/>
                 <a:sym typeface="Symbol" pitchFamily="18" charset="2"/>
               </a:rPr>
@@ -33423,7 +33792,7 @@
               <a:defRPr/>
             </a:pPr>
             <a:r>
-              <a:rPr lang="pt-BR" dirty="0" smtClean="0"/>
+              <a:rPr lang="pt-BR" dirty="0"/>
               <a:t>Probabilidade</a:t>
             </a:r>
           </a:p>
@@ -33454,7 +33823,7 @@
               <a:buNone/>
             </a:pPr>
             <a:r>
-              <a:rPr lang="pt-BR" altLang="pt-BR" sz="2000" dirty="0" smtClean="0">
+              <a:rPr lang="pt-BR" altLang="pt-BR" sz="2000" dirty="0">
                 <a:cs typeface="Times New Roman" charset="0"/>
                 <a:sym typeface="Symbol" pitchFamily="18" charset="2"/>
               </a:rPr>
@@ -33477,7 +33846,7 @@
               <a:buNone/>
             </a:pPr>
             <a:r>
-              <a:rPr lang="pt-BR" altLang="pt-BR" sz="2000" dirty="0" smtClean="0">
+              <a:rPr lang="pt-BR" altLang="pt-BR" sz="2000" dirty="0">
                 <a:cs typeface="Times New Roman" charset="0"/>
                 <a:sym typeface="Symbol" pitchFamily="18" charset="2"/>
               </a:rPr>
@@ -33634,7 +34003,9 @@
               <a:bodyPr/>
               <a:lstStyle/>
               <a:p>
-                <a:endParaRPr lang="pt-BR"/>
+                <a:endParaRPr lang="pt-BR" dirty="0">
+                  <a:latin typeface="Tahoma" panose="020B0604030504040204" pitchFamily="34" charset="0"/>
+                </a:endParaRPr>
               </a:p>
             </p:txBody>
           </p:sp>
@@ -33797,10 +34168,11 @@
                   <a:buNone/>
                 </a:pPr>
                 <a:r>
-                  <a:rPr lang="pt-BR" altLang="pt-BR" sz="1400" dirty="0" smtClean="0"/>
+                  <a:rPr lang="pt-BR" altLang="pt-BR" sz="1400" dirty="0">
+                    <a:latin typeface="Tahoma" panose="020B0604030504040204" pitchFamily="34" charset="0"/>
+                  </a:rPr>
                   <a:t>1</a:t>
                 </a:r>
-                <a:endParaRPr lang="pt-BR" altLang="pt-BR" sz="1400" dirty="0"/>
               </a:p>
             </p:txBody>
           </p:sp>
@@ -33963,10 +34335,11 @@
                   <a:buNone/>
                 </a:pPr>
                 <a:r>
-                  <a:rPr lang="pt-BR" altLang="pt-BR" sz="1400" dirty="0" smtClean="0"/>
+                  <a:rPr lang="pt-BR" altLang="pt-BR" sz="1400" dirty="0">
+                    <a:latin typeface="Tahoma" panose="020B0604030504040204" pitchFamily="34" charset="0"/>
+                  </a:rPr>
                   <a:t>2</a:t>
                 </a:r>
-                <a:endParaRPr lang="pt-BR" altLang="pt-BR" sz="1400" dirty="0"/>
               </a:p>
             </p:txBody>
           </p:sp>
@@ -34129,10 +34502,11 @@
                   <a:buNone/>
                 </a:pPr>
                 <a:r>
-                  <a:rPr lang="pt-BR" altLang="pt-BR" sz="1400" dirty="0" smtClean="0"/>
+                  <a:rPr lang="pt-BR" altLang="pt-BR" sz="1400" dirty="0">
+                    <a:latin typeface="Tahoma" panose="020B0604030504040204" pitchFamily="34" charset="0"/>
+                  </a:rPr>
                   <a:t>2</a:t>
                 </a:r>
-                <a:endParaRPr lang="pt-BR" altLang="pt-BR" sz="1400" dirty="0"/>
               </a:p>
             </p:txBody>
           </p:sp>
@@ -34295,10 +34669,11 @@
                   <a:buNone/>
                 </a:pPr>
                 <a:r>
-                  <a:rPr lang="pt-BR" altLang="pt-BR" sz="1400" dirty="0" smtClean="0"/>
+                  <a:rPr lang="pt-BR" altLang="pt-BR" sz="1400" dirty="0">
+                    <a:latin typeface="Tahoma" panose="020B0604030504040204" pitchFamily="34" charset="0"/>
+                  </a:rPr>
                   <a:t>2</a:t>
                 </a:r>
-                <a:endParaRPr lang="pt-BR" altLang="pt-BR" sz="1400" dirty="0"/>
               </a:p>
             </p:txBody>
           </p:sp>
@@ -34461,10 +34836,11 @@
                   <a:buNone/>
                 </a:pPr>
                 <a:r>
-                  <a:rPr lang="pt-BR" altLang="pt-BR" sz="1400" dirty="0" smtClean="0"/>
+                  <a:rPr lang="pt-BR" altLang="pt-BR" sz="1400" dirty="0">
+                    <a:latin typeface="Tahoma" panose="020B0604030504040204" pitchFamily="34" charset="0"/>
+                  </a:rPr>
                   <a:t>1</a:t>
                 </a:r>
-                <a:endParaRPr lang="pt-BR" altLang="pt-BR" sz="1400" dirty="0"/>
               </a:p>
             </p:txBody>
           </p:sp>
@@ -34627,10 +35003,11 @@
                   <a:buNone/>
                 </a:pPr>
                 <a:r>
-                  <a:rPr lang="pt-BR" altLang="pt-BR" sz="1400" dirty="0" smtClean="0"/>
+                  <a:rPr lang="pt-BR" altLang="pt-BR" sz="1400" dirty="0">
+                    <a:latin typeface="Tahoma" panose="020B0604030504040204" pitchFamily="34" charset="0"/>
+                  </a:rPr>
                   <a:t>3</a:t>
                 </a:r>
-                <a:endParaRPr lang="pt-BR" altLang="pt-BR" sz="1400" dirty="0"/>
               </a:p>
             </p:txBody>
           </p:sp>
@@ -34793,10 +35170,11 @@
                   <a:buNone/>
                 </a:pPr>
                 <a:r>
-                  <a:rPr lang="pt-BR" altLang="pt-BR" sz="1400" dirty="0" smtClean="0"/>
+                  <a:rPr lang="pt-BR" altLang="pt-BR" sz="1400" dirty="0">
+                    <a:latin typeface="Tahoma" panose="020B0604030504040204" pitchFamily="34" charset="0"/>
+                  </a:rPr>
                   <a:t>3</a:t>
                 </a:r>
-                <a:endParaRPr lang="pt-BR" altLang="pt-BR" sz="1400" dirty="0"/>
               </a:p>
             </p:txBody>
           </p:sp>
@@ -34959,10 +35337,11 @@
                   <a:buNone/>
                 </a:pPr>
                 <a:r>
-                  <a:rPr lang="pt-BR" altLang="pt-BR" sz="1400" dirty="0" smtClean="0"/>
+                  <a:rPr lang="pt-BR" altLang="pt-BR" sz="1400" dirty="0">
+                    <a:latin typeface="Tahoma" panose="020B0604030504040204" pitchFamily="34" charset="0"/>
+                  </a:rPr>
                   <a:t>2</a:t>
                 </a:r>
-                <a:endParaRPr lang="pt-BR" altLang="pt-BR" sz="1400" dirty="0"/>
               </a:p>
             </p:txBody>
           </p:sp>
@@ -35125,10 +35504,11 @@
                   <a:buNone/>
                 </a:pPr>
                 <a:r>
-                  <a:rPr lang="pt-BR" altLang="pt-BR" sz="1400" dirty="0" smtClean="0"/>
+                  <a:rPr lang="pt-BR" altLang="pt-BR" sz="1400" dirty="0">
+                    <a:latin typeface="Tahoma" panose="020B0604030504040204" pitchFamily="34" charset="0"/>
+                  </a:rPr>
                   <a:t>1</a:t>
                 </a:r>
-                <a:endParaRPr lang="pt-BR" altLang="pt-BR" sz="1400" dirty="0"/>
               </a:p>
             </p:txBody>
           </p:sp>
@@ -35291,10 +35671,11 @@
                   <a:buNone/>
                 </a:pPr>
                 <a:r>
-                  <a:rPr lang="pt-BR" altLang="pt-BR" sz="1400" dirty="0" smtClean="0"/>
+                  <a:rPr lang="pt-BR" altLang="pt-BR" sz="1400" dirty="0">
+                    <a:latin typeface="Tahoma" panose="020B0604030504040204" pitchFamily="34" charset="0"/>
+                  </a:rPr>
                   <a:t>1</a:t>
                 </a:r>
-                <a:endParaRPr lang="pt-BR" altLang="pt-BR" sz="1400" dirty="0"/>
               </a:p>
             </p:txBody>
           </p:sp>
@@ -35457,10 +35838,11 @@
                   <a:buNone/>
                 </a:pPr>
                 <a:r>
-                  <a:rPr lang="pt-BR" altLang="pt-BR" sz="1400" dirty="0" smtClean="0"/>
+                  <a:rPr lang="pt-BR" altLang="pt-BR" sz="1400" dirty="0">
+                    <a:latin typeface="Tahoma" panose="020B0604030504040204" pitchFamily="34" charset="0"/>
+                  </a:rPr>
                   <a:t>1</a:t>
                 </a:r>
-                <a:endParaRPr lang="pt-BR" altLang="pt-BR" sz="1400" dirty="0"/>
               </a:p>
             </p:txBody>
           </p:sp>
@@ -35555,7 +35937,9 @@
               <a:bodyPr/>
               <a:lstStyle/>
               <a:p>
-                <a:endParaRPr lang="pt-BR"/>
+                <a:endParaRPr lang="pt-BR" dirty="0">
+                  <a:latin typeface="Tahoma" panose="020B0604030504040204" pitchFamily="34" charset="0"/>
+                </a:endParaRPr>
               </a:p>
             </p:txBody>
           </p:sp>
@@ -35584,7 +35968,7 @@
           <a:lstStyle/>
           <a:p>
             <a:r>
-              <a:rPr lang="pt-BR" sz="1800" dirty="0" smtClean="0">
+              <a:rPr lang="pt-BR" sz="1800" dirty="0">
                 <a:latin typeface="Times New Roman" panose="02020603050405020304" pitchFamily="18" charset="0"/>
                 <a:cs typeface="Times New Roman" panose="02020603050405020304" pitchFamily="18" charset="0"/>
               </a:rPr>
@@ -35593,7 +35977,7 @@
           </a:p>
           <a:p>
             <a:r>
-              <a:rPr lang="pt-BR" sz="1800" dirty="0" smtClean="0">
+              <a:rPr lang="pt-BR" sz="1800" dirty="0">
                 <a:latin typeface="Times New Roman" panose="02020603050405020304" pitchFamily="18" charset="0"/>
                 <a:cs typeface="Times New Roman" panose="02020603050405020304" pitchFamily="18" charset="0"/>
               </a:rPr>
@@ -35602,16 +35986,12 @@
           </a:p>
           <a:p>
             <a:r>
-              <a:rPr lang="pt-BR" sz="1800" dirty="0" smtClean="0">
+              <a:rPr lang="pt-BR" sz="1800" dirty="0">
                 <a:latin typeface="Times New Roman" panose="02020603050405020304" pitchFamily="18" charset="0"/>
                 <a:cs typeface="Times New Roman" panose="02020603050405020304" pitchFamily="18" charset="0"/>
               </a:rPr>
               <a:t>P(3) = ?</a:t>
             </a:r>
-            <a:endParaRPr lang="pt-BR" sz="1800" dirty="0">
-              <a:latin typeface="Times New Roman" panose="02020603050405020304" pitchFamily="18" charset="0"/>
-              <a:cs typeface="Times New Roman" panose="02020603050405020304" pitchFamily="18" charset="0"/>
-            </a:endParaRPr>
           </a:p>
         </p:txBody>
       </p:sp>
@@ -35640,7 +36020,7 @@
           <a:lstStyle/>
           <a:p>
             <a:r>
-              <a:rPr lang="pt-BR" sz="1800" dirty="0" smtClean="0">
+              <a:rPr lang="pt-BR" sz="1800" dirty="0">
                 <a:latin typeface="Times New Roman" panose="02020603050405020304" pitchFamily="18" charset="0"/>
                 <a:cs typeface="Times New Roman" panose="02020603050405020304" pitchFamily="18" charset="0"/>
               </a:rPr>
@@ -35649,7 +36029,7 @@
           </a:p>
           <a:p>
             <a:r>
-              <a:rPr lang="pt-BR" sz="1800" dirty="0" smtClean="0">
+              <a:rPr lang="pt-BR" sz="1800" dirty="0">
                 <a:latin typeface="Times New Roman" panose="02020603050405020304" pitchFamily="18" charset="0"/>
                 <a:cs typeface="Times New Roman" panose="02020603050405020304" pitchFamily="18" charset="0"/>
               </a:rPr>
@@ -35662,19 +36042,8 @@
                 <a:latin typeface="Times New Roman" panose="02020603050405020304" pitchFamily="18" charset="0"/>
                 <a:cs typeface="Times New Roman" panose="02020603050405020304" pitchFamily="18" charset="0"/>
               </a:rPr>
-              <a:t>2</a:t>
+              <a:t>2/11</a:t>
             </a:r>
-            <a:r>
-              <a:rPr lang="pt-BR" sz="1800" dirty="0" smtClean="0">
-                <a:latin typeface="Times New Roman" panose="02020603050405020304" pitchFamily="18" charset="0"/>
-                <a:cs typeface="Times New Roman" panose="02020603050405020304" pitchFamily="18" charset="0"/>
-              </a:rPr>
-              <a:t>/11</a:t>
-            </a:r>
-            <a:endParaRPr lang="pt-BR" sz="1800" dirty="0">
-              <a:latin typeface="Times New Roman" panose="02020603050405020304" pitchFamily="18" charset="0"/>
-              <a:cs typeface="Times New Roman" panose="02020603050405020304" pitchFamily="18" charset="0"/>
-            </a:endParaRPr>
           </a:p>
         </p:txBody>
       </p:sp>
@@ -35700,23 +36069,23 @@
           <a:graphicData uri="http://schemas.openxmlformats.org/presentationml/2006/ole">
             <mc:AlternateContent xmlns:mc="http://schemas.openxmlformats.org/markup-compatibility/2006">
               <mc:Choice xmlns:v="urn:schemas-microsoft-com:vml" Requires="v">
-                <p:oleObj spid="_x0000_s1045" name="Equation" r:id="rId3" imgW="2057400" imgH="431640" progId="Equation.DSMT4">
+                <p:oleObj name="Equation" r:id="rId2" imgW="2057400" imgH="431640" progId="Equation.DSMT4">
                   <p:embed/>
                 </p:oleObj>
               </mc:Choice>
               <mc:Fallback>
-                <p:oleObj name="Equation" r:id="rId3" imgW="2057400" imgH="431640" progId="Equation.DSMT4">
+                <p:oleObj name="Equation" r:id="rId2" imgW="2057400" imgH="431640" progId="Equation.DSMT4">
                   <p:embed/>
                   <p:pic>
                     <p:nvPicPr>
-                      <p:cNvPr id="0" name="Object 2"/>
+                      <p:cNvPr id="2" name="Objeto 1"/>
                       <p:cNvPicPr>
                         <a:picLocks noChangeAspect="1" noChangeArrowheads="1"/>
                       </p:cNvPicPr>
                       <p:nvPr/>
                     </p:nvPicPr>
                     <p:blipFill>
-                      <a:blip r:embed="rId4">
+                      <a:blip r:embed="rId3">
                         <a:extLst>
                           <a:ext uri="{28A0092B-C50C-407E-A947-70E740481C1C}">
                             <a14:useLocalDpi xmlns:a14="http://schemas.microsoft.com/office/drawing/2010/main" val="0"/>
@@ -36071,7 +36440,7 @@
               <a:defRPr/>
             </a:pPr>
             <a:r>
-              <a:rPr lang="pt-BR" dirty="0" smtClean="0"/>
+              <a:rPr lang="pt-BR" dirty="0"/>
               <a:t>Amostragem</a:t>
             </a:r>
           </a:p>
@@ -36109,7 +36478,7 @@
               <a:t>Em geral, toda a análise é feita com base numa pequena parte da população que chamamos de </a:t>
             </a:r>
             <a:r>
-              <a:rPr lang="pt-BR" altLang="pt-BR" sz="2000" dirty="0" smtClean="0">
+              <a:rPr lang="pt-BR" altLang="pt-BR" sz="2000" dirty="0">
                 <a:solidFill>
                   <a:srgbClr val="FF0000"/>
                 </a:solidFill>
@@ -36118,13 +36487,6 @@
               </a:rPr>
               <a:t>amostra</a:t>
             </a:r>
-            <a:endParaRPr lang="pt-BR" altLang="pt-BR" sz="2000" dirty="0">
-              <a:solidFill>
-                <a:srgbClr val="FF0000"/>
-              </a:solidFill>
-              <a:cs typeface="Times New Roman" charset="0"/>
-              <a:sym typeface="Symbol" pitchFamily="18" charset="2"/>
-            </a:endParaRPr>
           </a:p>
         </p:txBody>
       </p:sp>
@@ -37241,7 +37603,8 @@
               <a:buNone/>
             </a:pPr>
             <a:r>
-              <a:rPr lang="pt-BR" altLang="pt-BR" sz="2000" kern="0" dirty="0" smtClean="0">
+              <a:rPr lang="pt-BR" altLang="pt-BR" sz="2000" kern="0" dirty="0">
+                <a:latin typeface="Tahoma" panose="020B0604030504040204" pitchFamily="34" charset="0"/>
                 <a:cs typeface="Times New Roman" charset="0"/>
                 <a:sym typeface="Symbol" pitchFamily="18" charset="2"/>
               </a:rPr>
@@ -37253,24 +37616,10 @@
               <a:buAutoNum type="alphaLcParenR"/>
             </a:pPr>
             <a:r>
-              <a:rPr lang="pt-BR" sz="1800" dirty="0" smtClean="0"/>
-              <a:t>Quantas </a:t>
-            </a:r>
-            <a:r>
-              <a:rPr lang="pt-BR" sz="1800" dirty="0"/>
-              <a:t>observações </a:t>
-            </a:r>
-            <a:r>
-              <a:rPr lang="pt-BR" sz="1800" dirty="0" smtClean="0"/>
-              <a:t>devo ter </a:t>
-            </a:r>
-            <a:r>
-              <a:rPr lang="pt-BR" sz="1800" dirty="0"/>
-              <a:t>para garantir que minha análise </a:t>
-            </a:r>
-            <a:r>
-              <a:rPr lang="pt-BR" sz="1800" dirty="0" smtClean="0"/>
-              <a:t>produza resultados confiáveis?</a:t>
+              <a:rPr lang="pt-BR" sz="1800" dirty="0">
+                <a:latin typeface="Tahoma" panose="020B0604030504040204" pitchFamily="34" charset="0"/>
+              </a:rPr>
+              <a:t>Quantas observações devo ter para garantir que minha análise produza resultados confiáveis?</a:t>
             </a:r>
           </a:p>
           <a:p>
@@ -37278,12 +37627,10 @@
               <a:buNone/>
             </a:pPr>
             <a:r>
-              <a:rPr lang="pt-BR" sz="1800" dirty="0"/>
-              <a:t>	</a:t>
-            </a:r>
-            <a:r>
-              <a:rPr lang="pt-BR" sz="1800" dirty="0" smtClean="0"/>
-              <a:t>. tamanho de amostra ideal</a:t>
+              <a:rPr lang="pt-BR" sz="1800" dirty="0">
+                <a:latin typeface="Tahoma" panose="020B0604030504040204" pitchFamily="34" charset="0"/>
+              </a:rPr>
+              <a:t>	. tamanho de amostra ideal</a:t>
             </a:r>
           </a:p>
           <a:p>
@@ -37292,33 +37639,19 @@
               <a:buAutoNum type="alphaLcParenR" startAt="2"/>
             </a:pPr>
             <a:r>
-              <a:rPr lang="pt-BR" sz="1800" dirty="0" smtClean="0"/>
-              <a:t>Como </a:t>
+              <a:rPr lang="pt-BR" sz="1800" dirty="0">
+                <a:latin typeface="Tahoma" panose="020B0604030504040204" pitchFamily="34" charset="0"/>
+              </a:rPr>
+              <a:t>Como devo proceder a coleta destas informações?</a:t>
             </a:r>
-            <a:r>
-              <a:rPr lang="pt-BR" sz="1800" dirty="0"/>
-              <a:t>devo proceder </a:t>
-            </a:r>
-            <a:r>
-              <a:rPr lang="pt-BR" sz="1800" dirty="0" smtClean="0"/>
-              <a:t>a coleta destas </a:t>
-            </a:r>
-            <a:r>
-              <a:rPr lang="pt-BR" sz="1800" dirty="0"/>
-              <a:t>informações</a:t>
-            </a:r>
-            <a:r>
-              <a:rPr lang="pt-BR" sz="1800" dirty="0" smtClean="0"/>
-              <a:t>?</a:t>
-            </a:r>
-            <a:endParaRPr lang="pt-BR" sz="1800" dirty="0"/>
           </a:p>
           <a:p>
             <a:pPr marL="0" indent="0" defTabSz="363538">
               <a:buNone/>
             </a:pPr>
             <a:r>
-              <a:rPr lang="pt-BR" altLang="pt-BR" sz="1800" kern="0" dirty="0" smtClean="0">
+              <a:rPr lang="pt-BR" altLang="pt-BR" sz="1800" kern="0" dirty="0">
+                <a:latin typeface="Tahoma" panose="020B0604030504040204" pitchFamily="34" charset="0"/>
                 <a:cs typeface="Times New Roman" charset="0"/>
                 <a:sym typeface="Symbol" pitchFamily="18" charset="2"/>
               </a:rPr>
@@ -37331,7 +37664,9 @@
               <a:buAutoNum type="alphaLcParenR" startAt="3"/>
             </a:pPr>
             <a:r>
-              <a:rPr lang="pt-BR" sz="1800" dirty="0"/>
+              <a:rPr lang="pt-BR" sz="1800" dirty="0">
+                <a:latin typeface="Tahoma" panose="020B0604030504040204" pitchFamily="34" charset="0"/>
+              </a:rPr>
               <a:t>Qual é o procedimento estatístico mais adequado para analisar meus dados?</a:t>
             </a:r>
           </a:p>
@@ -37340,21 +37675,20 @@
               <a:buNone/>
             </a:pPr>
             <a:r>
-              <a:rPr lang="pt-BR" sz="1800" dirty="0"/>
-              <a:t>	. </a:t>
+              <a:rPr lang="pt-BR" sz="1800" dirty="0">
+                <a:latin typeface="Tahoma" panose="020B0604030504040204" pitchFamily="34" charset="0"/>
+              </a:rPr>
+              <a:t>	. tipo de dados e métricas representativas</a:t>
             </a:r>
-            <a:r>
-              <a:rPr lang="pt-BR" sz="1800" dirty="0" smtClean="0"/>
-              <a:t>tipo de dados e métricas representativas</a:t>
-            </a:r>
-            <a:endParaRPr lang="pt-BR" sz="1800" dirty="0"/>
           </a:p>
           <a:p>
             <a:pPr marL="0" lvl="0" indent="0" defTabSz="363538">
               <a:buNone/>
             </a:pPr>
             <a:r>
-              <a:rPr lang="pt-BR" sz="1800" dirty="0"/>
+              <a:rPr lang="pt-BR" sz="1800" dirty="0">
+                <a:latin typeface="Tahoma" panose="020B0604030504040204" pitchFamily="34" charset="0"/>
+              </a:rPr>
               <a:t>	. hipóteses a serem testadas</a:t>
             </a:r>
           </a:p>
@@ -37363,20 +37697,18 @@
               <a:buNone/>
             </a:pPr>
             <a:r>
-              <a:rPr lang="pt-BR" sz="1800" dirty="0"/>
-              <a:t>	. </a:t>
+              <a:rPr lang="pt-BR" sz="1800" dirty="0">
+                <a:latin typeface="Tahoma" panose="020B0604030504040204" pitchFamily="34" charset="0"/>
+              </a:rPr>
+              <a:t>	. relacionamento entre observações</a:t>
             </a:r>
-            <a:r>
-              <a:rPr lang="pt-BR" sz="1800" dirty="0" smtClean="0"/>
-              <a:t>relacionamento entre observações</a:t>
-            </a:r>
-            <a:endParaRPr lang="pt-BR" sz="1800" dirty="0"/>
           </a:p>
           <a:p>
             <a:pPr marL="0" indent="0" defTabSz="363538">
               <a:buNone/>
             </a:pPr>
             <a:endParaRPr lang="pt-BR" altLang="pt-BR" sz="2000" kern="0" dirty="0">
+              <a:latin typeface="Tahoma" panose="020B0604030504040204" pitchFamily="34" charset="0"/>
               <a:cs typeface="Times New Roman" charset="0"/>
               <a:sym typeface="Symbol" pitchFamily="18" charset="2"/>
             </a:endParaRPr>
@@ -38087,7 +38419,7 @@
               <a:defRPr/>
             </a:pPr>
             <a:r>
-              <a:rPr lang="pt-BR" dirty="0" smtClean="0"/>
+              <a:rPr lang="pt-BR" dirty="0"/>
               <a:t>Planejamento</a:t>
             </a:r>
           </a:p>
@@ -38118,53 +38450,11 @@
               <a:buNone/>
             </a:pPr>
             <a:r>
-              <a:rPr lang="pt-BR" altLang="pt-BR" sz="2000" dirty="0" smtClean="0">
-                <a:cs typeface="Times New Roman" charset="0"/>
-                <a:sym typeface="Symbol" pitchFamily="18" charset="2"/>
-              </a:rPr>
-              <a:t>Idealmente a escolha da análise estatística deveria ser feita no </a:t>
-            </a:r>
-            <a:r>
               <a:rPr lang="pt-BR" altLang="pt-BR" sz="2000" dirty="0">
                 <a:cs typeface="Times New Roman" charset="0"/>
                 <a:sym typeface="Symbol" pitchFamily="18" charset="2"/>
               </a:rPr>
-              <a:t>início </a:t>
-            </a:r>
-            <a:r>
-              <a:rPr lang="pt-BR" altLang="pt-BR" sz="2000" dirty="0" smtClean="0">
-                <a:cs typeface="Times New Roman" charset="0"/>
-                <a:sym typeface="Symbol" pitchFamily="18" charset="2"/>
-              </a:rPr>
-              <a:t>de seu </a:t>
-            </a:r>
-            <a:r>
-              <a:rPr lang="pt-BR" altLang="pt-BR" sz="2000" dirty="0">
-                <a:cs typeface="Times New Roman" charset="0"/>
-                <a:sym typeface="Symbol" pitchFamily="18" charset="2"/>
-              </a:rPr>
-              <a:t>projeto, antes </a:t>
-            </a:r>
-            <a:r>
-              <a:rPr lang="pt-BR" altLang="pt-BR" sz="2000" dirty="0" smtClean="0">
-                <a:cs typeface="Times New Roman" charset="0"/>
-                <a:sym typeface="Symbol" pitchFamily="18" charset="2"/>
-              </a:rPr>
-              <a:t>mesmo de se coletar </a:t>
-            </a:r>
-            <a:r>
-              <a:rPr lang="pt-BR" altLang="pt-BR" sz="2000" dirty="0">
-                <a:cs typeface="Times New Roman" charset="0"/>
-                <a:sym typeface="Symbol" pitchFamily="18" charset="2"/>
-              </a:rPr>
-              <a:t>quaisquer </a:t>
-            </a:r>
-            <a:r>
-              <a:rPr lang="pt-BR" altLang="pt-BR" sz="2000" dirty="0" smtClean="0">
-                <a:cs typeface="Times New Roman" charset="0"/>
-                <a:sym typeface="Symbol" pitchFamily="18" charset="2"/>
-              </a:rPr>
-              <a:t>dados</a:t>
+              <a:t>Idealmente a escolha da análise estatística deveria ser feita no início de seu projeto, antes mesmo de se coletar quaisquer dados</a:t>
             </a:r>
           </a:p>
           <a:p>
@@ -38172,7 +38462,7 @@
               <a:buFontTx/>
               <a:buNone/>
             </a:pPr>
-            <a:endParaRPr lang="pt-BR" altLang="pt-BR" sz="2000" dirty="0" smtClean="0">
+            <a:endParaRPr lang="pt-BR" altLang="pt-BR" sz="2000" dirty="0">
               <a:cs typeface="Times New Roman" charset="0"/>
               <a:sym typeface="Symbol" pitchFamily="18" charset="2"/>
             </a:endParaRPr>
@@ -38183,53 +38473,11 @@
               <a:buNone/>
             </a:pPr>
             <a:r>
-              <a:rPr lang="pt-BR" altLang="pt-BR" sz="2000" dirty="0" smtClean="0">
-                <a:cs typeface="Times New Roman" charset="0"/>
-                <a:sym typeface="Symbol" pitchFamily="18" charset="2"/>
-              </a:rPr>
-              <a:t>As análises estatísticas têm diferentes pré-requisitos relacionados ao tipo de dado analisado, tamanho da amostra e natureza de relacionamento desses dados. Conhecer </a:t>
-            </a:r>
-            <a:r>
               <a:rPr lang="pt-BR" altLang="pt-BR" sz="2000" dirty="0">
                 <a:cs typeface="Times New Roman" charset="0"/>
                 <a:sym typeface="Symbol" pitchFamily="18" charset="2"/>
               </a:rPr>
-              <a:t>a abordagem estatística </a:t>
-            </a:r>
-            <a:r>
-              <a:rPr lang="pt-BR" altLang="pt-BR" sz="2000" dirty="0" smtClean="0">
-                <a:cs typeface="Times New Roman" charset="0"/>
-                <a:sym typeface="Symbol" pitchFamily="18" charset="2"/>
-              </a:rPr>
-              <a:t>previamente permitirá </a:t>
-            </a:r>
-            <a:r>
-              <a:rPr lang="pt-BR" altLang="pt-BR" sz="2000" dirty="0">
-                <a:cs typeface="Times New Roman" charset="0"/>
-                <a:sym typeface="Symbol" pitchFamily="18" charset="2"/>
-              </a:rPr>
-              <a:t>que você planeje a forma como você </a:t>
-            </a:r>
-            <a:r>
-              <a:rPr lang="pt-BR" altLang="pt-BR" sz="2000" dirty="0" smtClean="0">
-                <a:cs typeface="Times New Roman" charset="0"/>
-                <a:sym typeface="Symbol" pitchFamily="18" charset="2"/>
-              </a:rPr>
-              <a:t>deve coletar </a:t>
-            </a:r>
-            <a:r>
-              <a:rPr lang="pt-BR" altLang="pt-BR" sz="2000" dirty="0">
-                <a:cs typeface="Times New Roman" charset="0"/>
-                <a:sym typeface="Symbol" pitchFamily="18" charset="2"/>
-              </a:rPr>
-              <a:t>seus </a:t>
-            </a:r>
-            <a:r>
-              <a:rPr lang="pt-BR" altLang="pt-BR" sz="2000" dirty="0" smtClean="0">
-                <a:cs typeface="Times New Roman" charset="0"/>
-                <a:sym typeface="Symbol" pitchFamily="18" charset="2"/>
-              </a:rPr>
-              <a:t>dados</a:t>
+              <a:t>As análises estatísticas têm diferentes pré-requisitos relacionados ao tipo de dado analisado, tamanho da amostra e natureza de relacionamento desses dados. Conhecer a abordagem estatística previamente permitirá que você planeje a forma como você deve coletar seus dados</a:t>
             </a:r>
           </a:p>
         </p:txBody>
@@ -38518,17 +38766,19 @@
               <a:buNone/>
             </a:pPr>
             <a:r>
-              <a:rPr lang="pt-BR" altLang="pt-BR" sz="2000" kern="0" dirty="0" smtClean="0">
+              <a:rPr lang="pt-BR" altLang="pt-BR" sz="2000" kern="0" dirty="0">
                 <a:solidFill>
                   <a:srgbClr val="FF0000"/>
                 </a:solidFill>
+                <a:latin typeface="Tahoma" panose="020B0604030504040204" pitchFamily="34" charset="0"/>
                 <a:cs typeface="Times New Roman" charset="0"/>
                 <a:sym typeface="Symbol" pitchFamily="18" charset="2"/>
               </a:rPr>
               <a:t>Cuidado!</a:t>
             </a:r>
             <a:r>
-              <a:rPr lang="pt-BR" altLang="pt-BR" sz="2000" kern="0" dirty="0" smtClean="0">
+              <a:rPr lang="pt-BR" altLang="pt-BR" sz="2000" kern="0" dirty="0">
+                <a:latin typeface="Tahoma" panose="020B0604030504040204" pitchFamily="34" charset="0"/>
                 <a:cs typeface="Times New Roman" charset="0"/>
                 <a:sym typeface="Symbol" pitchFamily="18" charset="2"/>
               </a:rPr>
@@ -38538,6 +38788,7 @@
               <a:solidFill>
                 <a:srgbClr val="FF0000"/>
               </a:solidFill>
+              <a:latin typeface="Tahoma" panose="020B0604030504040204" pitchFamily="34" charset="0"/>
               <a:cs typeface="Times New Roman" charset="0"/>
               <a:sym typeface="Symbol" pitchFamily="18" charset="2"/>
             </a:endParaRPr>
@@ -38761,7 +39012,7 @@
               <a:defRPr/>
             </a:pPr>
             <a:r>
-              <a:rPr lang="pt-BR" dirty="0" smtClean="0"/>
+              <a:rPr lang="pt-BR" dirty="0"/>
               <a:t>Definição Clássica de Estatística</a:t>
             </a:r>
           </a:p>
@@ -38987,15 +39238,18 @@
               <a:buNone/>
             </a:pPr>
             <a:r>
-              <a:rPr lang="pt-BR" altLang="pt-BR" sz="2000" kern="0" dirty="0" smtClean="0">
+              <a:rPr lang="pt-BR" altLang="pt-BR" sz="2000" kern="0" dirty="0">
                 <a:solidFill>
                   <a:srgbClr val="FF0000"/>
                 </a:solidFill>
+                <a:latin typeface="Tahoma" panose="020B0604030504040204" pitchFamily="34" charset="0"/>
               </a:rPr>
               <a:t>Estatística</a:t>
             </a:r>
             <a:r>
-              <a:rPr lang="pt-BR" altLang="pt-BR" sz="2000" kern="0" dirty="0" smtClean="0"/>
+              <a:rPr lang="pt-BR" altLang="pt-BR" sz="2000" kern="0" dirty="0">
+                <a:latin typeface="Tahoma" panose="020B0604030504040204" pitchFamily="34" charset="0"/>
+              </a:rPr>
               <a:t> é a ciência que investiga os processos de obtenção, organização e análise de dados sobre uma população, e os métodos de tirar conclusões ou fazer predições com base nesses dados.</a:t>
             </a:r>
           </a:p>
@@ -39171,7 +39425,9 @@
               <a:buNone/>
             </a:pPr>
             <a:r>
-              <a:rPr lang="pt-BR" altLang="pt-BR" sz="2400" dirty="0"/>
+              <a:rPr lang="pt-BR" altLang="pt-BR" sz="2400" dirty="0">
+                <a:latin typeface="Tahoma" panose="020B0604030504040204" pitchFamily="34" charset="0"/>
+              </a:rPr>
               <a:t>Estatística Descritiva X </a:t>
             </a:r>
             <a:r>
@@ -39179,6 +39435,7 @@
                 <a:solidFill>
                   <a:srgbClr val="FF3300"/>
                 </a:solidFill>
+                <a:latin typeface="Tahoma" panose="020B0604030504040204" pitchFamily="34" charset="0"/>
               </a:rPr>
               <a:t>Estatística Inferencial</a:t>
             </a:r>
@@ -39188,14 +39445,18 @@
               <a:buFontTx/>
               <a:buNone/>
             </a:pPr>
-            <a:endParaRPr lang="pt-BR" altLang="pt-BR" sz="2400" dirty="0"/>
+            <a:endParaRPr lang="pt-BR" altLang="pt-BR" sz="2400" dirty="0">
+              <a:latin typeface="Tahoma" panose="020B0604030504040204" pitchFamily="34" charset="0"/>
+            </a:endParaRPr>
           </a:p>
           <a:p>
             <a:pPr eaLnBrk="1" hangingPunct="1">
               <a:buFontTx/>
               <a:buNone/>
             </a:pPr>
-            <a:endParaRPr lang="pt-BR" altLang="pt-BR" sz="2400" dirty="0"/>
+            <a:endParaRPr lang="pt-BR" altLang="pt-BR" sz="2400" dirty="0">
+              <a:latin typeface="Tahoma" panose="020B0604030504040204" pitchFamily="34" charset="0"/>
+            </a:endParaRPr>
           </a:p>
         </p:txBody>
       </p:sp>
@@ -39376,7 +39637,7 @@
               <a:defRPr/>
             </a:pPr>
             <a:r>
-              <a:rPr lang="pt-BR" dirty="0" smtClean="0"/>
+              <a:rPr lang="pt-BR" dirty="0"/>
               <a:t>Para que Estatística em SR?</a:t>
             </a:r>
           </a:p>
@@ -39555,7 +39816,9 @@
               </a:spcBef>
             </a:pPr>
             <a:r>
-              <a:rPr lang="pt-BR" altLang="pt-BR" sz="2000" dirty="0"/>
+              <a:rPr lang="pt-BR" altLang="pt-BR" sz="2000" dirty="0">
+                <a:latin typeface="Tahoma" panose="020B0604030504040204" pitchFamily="34" charset="0"/>
+              </a:rPr>
               <a:t>caracterizar um fenômeno</a:t>
             </a:r>
           </a:p>
@@ -39568,27 +39831,27 @@
               <a:buNone/>
             </a:pPr>
             <a:r>
-              <a:rPr lang="pt-BR" altLang="pt-BR" sz="1600" dirty="0" err="1"/>
+              <a:rPr lang="pt-BR" altLang="pt-BR" sz="1600" dirty="0" err="1">
+                <a:latin typeface="Tahoma" panose="020B0604030504040204" pitchFamily="34" charset="0"/>
+              </a:rPr>
               <a:t>ex</a:t>
             </a:r>
             <a:r>
-              <a:rPr lang="pt-BR" altLang="pt-BR" sz="1600" dirty="0"/>
-              <a:t>: q</a:t>
+              <a:rPr lang="pt-BR" altLang="pt-BR" sz="1600" dirty="0">
+                <a:latin typeface="Tahoma" panose="020B0604030504040204" pitchFamily="34" charset="0"/>
+              </a:rPr>
+              <a:t>: qual o </a:t>
             </a:r>
             <a:r>
-              <a:rPr lang="pt-BR" altLang="pt-BR" sz="1600" dirty="0" smtClean="0"/>
-              <a:t>ual </a:t>
-            </a:r>
-            <a:r>
-              <a:rPr lang="pt-BR" altLang="pt-BR" sz="1600" dirty="0"/>
-              <a:t>o </a:t>
-            </a:r>
-            <a:r>
-              <a:rPr lang="pt-BR" altLang="pt-BR" sz="1600" dirty="0" err="1"/>
+              <a:rPr lang="pt-BR" altLang="pt-BR" sz="1600" dirty="0" err="1">
+                <a:latin typeface="Tahoma" panose="020B0604030504040204" pitchFamily="34" charset="0"/>
+              </a:rPr>
               <a:t>retroespalhamento</a:t>
             </a:r>
             <a:r>
-              <a:rPr lang="pt-BR" altLang="pt-BR" sz="1600" dirty="0"/>
+              <a:rPr lang="pt-BR" altLang="pt-BR" sz="1600" dirty="0">
+                <a:latin typeface="Tahoma" panose="020B0604030504040204" pitchFamily="34" charset="0"/>
+              </a:rPr>
               <a:t> de áreas florestais em dados JERS?</a:t>
             </a:r>
           </a:p>
@@ -39785,8 +40048,94 @@
                 <a:buNone/>
               </a:pPr>
               <a:r>
-                <a:rPr lang="pt-BR" altLang="pt-BR" sz="700"/>
-                <a:t>Fonte: Santos et al. Savanna and tropical rainforest biomass estimation and spatialization using JERS-1 data. Int. J. Remote Sensing, 23(7):1217-1229. 2002</a:t>
+                <a:rPr lang="pt-BR" altLang="pt-BR" sz="700" dirty="0">
+                  <a:latin typeface="Tahoma" panose="020B0604030504040204" pitchFamily="34" charset="0"/>
+                </a:rPr>
+                <a:t>Fonte: Santos et al. </a:t>
+              </a:r>
+              <a:r>
+                <a:rPr lang="pt-BR" altLang="pt-BR" sz="700" dirty="0" err="1">
+                  <a:latin typeface="Tahoma" panose="020B0604030504040204" pitchFamily="34" charset="0"/>
+                </a:rPr>
+                <a:t>Savanna</a:t>
+              </a:r>
+              <a:r>
+                <a:rPr lang="pt-BR" altLang="pt-BR" sz="700" dirty="0">
+                  <a:latin typeface="Tahoma" panose="020B0604030504040204" pitchFamily="34" charset="0"/>
+                </a:rPr>
+                <a:t> and tropical </a:t>
+              </a:r>
+              <a:r>
+                <a:rPr lang="pt-BR" altLang="pt-BR" sz="700" dirty="0" err="1">
+                  <a:latin typeface="Tahoma" panose="020B0604030504040204" pitchFamily="34" charset="0"/>
+                </a:rPr>
+                <a:t>rainforest</a:t>
+              </a:r>
+              <a:r>
+                <a:rPr lang="pt-BR" altLang="pt-BR" sz="700" dirty="0">
+                  <a:latin typeface="Tahoma" panose="020B0604030504040204" pitchFamily="34" charset="0"/>
+                </a:rPr>
+                <a:t> </a:t>
+              </a:r>
+              <a:r>
+                <a:rPr lang="pt-BR" altLang="pt-BR" sz="700" dirty="0" err="1">
+                  <a:latin typeface="Tahoma" panose="020B0604030504040204" pitchFamily="34" charset="0"/>
+                </a:rPr>
+                <a:t>biomass</a:t>
+              </a:r>
+              <a:r>
+                <a:rPr lang="pt-BR" altLang="pt-BR" sz="700" dirty="0">
+                  <a:latin typeface="Tahoma" panose="020B0604030504040204" pitchFamily="34" charset="0"/>
+                </a:rPr>
+                <a:t> </a:t>
+              </a:r>
+              <a:r>
+                <a:rPr lang="pt-BR" altLang="pt-BR" sz="700" dirty="0" err="1">
+                  <a:latin typeface="Tahoma" panose="020B0604030504040204" pitchFamily="34" charset="0"/>
+                </a:rPr>
+                <a:t>estimation</a:t>
+              </a:r>
+              <a:r>
+                <a:rPr lang="pt-BR" altLang="pt-BR" sz="700" dirty="0">
+                  <a:latin typeface="Tahoma" panose="020B0604030504040204" pitchFamily="34" charset="0"/>
+                </a:rPr>
+                <a:t> and </a:t>
+              </a:r>
+              <a:r>
+                <a:rPr lang="pt-BR" altLang="pt-BR" sz="700" dirty="0" err="1">
+                  <a:latin typeface="Tahoma" panose="020B0604030504040204" pitchFamily="34" charset="0"/>
+                </a:rPr>
+                <a:t>spatialization</a:t>
+              </a:r>
+              <a:r>
+                <a:rPr lang="pt-BR" altLang="pt-BR" sz="700" dirty="0">
+                  <a:latin typeface="Tahoma" panose="020B0604030504040204" pitchFamily="34" charset="0"/>
+                </a:rPr>
+                <a:t> </a:t>
+              </a:r>
+              <a:r>
+                <a:rPr lang="pt-BR" altLang="pt-BR" sz="700" dirty="0" err="1">
+                  <a:latin typeface="Tahoma" panose="020B0604030504040204" pitchFamily="34" charset="0"/>
+                </a:rPr>
+                <a:t>using</a:t>
+              </a:r>
+              <a:r>
+                <a:rPr lang="pt-BR" altLang="pt-BR" sz="700" dirty="0">
+                  <a:latin typeface="Tahoma" panose="020B0604030504040204" pitchFamily="34" charset="0"/>
+                </a:rPr>
+                <a:t> JERS-1 data. Int. J. Remote </a:t>
+              </a:r>
+              <a:r>
+                <a:rPr lang="pt-BR" altLang="pt-BR" sz="700" dirty="0" err="1">
+                  <a:latin typeface="Tahoma" panose="020B0604030504040204" pitchFamily="34" charset="0"/>
+                </a:rPr>
+                <a:t>Sensing</a:t>
+              </a:r>
+              <a:r>
+                <a:rPr lang="pt-BR" altLang="pt-BR" sz="700" dirty="0">
+                  <a:latin typeface="Tahoma" panose="020B0604030504040204" pitchFamily="34" charset="0"/>
+                </a:rPr>
+                <a:t>, 23(7):1217-1229. 2002</a:t>
               </a:r>
             </a:p>
           </p:txBody>

--- a/ppt/01Introd.pptx
+++ b/ppt/01Introd.pptx
@@ -172,74 +172,43 @@
 </p:presentation>
 </file>
 
+<file path=ppt/revisionInfo.xml><?xml version="1.0" encoding="utf-8"?>
+<p1510:revInfo xmlns:a="http://schemas.openxmlformats.org/drawingml/2006/main" xmlns:r="http://schemas.openxmlformats.org/officeDocument/2006/relationships" xmlns:p1510="http://schemas.microsoft.com/office/powerpoint/2015/10/main">
+  <p1510:revLst>
+    <p1510:client id="{EFAFC372-655C-4CBC-828A-E269E49291DF}" v="1" dt="2026-05-18T17:12:04.229"/>
+  </p1510:revLst>
+</p1510:revInfo>
+</file>
+
 <file path=ppt/changesInfos/changesInfo1.xml><?xml version="1.0" encoding="utf-8"?>
 <pc:chgInfo xmlns:a="http://schemas.openxmlformats.org/drawingml/2006/main" xmlns:r="http://schemas.openxmlformats.org/officeDocument/2006/relationships" xmlns:ac="http://schemas.microsoft.com/office/drawing/2013/main/command" xmlns:pc="http://schemas.microsoft.com/office/powerpoint/2013/main/command">
   <pc:docChgLst>
-    <pc:chgData name="Camilo Daleles Rennó" userId="eac9aab033b2f962" providerId="LiveId" clId="{64033B45-E883-4C0D-9950-A0CEA7D2DB48}"/>
+    <pc:chgData name="Camilo Daleles Rennó" userId="eac9aab033b2f962" providerId="LiveId" clId="{2F84B5F6-56BC-4922-A3EF-887C69771227}"/>
     <pc:docChg chg="custSel modSld">
-      <pc:chgData name="Camilo Daleles Rennó" userId="eac9aab033b2f962" providerId="LiveId" clId="{64033B45-E883-4C0D-9950-A0CEA7D2DB48}" dt="2025-05-08T13:24:23.060" v="267" actId="20577"/>
+      <pc:chgData name="Camilo Daleles Rennó" userId="eac9aab033b2f962" providerId="LiveId" clId="{2F84B5F6-56BC-4922-A3EF-887C69771227}" dt="2026-05-18T17:12:04.229" v="1"/>
       <pc:docMkLst>
         <pc:docMk/>
       </pc:docMkLst>
       <pc:sldChg chg="addSp delSp modSp mod">
-        <pc:chgData name="Camilo Daleles Rennó" userId="eac9aab033b2f962" providerId="LiveId" clId="{64033B45-E883-4C0D-9950-A0CEA7D2DB48}" dt="2025-05-08T13:24:23.060" v="267" actId="20577"/>
+        <pc:chgData name="Camilo Daleles Rennó" userId="eac9aab033b2f962" providerId="LiveId" clId="{2F84B5F6-56BC-4922-A3EF-887C69771227}" dt="2026-05-18T17:12:04.229" v="1"/>
         <pc:sldMkLst>
           <pc:docMk/>
           <pc:sldMk cId="0" sldId="345"/>
         </pc:sldMkLst>
         <pc:spChg chg="add mod">
-          <ac:chgData name="Camilo Daleles Rennó" userId="eac9aab033b2f962" providerId="LiveId" clId="{64033B45-E883-4C0D-9950-A0CEA7D2DB48}" dt="2025-05-08T13:24:23.060" v="267" actId="20577"/>
+          <ac:chgData name="Camilo Daleles Rennó" userId="eac9aab033b2f962" providerId="LiveId" clId="{2F84B5F6-56BC-4922-A3EF-887C69771227}" dt="2026-05-18T17:12:04.229" v="1"/>
+          <ac:spMkLst>
+            <pc:docMk/>
+            <pc:sldMk cId="0" sldId="345"/>
+            <ac:spMk id="2" creationId="{4A9F4FDC-2743-6781-B52F-8A3327BA0CC8}"/>
+          </ac:spMkLst>
+        </pc:spChg>
+        <pc:spChg chg="del">
+          <ac:chgData name="Camilo Daleles Rennó" userId="eac9aab033b2f962" providerId="LiveId" clId="{2F84B5F6-56BC-4922-A3EF-887C69771227}" dt="2026-05-18T17:12:02.994" v="0" actId="478"/>
           <ac:spMkLst>
             <pc:docMk/>
             <pc:sldMk cId="0" sldId="345"/>
             <ac:spMk id="5" creationId="{EA66F297-70DE-516E-F0CB-9F2F383A57D3}"/>
-          </ac:spMkLst>
-        </pc:spChg>
-        <pc:spChg chg="mod">
-          <ac:chgData name="Camilo Daleles Rennó" userId="eac9aab033b2f962" providerId="LiveId" clId="{64033B45-E883-4C0D-9950-A0CEA7D2DB48}" dt="2025-05-07T16:15:04.471" v="1" actId="20577"/>
-          <ac:spMkLst>
-            <pc:docMk/>
-            <pc:sldMk cId="0" sldId="345"/>
-            <ac:spMk id="3074" creationId="{00000000-0000-0000-0000-000000000000}"/>
-          </ac:spMkLst>
-        </pc:spChg>
-      </pc:sldChg>
-      <pc:sldChg chg="modSp modAnim">
-        <pc:chgData name="Camilo Daleles Rennó" userId="eac9aab033b2f962" providerId="LiveId" clId="{64033B45-E883-4C0D-9950-A0CEA7D2DB48}" dt="2025-05-08T13:14:34.934" v="139" actId="20577"/>
-        <pc:sldMkLst>
-          <pc:docMk/>
-          <pc:sldMk cId="4128775123" sldId="376"/>
-        </pc:sldMkLst>
-        <pc:spChg chg="mod">
-          <ac:chgData name="Camilo Daleles Rennó" userId="eac9aab033b2f962" providerId="LiveId" clId="{64033B45-E883-4C0D-9950-A0CEA7D2DB48}" dt="2025-05-08T13:14:34.934" v="139" actId="20577"/>
-          <ac:spMkLst>
-            <pc:docMk/>
-            <pc:sldMk cId="4128775123" sldId="376"/>
-            <ac:spMk id="4099" creationId="{00000000-0000-0000-0000-000000000000}"/>
-          </ac:spMkLst>
-        </pc:spChg>
-      </pc:sldChg>
-    </pc:docChg>
-  </pc:docChgLst>
-  <pc:docChgLst>
-    <pc:chgData name="Camilo Daleles Rennó" userId="eac9aab033b2f962" providerId="LiveId" clId="{15899064-E2EB-4EF7-9DCA-269F6DC9ED26}"/>
-    <pc:docChg chg="modSld">
-      <pc:chgData name="Camilo Daleles Rennó" userId="eac9aab033b2f962" providerId="LiveId" clId="{15899064-E2EB-4EF7-9DCA-269F6DC9ED26}" dt="2025-06-09T13:05:20.441" v="11" actId="20577"/>
-      <pc:docMkLst>
-        <pc:docMk/>
-      </pc:docMkLst>
-      <pc:sldChg chg="modSp mod">
-        <pc:chgData name="Camilo Daleles Rennó" userId="eac9aab033b2f962" providerId="LiveId" clId="{15899064-E2EB-4EF7-9DCA-269F6DC9ED26}" dt="2025-06-09T13:05:20.441" v="11" actId="20577"/>
-        <pc:sldMkLst>
-          <pc:docMk/>
-          <pc:sldMk cId="0" sldId="345"/>
-        </pc:sldMkLst>
-        <pc:spChg chg="mod">
-          <ac:chgData name="Camilo Daleles Rennó" userId="eac9aab033b2f962" providerId="LiveId" clId="{15899064-E2EB-4EF7-9DCA-269F6DC9ED26}" dt="2025-06-09T13:05:20.441" v="11" actId="20577"/>
-          <ac:spMkLst>
-            <pc:docMk/>
-            <pc:sldMk cId="0" sldId="345"/>
-            <ac:spMk id="3074" creationId="{00000000-0000-0000-0000-000000000000}"/>
           </ac:spMkLst>
         </pc:spChg>
       </pc:sldChg>
@@ -346,7 +315,7 @@
               <a:pPr>
                 <a:defRPr/>
               </a:pPr>
-              <a:t>09/06/2025</a:t>
+              <a:t>18/05/2026</a:t>
             </a:fld>
             <a:endParaRPr lang="pt-BR" dirty="0"/>
           </a:p>
@@ -4152,10 +4121,10 @@
       </p:sp>
       <p:sp>
         <p:nvSpPr>
-          <p:cNvPr id="5" name="Rectangle 3">
+          <p:cNvPr id="2" name="Rectangle 3">
             <a:extLst>
               <a:ext uri="{FF2B5EF4-FFF2-40B4-BE49-F238E27FC236}">
-                <a16:creationId xmlns:a16="http://schemas.microsoft.com/office/drawing/2014/main" id="{EA66F297-70DE-516E-F0CB-9F2F383A57D3}"/>
+                <a16:creationId xmlns:a16="http://schemas.microsoft.com/office/drawing/2014/main" id="{4A9F4FDC-2743-6781-B52F-8A3327BA0CC8}"/>
               </a:ext>
             </a:extLst>
           </p:cNvPr>
@@ -4166,8 +4135,8 @@
         </p:nvSpPr>
         <p:spPr bwMode="auto">
           <a:xfrm>
-            <a:off x="4427984" y="5903913"/>
-            <a:ext cx="4487416" cy="838200"/>
+            <a:off x="3851920" y="5903913"/>
+            <a:ext cx="5063480" cy="838200"/>
           </a:xfrm>
           <a:prstGeom prst="rect">
             <a:avLst/>
@@ -4260,65 +4229,14 @@
               <a:t>acesso do conteúdo do curso em </a:t>
             </a:r>
             <a:r>
-              <a:rPr lang="pt-BR" sz="1200" kern="0" dirty="0" err="1">
-                <a:solidFill>
-                  <a:schemeClr val="accent2"/>
-                </a:solidFill>
-                <a:latin typeface="Arial Unicode MS" pitchFamily="34" charset="-128"/>
-                <a:hlinkClick r:id="rId2">
-                  <a:extLst>
-                    <a:ext uri="{A12FA001-AC4F-418D-AE19-62706E023703}">
-                      <ahyp:hlinkClr xmlns:ahyp="http://schemas.microsoft.com/office/drawing/2018/hyperlinkcolor" val="tx"/>
-                    </a:ext>
-                  </a:extLst>
-                </a:hlinkClick>
-              </a:rPr>
-              <a:t>Bibdigital</a:t>
-            </a:r>
-            <a:r>
               <a:rPr lang="pt-BR" sz="1200" kern="0" dirty="0">
                 <a:solidFill>
                   <a:schemeClr val="accent2"/>
                 </a:solidFill>
                 <a:latin typeface="Arial Unicode MS" pitchFamily="34" charset="-128"/>
-                <a:hlinkClick r:id="rId2">
-                  <a:extLst>
-                    <a:ext uri="{A12FA001-AC4F-418D-AE19-62706E023703}">
-                      <ahyp:hlinkClr xmlns:ahyp="http://schemas.microsoft.com/office/drawing/2018/hyperlinkcolor" val="tx"/>
-                    </a:ext>
-                  </a:extLst>
-                </a:hlinkClick>
               </a:rPr>
-              <a:t> do INPE</a:t>
+              <a:t>https://cdrenno.github.io/Estatistica/</a:t>
             </a:r>
-            <a:r>
-              <a:rPr lang="pt-BR" sz="1200" kern="0" dirty="0">
-                <a:latin typeface="Arial Unicode MS" pitchFamily="34" charset="-128"/>
-              </a:rPr>
-              <a:t> ou </a:t>
-            </a:r>
-            <a:r>
-              <a:rPr lang="pt-BR" sz="1200" kern="0" dirty="0">
-                <a:solidFill>
-                  <a:schemeClr val="accent2"/>
-                </a:solidFill>
-                <a:latin typeface="Arial Unicode MS" pitchFamily="34" charset="-128"/>
-                <a:hlinkClick r:id="rId3">
-                  <a:extLst>
-                    <a:ext uri="{A12FA001-AC4F-418D-AE19-62706E023703}">
-                      <ahyp:hlinkClr xmlns:ahyp="http://schemas.microsoft.com/office/drawing/2018/hyperlinkcolor" val="tx"/>
-                    </a:ext>
-                  </a:extLst>
-                </a:hlinkClick>
-              </a:rPr>
-              <a:t>GitHub</a:t>
-            </a:r>
-            <a:endParaRPr lang="pt-BR" sz="1200" kern="0" dirty="0">
-              <a:solidFill>
-                <a:schemeClr val="accent2"/>
-              </a:solidFill>
-              <a:latin typeface="Arial Unicode MS" pitchFamily="34" charset="-128"/>
-            </a:endParaRPr>
           </a:p>
         </p:txBody>
       </p:sp>
